--- a/docs/investors/KAIROS_Investor_Deck.pptx
+++ b/docs/investors/KAIROS_Investor_Deck.pptx
@@ -9492,6 +9492,143 @@
                 <a:ea typeface="Segoe UI"/>
               </a:rPr>
               <a:t>Our own audit caught it before a live account paid for it. That is the product.</a:t>
+            </a:r>
+          </a:p>
+        </p:txBody>
+      </p:sp>
+      <p:sp>
+        <p:nvSpPr>
+          <p:cNvPr id="17" name="Shape 17">
+            <a:extLst>
+              <a:ext uri="{FF2B5EF4-FFF2-40B4-BE49-F238E27FC236}">
+                <a16:creationId xmlns:a16="http://schemas.microsoft.com/office/drawing/2014/main" id="{22EC8335-72F2-460D-B031-1C4EBA5F0A03}"/>
+              </a:ext>
+            </a:extLst>
+          </p:cNvPr>
+          <p:cNvSpPr/>
+          <p:nvPr/>
+        </p:nvSpPr>
+        <p:spPr>
+          <a:xfrm>
+            <a:off x="762000" y="4476750"/>
+            <a:ext cx="4191000" cy="1809750"/>
+          </a:xfrm>
+          <a:prstGeom prst="rect">
+            <a:avLst/>
+          </a:prstGeom>
+          <a:solidFill>
+            <a:srgbClr val="11151D"/>
+          </a:solidFill>
+          <a:ln w="12700">
+            <a:solidFill>
+              <a:srgbClr val="3A3222"/>
+            </a:solidFill>
+          </a:ln>
+        </p:spPr>
+        <p:txBody>
+          <a:bodyPr wrap="square" rtlCol="0"/>
+          <a:lstStyle/>
+          <a:p>
+            <a:r>
+              <a:rPr/>
+              <a:t/>
+            </a:r>
+          </a:p>
+        </p:txBody>
+      </p:sp>
+      <p:sp>
+        <p:nvSpPr>
+          <p:cNvPr id="18" name="TextBox 18">
+            <a:extLst>
+              <a:ext uri="{FF2B5EF4-FFF2-40B4-BE49-F238E27FC236}">
+                <a16:creationId xmlns:a16="http://schemas.microsoft.com/office/drawing/2014/main" id="{F1BF8D94-371C-48A6-9EB9-44681AF8EA05}"/>
+              </a:ext>
+            </a:extLst>
+          </p:cNvPr>
+          <p:cNvSpPr txBox="1"/>
+          <p:nvPr/>
+        </p:nvSpPr>
+        <p:spPr>
+          <a:xfrm>
+            <a:off x="1047750" y="4665250"/>
+            <a:ext cx="3619500" cy="285750"/>
+          </a:xfrm>
+        </p:spPr>
+        <p:txBody>
+          <a:bodyPr wrap="square" rtlCol="0"/>
+          <a:lstStyle/>
+          <a:p>
+            <a:pPr algn="l"/>
+            <a:r>
+              <a:rPr sz="1200" b="1">
+                <a:solidFill>
+                  <a:srgbClr val="F0B429"/>
+                </a:solidFill>
+              </a:rPr>
+              <a:t>AND THEN EIGHT MORE</a:t>
+            </a:r>
+          </a:p>
+        </p:txBody>
+      </p:sp>
+      <p:sp>
+        <p:nvSpPr>
+          <p:cNvPr id="19" name="TextBox 19">
+            <a:extLst>
+              <a:ext uri="{FF2B5EF4-FFF2-40B4-BE49-F238E27FC236}">
+                <a16:creationId xmlns:a16="http://schemas.microsoft.com/office/drawing/2014/main" id="{B2E3A14A-E3E6-47D8-B5BD-23D8C13F16BE}"/>
+              </a:ext>
+            </a:extLst>
+          </p:cNvPr>
+          <p:cNvSpPr txBox="1"/>
+          <p:nvPr/>
+        </p:nvSpPr>
+        <p:spPr>
+          <a:xfrm>
+            <a:off x="1047750" y="4933950"/>
+            <a:ext cx="3619500" cy="1295400"/>
+          </a:xfrm>
+        </p:spPr>
+        <p:txBody>
+          <a:bodyPr wrap="square" rtlCol="0">
+            <a:normAutofit/>
+          </a:bodyPr>
+          <a:lstStyle/>
+          <a:p>
+            <a:pPr algn="l"/>
+            <a:r>
+              <a:rPr sz="1100">
+                <a:solidFill>
+                  <a:srgbClr val="8B94A6"/>
+                </a:solidFill>
+              </a:rPr>
+              <a:t>•Risk limits froze at process start, so a tightened loss cap bound only after a restart.</a:t>
+            </a:r>
+            <a:br/>
+            <a:r>
+              <a:rPr sz="1100">
+                <a:solidFill>
+                  <a:srgbClr val="8B94A6"/>
+                </a:solidFill>
+              </a:rPr>
+              <a:t>•The test suite could arm live mode and write into the production audit trail.</a:t>
+            </a:r>
+            <a:br/>
+            <a:r>
+              <a:rPr sz="1100">
+                <a:solidFill>
+                  <a:srgbClr val="8B94A6"/>
+                </a:solidFill>
+              </a:rPr>
+              <a:t>•A restart reported LIVE while running paper.</a:t>
+            </a:r>
+            <a:br/>
+            <a:r>
+              <a:rPr sz="1100">
+                <a:solidFill>
+                  <a:srgbClr val="8B94A6"/>
+                </a:solidFill>
+              </a:rPr>
+              <a:t>•The live broker account number sat in a committed test fixture.</a:t>
             </a:r>
           </a:p>
         </p:txBody>

--- a/docs/investors/KAIROS_Investor_Deck.pptx
+++ b/docs/investors/KAIROS_Investor_Deck.pptx
@@ -9565,7 +9565,7 @@
                   <a:srgbClr val="F0B429"/>
                 </a:solidFill>
               </a:rPr>
-              <a:t>AND THEN EIGHT MORE</a:t>
+              <a:t>AND THEN NINE MORE</a:t>
             </a:r>
           </a:p>
         </p:txBody>
@@ -9596,7 +9596,7 @@
           <a:p>
             <a:pPr algn="l"/>
             <a:r>
-              <a:rPr sz="1100">
+              <a:rPr sz="1000">
                 <a:solidFill>
                   <a:srgbClr val="8B94A6"/>
                 </a:solidFill>
@@ -9605,16 +9605,25 @@
             </a:r>
             <a:br/>
             <a:r>
-              <a:rPr sz="1100">
+              <a:rPr sz="1000">
                 <a:solidFill>
                   <a:srgbClr val="8B94A6"/>
                 </a:solidFill>
               </a:rPr>
+              <a:t>•Ledgers were written in place — a torn write reset the paper book to full capital.</a:t>
+            </a:r>
+            <a:br/>
+            <a:r>
+              <a:rPr sz="1000">
+                <a:solidFill>
+                  <a:srgbClr val="8B94A6"/>
+                </a:solidFill>
+              </a:rPr>
               <a:t>•The test suite could arm live mode and write into the production audit trail.</a:t>
             </a:r>
             <a:br/>
             <a:r>
-              <a:rPr sz="1100">
+              <a:rPr sz="1000">
                 <a:solidFill>
                   <a:srgbClr val="8B94A6"/>
                 </a:solidFill>
@@ -9623,12 +9632,12 @@
             </a:r>
             <a:br/>
             <a:r>
-              <a:rPr sz="1100">
+              <a:rPr sz="1000">
                 <a:solidFill>
                   <a:srgbClr val="8B94A6"/>
                 </a:solidFill>
               </a:rPr>
-              <a:t>•The live broker account number sat in a committed test fixture.</a:t>
+              <a:t>•The live broker account number sat in a committed fixture.</a:t>
             </a:r>
           </a:p>
         </p:txBody>

--- a/docs/investors/KAIROS_Investor_Deck.pptx
+++ b/docs/investors/KAIROS_Investor_Deck.pptx
@@ -4384,7 +4384,7 @@
                 <a:latin typeface="Segoe UI"/>
                 <a:ea typeface="Segoe UI"/>
               </a:rPr>
-              <a:t>The journal grows on its own every ten minutes: 890 predictions recorded, 140 horizons matured, zero directional calls resolved so far. Nobody has to trust a slide to check this number; it prints itself, and it will print the losses too.</a:t>
+              <a:t>The journal grows on its own every ten minutes: 1,018 predictions recorded, 140 horizons matured, zero directional calls resolved so far. Nobody has to trust a slide to check this number; it prints itself, and it will print the losses too.</a:t>
             </a:r>
           </a:p>
         </p:txBody>
@@ -4672,7 +4672,7 @@
                 <a:latin typeface="Consolas"/>
                 <a:ea typeface="Consolas"/>
               </a:rPr>
-              <a:t>python -m pytest tests -q        # 87 tests</a:t>
+              <a:t>python -m pytest tests -q        # 121 tests</a:t>
             </a:r>
           </a:p>
           <a:p>
@@ -5751,7 +5751,7 @@
                 <a:latin typeface="Consolas"/>
                 <a:ea typeface="Consolas"/>
               </a:rPr>
-              <a:t>10,584</a:t>
+              <a:t>10,691</a:t>
             </a:r>
           </a:p>
           <a:p>
@@ -5788,7 +5788,7 @@
                 <a:latin typeface="Segoe UI"/>
                 <a:ea typeface="Segoe UI"/>
               </a:rPr>
-              <a:t>34 modules, public under MIT, no closed core</a:t>
+              <a:t>35 modules, public under MIT, no closed core</a:t>
             </a:r>
           </a:p>
         </p:txBody>
@@ -6015,7 +6015,7 @@
                 <a:latin typeface="Consolas"/>
                 <a:ea typeface="Consolas"/>
               </a:rPr>
-              <a:t>87</a:t>
+              <a:t>121</a:t>
             </a:r>
           </a:p>
           <a:p>
@@ -8564,7 +8564,7 @@
                 <a:latin typeface="Segoe UI"/>
                 <a:ea typeface="Segoe UI"/>
               </a:rPr>
-              <a:t>A public repository: 10,584 lines, 34 modules, 87 tests, MIT.</a:t>
+              <a:t>A public repository: 10,691 lines, 35 modules, 121 tests, MIT.</a:t>
             </a:r>
           </a:p>
           <a:p>
@@ -8696,7 +8696,7 @@
                 <a:latin typeface="Segoe UI"/>
                 <a:ea typeface="Segoe UI"/>
               </a:rPr>
-              <a:t>890 predictions journaled, 140 horizons matured, and all 140 were non-trades.</a:t>
+              <a:t>1,018 predictions journaled, 140 horizons matured, and all 140 were non-trades.</a:t>
             </a:r>
           </a:p>
           <a:p>
@@ -8738,7 +8738,7 @@
                 <a:latin typeface="Segoe UI"/>
                 <a:ea typeface="Segoe UI"/>
               </a:rPr>
-              <a:t>Paper book: -Rs 13.05 realized on Rs 1,000,000 across 157 cycles, 2 fills.</a:t>
+              <a:t>Paper book: -Rs 13.05 realized on Rs 1,000,000 across 168 cycles, 2 fills.</a:t>
             </a:r>
           </a:p>
           <a:p>
@@ -9511,7 +9511,7 @@
         <p:spPr>
           <a:xfrm>
             <a:off x="762000" y="4476750"/>
-            <a:ext cx="4191000" cy="1809750"/>
+            <a:ext cx="4191000" cy="1866900"/>
           </a:xfrm>
           <a:prstGeom prst="rect">
             <a:avLst/>
@@ -9565,7 +9565,7 @@
                   <a:srgbClr val="F0B429"/>
                 </a:solidFill>
               </a:rPr>
-              <a:t>AND THEN NINE MORE</a:t>
+              <a:t>AND THEN TEN MORE</a:t>
             </a:r>
           </a:p>
         </p:txBody>
@@ -9584,60 +9584,109 @@
         </p:nvSpPr>
         <p:spPr>
           <a:xfrm>
-            <a:off x="1047750" y="4933950"/>
-            <a:ext cx="3619500" cy="1295400"/>
+            <a:off x="1047750" y="4972050"/>
+            <a:ext cx="3619500" cy="1352550"/>
           </a:xfrm>
         </p:spPr>
         <p:txBody>
           <a:bodyPr wrap="square" rtlCol="0">
-            <a:normAutofit/>
+            <a:normAutofit fontScale="77500" lnSpcReduction="10000"/>
           </a:bodyPr>
           <a:lstStyle/>
           <a:p>
-            <a:pPr algn="l"/>
+            <a:pPr marL="228600" indent="-228600" algn="l">
+              <a:lnSpc>
+                <a:spcPct val="100000"/>
+              </a:lnSpc>
+              <a:buChar char="•"/>
+            </a:pPr>
             <a:r>
               <a:rPr sz="1000">
                 <a:solidFill>
                   <a:srgbClr val="8B94A6"/>
                 </a:solidFill>
               </a:rPr>
-              <a:t>•Risk limits froze at process start, so a tightened loss cap bound only after a restart.</a:t>
-            </a:r>
-            <a:br/>
+              <a:t>Risk limits froze at process start; a tightened loss cap bound only after a restart.</a:t>
+            </a:r>
+          </a:p>
+          <a:p>
+            <a:pPr marL="228600" indent="-228600" algn="l">
+              <a:lnSpc>
+                <a:spcPct val="100000"/>
+              </a:lnSpc>
+              <a:buChar char="•"/>
+            </a:pPr>
             <a:r>
               <a:rPr sz="1000">
                 <a:solidFill>
                   <a:srgbClr val="8B94A6"/>
                 </a:solidFill>
               </a:rPr>
-              <a:t>•Ledgers were written in place — a torn write reset the paper book to full capital.</a:t>
-            </a:r>
-            <a:br/>
+              <a:t>Ledgers were written in place — a torn write reset the paper book to full capital.</a:t>
+            </a:r>
+          </a:p>
+          <a:p>
+            <a:pPr marL="228600" indent="-228600" algn="l">
+              <a:lnSpc>
+                <a:spcPct val="100000"/>
+              </a:lnSpc>
+              <a:buChar char="•"/>
+            </a:pPr>
             <a:r>
               <a:rPr sz="1000">
                 <a:solidFill>
                   <a:srgbClr val="8B94A6"/>
                 </a:solidFill>
               </a:rPr>
-              <a:t>•The test suite could arm live mode and write into the production audit trail.</a:t>
-            </a:r>
-            <a:br/>
+              <a:t>The test suite could arm live mode and write the production audit trail.</a:t>
+            </a:r>
+          </a:p>
+          <a:p>
+            <a:pPr marL="228600" indent="-228600" algn="l">
+              <a:lnSpc>
+                <a:spcPct val="100000"/>
+              </a:lnSpc>
+              <a:buChar char="•"/>
+            </a:pPr>
             <a:r>
               <a:rPr sz="1000">
                 <a:solidFill>
                   <a:srgbClr val="8B94A6"/>
                 </a:solidFill>
               </a:rPr>
-              <a:t>•A restart reported LIVE while running paper.</a:t>
-            </a:r>
-            <a:br/>
+              <a:t>A restart reported LIVE while running paper.</a:t>
+            </a:r>
+          </a:p>
+          <a:p>
+            <a:pPr marL="228600" indent="-228600" algn="l">
+              <a:lnSpc>
+                <a:spcPct val="100000"/>
+              </a:lnSpc>
+              <a:buChar char="•"/>
+            </a:pPr>
             <a:r>
               <a:rPr sz="1000">
                 <a:solidFill>
                   <a:srgbClr val="8B94A6"/>
                 </a:solidFill>
               </a:rPr>
-              <a:t>•The live broker account number sat in a committed fixture.</a:t>
+              <a:t>The live broker account number sat in 8 tracked files — after we reported it fixed.</a:t>
+            </a:r>
+          </a:p>
+          <a:p>
+            <a:pPr marL="228600" indent="-228600" algn="l">
+              <a:lnSpc>
+                <a:spcPct val="100000"/>
+              </a:lnSpc>
+              <a:buChar char="•"/>
+            </a:pPr>
+            <a:r>
+              <a:rPr sz="1000">
+                <a:solidFill>
+                  <a:srgbClr val="8B94A6"/>
+                </a:solidFill>
+              </a:rPr>
+              <a:t>The credential guard only knew config values; shape rules replaced it.</a:t>
             </a:r>
           </a:p>
         </p:txBody>

--- a/docs/investors/KAIROS_Investor_Deck.pptx
+++ b/docs/investors/KAIROS_Investor_Deck.pptx
@@ -320,7 +320,7 @@
                 <a:latin typeface="Segoe UI"/>
                 <a:ea typeface="Segoe UI"/>
               </a:rPr>
-              <a:t>KAIROS v2.5.0 · 2026-10-20 · github.com/zhaider5142009-oss/kairos</a:t>
+              <a:t>KAIROS v2.6.1 · 2026-10-21 · github.com/zhaider5142009-oss/kairos</a:t>
             </a:r>
           </a:p>
         </p:txBody>
@@ -4384,7 +4384,7 @@
                 <a:latin typeface="Segoe UI"/>
                 <a:ea typeface="Segoe UI"/>
               </a:rPr>
-              <a:t>The journal grows on its own every ten minutes: 1,018 predictions recorded, 140 horizons matured, zero directional calls resolved so far. Nobody has to trust a slide to check this number; it prints itself, and it will print the losses too.</a:t>
+              <a:t>The journal grows on its own every ten minutes: every prediction is in the dated ledger; 140 horizons matured, zero directional calls resolved so far. Nobody has to trust a slide to check this number; it prints itself, and it will print the losses too.</a:t>
             </a:r>
           </a:p>
         </p:txBody>
@@ -4672,7 +4672,7 @@
                 <a:latin typeface="Consolas"/>
                 <a:ea typeface="Consolas"/>
               </a:rPr>
-              <a:t>python -m pytest tests -q        # 121 tests</a:t>
+              <a:t>python -m pytest tests -q        # 259 tests</a:t>
             </a:r>
           </a:p>
           <a:p>
@@ -5751,7 +5751,7 @@
                 <a:latin typeface="Consolas"/>
                 <a:ea typeface="Consolas"/>
               </a:rPr>
-              <a:t>10,691</a:t>
+              <a:t>12,354</a:t>
             </a:r>
           </a:p>
           <a:p>
@@ -5788,7 +5788,7 @@
                 <a:latin typeface="Segoe UI"/>
                 <a:ea typeface="Segoe UI"/>
               </a:rPr>
-              <a:t>35 modules, public under MIT, no closed core</a:t>
+              <a:t>37 modules, public under MIT, no closed core</a:t>
             </a:r>
           </a:p>
         </p:txBody>
@@ -6015,7 +6015,7 @@
                 <a:latin typeface="Consolas"/>
                 <a:ea typeface="Consolas"/>
               </a:rPr>
-              <a:t>121</a:t>
+              <a:t>259</a:t>
             </a:r>
           </a:p>
           <a:p>
@@ -6240,7 +6240,7 @@
                 <a:latin typeface="Consolas"/>
                 <a:ea typeface="Consolas"/>
               </a:rPr>
-              <a:t>figures verified against the repository on 2026-10-20</a:t>
+              <a:t>figures verified against the repository on 2026-10-21</a:t>
             </a:r>
           </a:p>
         </p:txBody>
@@ -8564,7 +8564,7 @@
                 <a:latin typeface="Segoe UI"/>
                 <a:ea typeface="Segoe UI"/>
               </a:rPr>
-              <a:t>A public repository: 10,691 lines, 35 modules, 121 tests, MIT.</a:t>
+              <a:t>A public repository: 12,354 lines, 37 modules, 259 tests, MIT.</a:t>
             </a:r>
           </a:p>
           <a:p>
@@ -8696,7 +8696,7 @@
                 <a:latin typeface="Segoe UI"/>
                 <a:ea typeface="Segoe UI"/>
               </a:rPr>
-              <a:t>1,018 predictions journaled, 140 horizons matured, and all 140 were non-trades.</a:t>
+              <a:t>140 horizons matured, and all 140 were non-trades.</a:t>
             </a:r>
           </a:p>
           <a:p>
@@ -8717,7 +8717,7 @@
                 <a:latin typeface="Segoe UI"/>
                 <a:ea typeface="Segoe UI"/>
               </a:rPr>
-              <a:t>A non-trade cannot be a correct prediction, so no directional hit rate exists.</a:t>
+              <a:t>No directional hit rate exists: a non-trade cannot be a correct prediction.</a:t>
             </a:r>
           </a:p>
           <a:p>
@@ -8738,7 +8738,7 @@
                 <a:latin typeface="Segoe UI"/>
                 <a:ea typeface="Segoe UI"/>
               </a:rPr>
-              <a:t>Paper book: -Rs 13.05 realized on Rs 1,000,000 across 168 cycles, 2 fills.</a:t>
+              <a:t>Paper book: -Rs 13.05 realized on Rs 1,000,000, 2 fills.</a:t>
             </a:r>
           </a:p>
           <a:p>
@@ -8759,7 +8759,7 @@
                 <a:latin typeface="Segoe UI"/>
                 <a:ea typeface="Segoe UI"/>
               </a:rPr>
-              <a:t>Live orders: path built, capped and staging-tested. Never exercised at scale.</a:t>
+              <a:t>Live orders: built, capped, staging-tested; never exercised at scale.</a:t>
             </a:r>
           </a:p>
           <a:p>
@@ -8777,7 +8777,25 @@
                 <a:latin typeface="Segoe UI"/>
                 <a:ea typeface="Segoe UI"/>
               </a:rPr>
-              <a:t>No audit, no team, no assets under management, no regulatory licence.</a:t>
+              <a:t>No audit, no team, no AUM, no licence.</a:t>
+            </a:r>
+          </a:p>
+          <a:p>
+            <a:pPr marL="228600" indent="-228600">
+              <a:lnSpc>
+                <a:spcPct val="135000"/>
+              </a:lnSpc>
+              <a:buChar char="•"/>
+            </a:pPr>
+            <a:r>
+              <a:rPr sz="1350">
+                <a:solidFill>
+                  <a:srgbClr val="8B94A6"/>
+                </a:solidFill>
+                <a:latin typeface="Segoe UI"/>
+                <a:ea typeface="Segoe UI"/>
+              </a:rPr>
+              <a:t>The prediction count moves every ten minutes, so the dated ledger holds it.</a:t>
             </a:r>
           </a:p>
         </p:txBody>
@@ -9565,7 +9583,7 @@
                   <a:srgbClr val="F0B429"/>
                 </a:solidFill>
               </a:rPr>
-              <a:t>AND THEN TEN MORE</a:t>
+              <a:t>AND THEN MORE, ALL BY READING</a:t>
             </a:r>
           </a:p>
         </p:txBody>
@@ -9654,7 +9672,7 @@
                   <a:srgbClr val="8B94A6"/>
                 </a:solidFill>
               </a:rPr>
-              <a:t>A restart reported LIVE while running paper.</a:t>
+              <a:t>A restart reported LIVE while running paper; a score read today's threshold as history.</a:t>
             </a:r>
           </a:p>
           <a:p>
@@ -9670,7 +9688,7 @@
                   <a:srgbClr val="8B94A6"/>
                 </a:solidFill>
               </a:rPr>
-              <a:t>The live broker account number sat in 8 tracked files — after we reported it fixed.</a:t>
+              <a:t>A suspended provider was published healthy; one strategy could never vote long.</a:t>
             </a:r>
           </a:p>
           <a:p>
@@ -9686,7 +9704,7 @@
                   <a:srgbClr val="8B94A6"/>
                 </a:solidFill>
               </a:rPr>
-              <a:t>The credential guard only knew config values; shape rules replaced it.</a:t>
+              <a:t>The guardrail against stale figures had stale figures of its own — including its date.</a:t>
             </a:r>
           </a:p>
         </p:txBody>

--- a/docs/investors/KAIROS_Investor_Deck.pptx
+++ b/docs/investors/KAIROS_Investor_Deck.pptx
@@ -374,8 +374,8 @@
         </p:nvSpPr>
         <p:spPr>
           <a:xfrm>
-            <a:off x="7620000" y="1762125"/>
-            <a:ext cx="190500" cy="2333625"/>
+            <a:off x="7620000" y="1819275"/>
+            <a:ext cx="190500" cy="2276475"/>
           </a:xfrm>
           <a:prstGeom prst="rect">
             <a:avLst/>
@@ -409,8 +409,8 @@
         </p:nvSpPr>
         <p:spPr>
           <a:xfrm>
-            <a:off x="7886700" y="2590800"/>
-            <a:ext cx="190500" cy="1504950"/>
+            <a:off x="7886700" y="2562225"/>
+            <a:ext cx="190500" cy="1533525"/>
           </a:xfrm>
           <a:prstGeom prst="rect">
             <a:avLst/>
@@ -444,8 +444,8 @@
         </p:nvSpPr>
         <p:spPr>
           <a:xfrm>
-            <a:off x="8153400" y="2781300"/>
-            <a:ext cx="190500" cy="1314450"/>
+            <a:off x="8153400" y="2695575"/>
+            <a:ext cx="190500" cy="1400175"/>
           </a:xfrm>
           <a:prstGeom prst="rect">
             <a:avLst/>
@@ -479,8 +479,8 @@
         </p:nvSpPr>
         <p:spPr>
           <a:xfrm>
-            <a:off x="8420100" y="3076575"/>
-            <a:ext cx="190500" cy="1019175"/>
+            <a:off x="8420100" y="3257550"/>
+            <a:ext cx="190500" cy="838200"/>
           </a:xfrm>
           <a:prstGeom prst="rect">
             <a:avLst/>
@@ -514,8 +514,8 @@
         </p:nvSpPr>
         <p:spPr>
           <a:xfrm>
-            <a:off x="8686800" y="3609975"/>
-            <a:ext cx="190500" cy="485775"/>
+            <a:off x="8686800" y="3448050"/>
+            <a:ext cx="190500" cy="647700"/>
           </a:xfrm>
           <a:prstGeom prst="rect">
             <a:avLst/>
@@ -549,113 +549,8 @@
         </p:nvSpPr>
         <p:spPr>
           <a:xfrm>
-            <a:off x="8953500" y="3743325"/>
-            <a:ext cx="190500" cy="352425"/>
-          </a:xfrm>
-          <a:prstGeom prst="rect">
-            <a:avLst/>
-          </a:prstGeom>
-          <a:solidFill>
-            <a:srgbClr val="2FD48A"/>
-          </a:solidFill>
-        </p:spPr>
-        <p:txBody>
-          <a:bodyPr wrap="square" rtlCol="0"/>
-          <a:lstStyle/>
-          <a:p>
-            <a:r>
-              <a:rPr/>
-              <a:t/>
-            </a:r>
-          </a:p>
-        </p:txBody>
-      </p:sp>
-      <p:sp>
-        <p:nvSpPr>
-          <p:cNvPr id="15" name="Shape 15">
-            <a:extLst>
-              <a:ext uri="{FF2B5EF4-FFF2-40B4-BE49-F238E27FC236}">
-                <a16:creationId xmlns:a16="http://schemas.microsoft.com/office/drawing/2014/main" id="{05422713-4FB9-4B7A-95AD-FB81EBAA1A8D}"/>
-              </a:ext>
-            </a:extLst>
-          </p:cNvPr>
-          <p:cNvSpPr/>
-          <p:nvPr/>
-        </p:nvSpPr>
-        <p:spPr>
-          <a:xfrm>
-            <a:off x="9220200" y="3876675"/>
-            <a:ext cx="190500" cy="219075"/>
-          </a:xfrm>
-          <a:prstGeom prst="rect">
-            <a:avLst/>
-          </a:prstGeom>
-          <a:solidFill>
-            <a:srgbClr val="2FD48A"/>
-          </a:solidFill>
-        </p:spPr>
-        <p:txBody>
-          <a:bodyPr wrap="square" rtlCol="0"/>
-          <a:lstStyle/>
-          <a:p>
-            <a:r>
-              <a:rPr/>
-              <a:t/>
-            </a:r>
-          </a:p>
-        </p:txBody>
-      </p:sp>
-      <p:sp>
-        <p:nvSpPr>
-          <p:cNvPr id="16" name="Shape 16">
-            <a:extLst>
-              <a:ext uri="{FF2B5EF4-FFF2-40B4-BE49-F238E27FC236}">
-                <a16:creationId xmlns:a16="http://schemas.microsoft.com/office/drawing/2014/main" id="{280B217D-25B0-41E0-B813-5BBF990C60B5}"/>
-              </a:ext>
-            </a:extLst>
-          </p:cNvPr>
-          <p:cNvSpPr/>
-          <p:nvPr/>
-        </p:nvSpPr>
-        <p:spPr>
-          <a:xfrm>
-            <a:off x="9486900" y="4067175"/>
-            <a:ext cx="190500" cy="28575"/>
-          </a:xfrm>
-          <a:prstGeom prst="rect">
-            <a:avLst/>
-          </a:prstGeom>
-          <a:solidFill>
-            <a:srgbClr val="5A6478"/>
-          </a:solidFill>
-        </p:spPr>
-        <p:txBody>
-          <a:bodyPr wrap="square" rtlCol="0"/>
-          <a:lstStyle/>
-          <a:p>
-            <a:r>
-              <a:rPr/>
-              <a:t/>
-            </a:r>
-          </a:p>
-        </p:txBody>
-      </p:sp>
-      <p:sp>
-        <p:nvSpPr>
-          <p:cNvPr id="17" name="Shape 17">
-            <a:extLst>
-              <a:ext uri="{FF2B5EF4-FFF2-40B4-BE49-F238E27FC236}">
-                <a16:creationId xmlns:a16="http://schemas.microsoft.com/office/drawing/2014/main" id="{D08CB9DE-C8DB-423E-8BAD-B4306B0E7D32}"/>
-              </a:ext>
-            </a:extLst>
-          </p:cNvPr>
-          <p:cNvSpPr/>
-          <p:nvPr/>
-        </p:nvSpPr>
-        <p:spPr>
-          <a:xfrm>
-            <a:off x="9753600" y="4095750"/>
-            <a:ext cx="190500" cy="28575"/>
+            <a:off x="8953500" y="4095750"/>
+            <a:ext cx="190500" cy="57150"/>
           </a:xfrm>
           <a:prstGeom prst="rect">
             <a:avLst/>
@@ -677,10 +572,10 @@
       </p:sp>
       <p:sp>
         <p:nvSpPr>
-          <p:cNvPr id="18" name="Shape 18">
-            <a:extLst>
-              <a:ext uri="{FF2B5EF4-FFF2-40B4-BE49-F238E27FC236}">
-                <a16:creationId xmlns:a16="http://schemas.microsoft.com/office/drawing/2014/main" id="{E2066A32-3B17-4AD7-AD36-BE01098C4AA9}"/>
+          <p:cNvPr id="15" name="Shape 15">
+            <a:extLst>
+              <a:ext uri="{FF2B5EF4-FFF2-40B4-BE49-F238E27FC236}">
+                <a16:creationId xmlns:a16="http://schemas.microsoft.com/office/drawing/2014/main" id="{05422713-4FB9-4B7A-95AD-FB81EBAA1A8D}"/>
               </a:ext>
             </a:extLst>
           </p:cNvPr>
@@ -689,8 +584,8 @@
         </p:nvSpPr>
         <p:spPr>
           <a:xfrm>
-            <a:off x="10020300" y="4095750"/>
-            <a:ext cx="190500" cy="38100"/>
+            <a:off x="9220200" y="4095750"/>
+            <a:ext cx="190500" cy="66675"/>
           </a:xfrm>
           <a:prstGeom prst="rect">
             <a:avLst/>
@@ -712,10 +607,10 @@
       </p:sp>
       <p:sp>
         <p:nvSpPr>
-          <p:cNvPr id="19" name="Shape 19">
-            <a:extLst>
-              <a:ext uri="{FF2B5EF4-FFF2-40B4-BE49-F238E27FC236}">
-                <a16:creationId xmlns:a16="http://schemas.microsoft.com/office/drawing/2014/main" id="{687C8485-A68B-45AD-8F5C-B7A1FEC2D968}"/>
+          <p:cNvPr id="16" name="Shape 16">
+            <a:extLst>
+              <a:ext uri="{FF2B5EF4-FFF2-40B4-BE49-F238E27FC236}">
+                <a16:creationId xmlns:a16="http://schemas.microsoft.com/office/drawing/2014/main" id="{280B217D-25B0-41E0-B813-5BBF990C60B5}"/>
               </a:ext>
             </a:extLst>
           </p:cNvPr>
@@ -724,8 +619,8 @@
         </p:nvSpPr>
         <p:spPr>
           <a:xfrm>
-            <a:off x="10287000" y="4095750"/>
-            <a:ext cx="190500" cy="47625"/>
+            <a:off x="9486900" y="4095750"/>
+            <a:ext cx="190500" cy="76200"/>
           </a:xfrm>
           <a:prstGeom prst="rect">
             <a:avLst/>
@@ -747,10 +642,10 @@
       </p:sp>
       <p:sp>
         <p:nvSpPr>
-          <p:cNvPr id="20" name="Shape 20">
-            <a:extLst>
-              <a:ext uri="{FF2B5EF4-FFF2-40B4-BE49-F238E27FC236}">
-                <a16:creationId xmlns:a16="http://schemas.microsoft.com/office/drawing/2014/main" id="{480CA3AA-D10D-41B9-9A3C-5D2CDB848764}"/>
+          <p:cNvPr id="17" name="Shape 17">
+            <a:extLst>
+              <a:ext uri="{FF2B5EF4-FFF2-40B4-BE49-F238E27FC236}">
+                <a16:creationId xmlns:a16="http://schemas.microsoft.com/office/drawing/2014/main" id="{D08CB9DE-C8DB-423E-8BAD-B4306B0E7D32}"/>
               </a:ext>
             </a:extLst>
           </p:cNvPr>
@@ -759,8 +654,8 @@
         </p:nvSpPr>
         <p:spPr>
           <a:xfrm>
-            <a:off x="10553700" y="4095750"/>
-            <a:ext cx="190500" cy="247650"/>
+            <a:off x="9753600" y="4095750"/>
+            <a:ext cx="190500" cy="95250"/>
           </a:xfrm>
           <a:prstGeom prst="rect">
             <a:avLst/>
@@ -782,10 +677,10 @@
       </p:sp>
       <p:sp>
         <p:nvSpPr>
-          <p:cNvPr id="21" name="Shape 21">
-            <a:extLst>
-              <a:ext uri="{FF2B5EF4-FFF2-40B4-BE49-F238E27FC236}">
-                <a16:creationId xmlns:a16="http://schemas.microsoft.com/office/drawing/2014/main" id="{6E7BC438-91E5-4D5F-91E5-57851538C12B}"/>
+          <p:cNvPr id="18" name="Shape 18">
+            <a:extLst>
+              <a:ext uri="{FF2B5EF4-FFF2-40B4-BE49-F238E27FC236}">
+                <a16:creationId xmlns:a16="http://schemas.microsoft.com/office/drawing/2014/main" id="{E2066A32-3B17-4AD7-AD36-BE01098C4AA9}"/>
               </a:ext>
             </a:extLst>
           </p:cNvPr>
@@ -794,8 +689,8 @@
         </p:nvSpPr>
         <p:spPr>
           <a:xfrm>
-            <a:off x="10820400" y="4095750"/>
-            <a:ext cx="190500" cy="485775"/>
+            <a:off x="10020300" y="4095750"/>
+            <a:ext cx="190500" cy="200025"/>
           </a:xfrm>
           <a:prstGeom prst="rect">
             <a:avLst/>
@@ -817,10 +712,10 @@
       </p:sp>
       <p:sp>
         <p:nvSpPr>
-          <p:cNvPr id="22" name="Shape 22">
-            <a:extLst>
-              <a:ext uri="{FF2B5EF4-FFF2-40B4-BE49-F238E27FC236}">
-                <a16:creationId xmlns:a16="http://schemas.microsoft.com/office/drawing/2014/main" id="{366D369E-0F43-4485-9DF1-242E90A93444}"/>
+          <p:cNvPr id="19" name="Shape 19">
+            <a:extLst>
+              <a:ext uri="{FF2B5EF4-FFF2-40B4-BE49-F238E27FC236}">
+                <a16:creationId xmlns:a16="http://schemas.microsoft.com/office/drawing/2014/main" id="{687C8485-A68B-45AD-8F5C-B7A1FEC2D968}"/>
               </a:ext>
             </a:extLst>
           </p:cNvPr>
@@ -829,8 +724,8 @@
         </p:nvSpPr>
         <p:spPr>
           <a:xfrm>
-            <a:off x="11087100" y="4095750"/>
-            <a:ext cx="190500" cy="742950"/>
+            <a:off x="10287000" y="4095750"/>
+            <a:ext cx="190500" cy="323850"/>
           </a:xfrm>
           <a:prstGeom prst="rect">
             <a:avLst/>
@@ -852,6 +747,111 @@
       </p:sp>
       <p:sp>
         <p:nvSpPr>
+          <p:cNvPr id="20" name="Shape 20">
+            <a:extLst>
+              <a:ext uri="{FF2B5EF4-FFF2-40B4-BE49-F238E27FC236}">
+                <a16:creationId xmlns:a16="http://schemas.microsoft.com/office/drawing/2014/main" id="{480CA3AA-D10D-41B9-9A3C-5D2CDB848764}"/>
+              </a:ext>
+            </a:extLst>
+          </p:cNvPr>
+          <p:cNvSpPr/>
+          <p:nvPr/>
+        </p:nvSpPr>
+        <p:spPr>
+          <a:xfrm>
+            <a:off x="10553700" y="4095750"/>
+            <a:ext cx="190500" cy="476250"/>
+          </a:xfrm>
+          <a:prstGeom prst="rect">
+            <a:avLst/>
+          </a:prstGeom>
+          <a:solidFill>
+            <a:srgbClr val="FF5C6C"/>
+          </a:solidFill>
+        </p:spPr>
+        <p:txBody>
+          <a:bodyPr wrap="square" rtlCol="0"/>
+          <a:lstStyle/>
+          <a:p>
+            <a:r>
+              <a:rPr/>
+              <a:t/>
+            </a:r>
+          </a:p>
+        </p:txBody>
+      </p:sp>
+      <p:sp>
+        <p:nvSpPr>
+          <p:cNvPr id="21" name="Shape 21">
+            <a:extLst>
+              <a:ext uri="{FF2B5EF4-FFF2-40B4-BE49-F238E27FC236}">
+                <a16:creationId xmlns:a16="http://schemas.microsoft.com/office/drawing/2014/main" id="{6E7BC438-91E5-4D5F-91E5-57851538C12B}"/>
+              </a:ext>
+            </a:extLst>
+          </p:cNvPr>
+          <p:cNvSpPr/>
+          <p:nvPr/>
+        </p:nvSpPr>
+        <p:spPr>
+          <a:xfrm>
+            <a:off x="10820400" y="4095750"/>
+            <a:ext cx="190500" cy="495300"/>
+          </a:xfrm>
+          <a:prstGeom prst="rect">
+            <a:avLst/>
+          </a:prstGeom>
+          <a:solidFill>
+            <a:srgbClr val="FF5C6C"/>
+          </a:solidFill>
+        </p:spPr>
+        <p:txBody>
+          <a:bodyPr wrap="square" rtlCol="0"/>
+          <a:lstStyle/>
+          <a:p>
+            <a:r>
+              <a:rPr/>
+              <a:t/>
+            </a:r>
+          </a:p>
+        </p:txBody>
+      </p:sp>
+      <p:sp>
+        <p:nvSpPr>
+          <p:cNvPr id="22" name="Shape 22">
+            <a:extLst>
+              <a:ext uri="{FF2B5EF4-FFF2-40B4-BE49-F238E27FC236}">
+                <a16:creationId xmlns:a16="http://schemas.microsoft.com/office/drawing/2014/main" id="{366D369E-0F43-4485-9DF1-242E90A93444}"/>
+              </a:ext>
+            </a:extLst>
+          </p:cNvPr>
+          <p:cNvSpPr/>
+          <p:nvPr/>
+        </p:nvSpPr>
+        <p:spPr>
+          <a:xfrm>
+            <a:off x="11087100" y="4095750"/>
+            <a:ext cx="190500" cy="752475"/>
+          </a:xfrm>
+          <a:prstGeom prst="rect">
+            <a:avLst/>
+          </a:prstGeom>
+          <a:solidFill>
+            <a:srgbClr val="FF5C6C"/>
+          </a:solidFill>
+        </p:spPr>
+        <p:txBody>
+          <a:bodyPr wrap="square" rtlCol="0"/>
+          <a:lstStyle/>
+          <a:p>
+            <a:r>
+              <a:rPr/>
+              <a:t/>
+            </a:r>
+          </a:p>
+        </p:txBody>
+      </p:sp>
+      <p:sp>
+        <p:nvSpPr>
           <p:cNvPr id="23" name="TextBox 23">
             <a:extLst>
               <a:ext uri="{FF2B5EF4-FFF2-40B4-BE49-F238E27FC236}">
@@ -881,7 +881,7 @@
                 <a:latin typeface="Segoe UI"/>
                 <a:ea typeface="Segoe UI"/>
               </a:rPr>
-              <a:t>8 / 14</a:t>
+              <a:t>5 / 14</a:t>
             </a:r>
             <a:r>
               <a:rPr sz="1300">
@@ -978,7 +978,7 @@
                 <a:latin typeface="Consolas"/>
                 <a:ea typeface="Consolas"/>
               </a:rPr>
-              <a:t>SILVER  GOLD  WTI  WHEAT  HBL  BRENT  NATGAS | KSE100  MCB  EURUSD  BTC  COPPER  LUCK  OGDC</a:t>
+              <a:t>SILVER  GOLD  WHEAT  WTI  HBL | MCB  EURUSD  NATGAS  KSE100  BTC  LUCK  COPPER  BRENT  OGDC</a:t>
             </a:r>
           </a:p>
         </p:txBody>
@@ -4672,7 +4672,7 @@
                 <a:latin typeface="Consolas"/>
                 <a:ea typeface="Consolas"/>
               </a:rPr>
-              <a:t>python -m pytest tests -q        # 259 tests</a:t>
+              <a:t>python -m pytest tests -q        # 283 tests</a:t>
             </a:r>
           </a:p>
           <a:p>
@@ -5876,7 +5876,7 @@
                 <a:latin typeface="Segoe UI"/>
                 <a:ea typeface="Segoe UI"/>
               </a:rPr>
-              <a:t>per instrument, chosen out-of-sample</a:t>
+              <a:t>voting into the live consensus, the sweep fits one signal</a:t>
             </a:r>
           </a:p>
         </p:txBody>
@@ -6015,7 +6015,7 @@
                 <a:latin typeface="Consolas"/>
                 <a:ea typeface="Consolas"/>
               </a:rPr>
-              <a:t>259</a:t>
+              <a:t>283</a:t>
             </a:r>
           </a:p>
           <a:p>
@@ -6313,7 +6313,7 @@
                 <a:latin typeface="Segoe UI"/>
                 <a:ea typeface="Segoe UI"/>
               </a:rPr>
-              <a:t>Out-of-sample: 8 of 14 profitable</a:t>
+              <a:t>Out-of-sample: 5 of 14 profitable</a:t>
             </a:r>
           </a:p>
         </p:txBody>
@@ -6348,7 +6348,7 @@
                 <a:latin typeface="Segoe UI"/>
                 <a:ea typeface="Segoe UI"/>
               </a:rPr>
-              <a:t>100 strategies per instrument, PSX commission and slippage modelled</a:t>
+              <a:t>One blended signal, weights from a 2,592-point grid search, PSX commission and slippage modelled</a:t>
             </a:r>
           </a:p>
         </p:txBody>
@@ -6367,7 +6367,7 @@
         </p:nvSpPr>
         <p:spPr>
           <a:xfrm>
-            <a:off x="2000250" y="1543050"/>
+            <a:off x="3286125" y="1543050"/>
             <a:ext cx="2857500" cy="209550"/>
           </a:xfrm>
         </p:spPr>
@@ -6402,7 +6402,7 @@
         </p:nvSpPr>
         <p:spPr>
           <a:xfrm>
-            <a:off x="1990725" y="1771650"/>
+            <a:off x="3238500" y="1771650"/>
             <a:ext cx="9525" cy="3333750"/>
           </a:xfrm>
           <a:prstGeom prst="rect">
@@ -6438,7 +6438,7 @@
         <p:spPr>
           <a:xfrm>
             <a:off x="762000" y="1809750"/>
-            <a:ext cx="1143000" cy="228600"/>
+            <a:ext cx="819150" cy="228600"/>
           </a:xfrm>
         </p:spPr>
         <p:txBody>
@@ -6473,8 +6473,8 @@
         </p:nvSpPr>
         <p:spPr>
           <a:xfrm>
-            <a:off x="2000250" y="1819275"/>
-            <a:ext cx="2971800" cy="209550"/>
+            <a:off x="3248025" y="1819275"/>
+            <a:ext cx="2905125" cy="209550"/>
           </a:xfrm>
           <a:prstGeom prst="rect">
             <a:avLst/>
@@ -6508,8 +6508,8 @@
         </p:nvSpPr>
         <p:spPr>
           <a:xfrm>
-            <a:off x="5067300" y="1809750"/>
-            <a:ext cx="857250" cy="228600"/>
+            <a:off x="6248400" y="1809750"/>
+            <a:ext cx="762000" cy="228600"/>
           </a:xfrm>
         </p:spPr>
         <p:txBody>
@@ -6524,7 +6524,7 @@
                 <a:latin typeface="Consolas"/>
                 <a:ea typeface="Consolas"/>
               </a:rPr>
-              <a:t>+44.5%</a:t>
+              <a:t>+43.5%</a:t>
             </a:r>
           </a:p>
         </p:txBody>
@@ -6544,7 +6544,7 @@
         <p:spPr>
           <a:xfrm>
             <a:off x="762000" y="2247900"/>
-            <a:ext cx="1143000" cy="228600"/>
+            <a:ext cx="819150" cy="228600"/>
           </a:xfrm>
         </p:spPr>
         <p:txBody>
@@ -6579,8 +6579,8 @@
         </p:nvSpPr>
         <p:spPr>
           <a:xfrm>
-            <a:off x="2000250" y="2257425"/>
-            <a:ext cx="1914525" cy="209550"/>
+            <a:off x="3248025" y="2257425"/>
+            <a:ext cx="1952625" cy="209550"/>
           </a:xfrm>
           <a:prstGeom prst="rect">
             <a:avLst/>
@@ -6614,8 +6614,8 @@
         </p:nvSpPr>
         <p:spPr>
           <a:xfrm>
-            <a:off x="4010025" y="2247900"/>
-            <a:ext cx="857250" cy="228600"/>
+            <a:off x="5295900" y="2247900"/>
+            <a:ext cx="762000" cy="228600"/>
           </a:xfrm>
         </p:spPr>
         <p:txBody>
@@ -6630,7 +6630,7 @@
                 <a:latin typeface="Consolas"/>
                 <a:ea typeface="Consolas"/>
               </a:rPr>
-              <a:t>+28.7%</a:t>
+              <a:t>+29.3%</a:t>
             </a:r>
           </a:p>
         </p:txBody>
@@ -6650,7 +6650,7 @@
         <p:spPr>
           <a:xfrm>
             <a:off x="762000" y="2686050"/>
-            <a:ext cx="1143000" cy="228600"/>
+            <a:ext cx="819150" cy="228600"/>
           </a:xfrm>
         </p:spPr>
         <p:txBody>
@@ -6666,7 +6666,7 @@
                 <a:latin typeface="Consolas"/>
                 <a:ea typeface="Consolas"/>
               </a:rPr>
-              <a:t>WTI</a:t>
+              <a:t>WHEAT</a:t>
             </a:r>
           </a:p>
         </p:txBody>
@@ -6685,8 +6685,8 @@
         </p:nvSpPr>
         <p:spPr>
           <a:xfrm>
-            <a:off x="2000250" y="2695575"/>
-            <a:ext cx="1676400" cy="209550"/>
+            <a:off x="3248025" y="2695575"/>
+            <a:ext cx="1790700" cy="209550"/>
           </a:xfrm>
           <a:prstGeom prst="rect">
             <a:avLst/>
@@ -6720,8 +6720,8 @@
         </p:nvSpPr>
         <p:spPr>
           <a:xfrm>
-            <a:off x="3771900" y="2686050"/>
-            <a:ext cx="857250" cy="228600"/>
+            <a:off x="5133975" y="2686050"/>
+            <a:ext cx="762000" cy="228600"/>
           </a:xfrm>
         </p:spPr>
         <p:txBody>
@@ -6736,7 +6736,7 @@
                 <a:latin typeface="Consolas"/>
                 <a:ea typeface="Consolas"/>
               </a:rPr>
-              <a:t>+25.1%</a:t>
+              <a:t>+26.8%</a:t>
             </a:r>
           </a:p>
         </p:txBody>
@@ -6756,7 +6756,7 @@
         <p:spPr>
           <a:xfrm>
             <a:off x="762000" y="3124200"/>
-            <a:ext cx="1143000" cy="228600"/>
+            <a:ext cx="819150" cy="228600"/>
           </a:xfrm>
         </p:spPr>
         <p:txBody>
@@ -6772,7 +6772,7 @@
                 <a:latin typeface="Consolas"/>
                 <a:ea typeface="Consolas"/>
               </a:rPr>
-              <a:t>WHEAT</a:t>
+              <a:t>WTI</a:t>
             </a:r>
           </a:p>
         </p:txBody>
@@ -6791,8 +6791,8 @@
         </p:nvSpPr>
         <p:spPr>
           <a:xfrm>
-            <a:off x="2000250" y="3133725"/>
-            <a:ext cx="1304925" cy="209550"/>
+            <a:off x="3248025" y="3133725"/>
+            <a:ext cx="1066800" cy="209550"/>
           </a:xfrm>
           <a:prstGeom prst="rect">
             <a:avLst/>
@@ -6826,8 +6826,8 @@
         </p:nvSpPr>
         <p:spPr>
           <a:xfrm>
-            <a:off x="3400425" y="3124200"/>
-            <a:ext cx="857250" cy="228600"/>
+            <a:off x="4410075" y="3124200"/>
+            <a:ext cx="762000" cy="228600"/>
           </a:xfrm>
         </p:spPr>
         <p:txBody>
@@ -6842,7 +6842,7 @@
                 <a:latin typeface="Consolas"/>
                 <a:ea typeface="Consolas"/>
               </a:rPr>
-              <a:t>+19.5%</a:t>
+              <a:t>+16.0%</a:t>
             </a:r>
           </a:p>
         </p:txBody>
@@ -6862,7 +6862,7 @@
         <p:spPr>
           <a:xfrm>
             <a:off x="762000" y="3562350"/>
-            <a:ext cx="1143000" cy="228600"/>
+            <a:ext cx="819150" cy="228600"/>
           </a:xfrm>
         </p:spPr>
         <p:txBody>
@@ -6897,8 +6897,8 @@
         </p:nvSpPr>
         <p:spPr>
           <a:xfrm>
-            <a:off x="2000250" y="3571875"/>
-            <a:ext cx="619125" cy="209550"/>
+            <a:off x="3248025" y="3571875"/>
+            <a:ext cx="828675" cy="209550"/>
           </a:xfrm>
           <a:prstGeom prst="rect">
             <a:avLst/>
@@ -6932,8 +6932,8 @@
         </p:nvSpPr>
         <p:spPr>
           <a:xfrm>
-            <a:off x="2714625" y="3562350"/>
-            <a:ext cx="857250" cy="228600"/>
+            <a:off x="4171950" y="3562350"/>
+            <a:ext cx="762000" cy="228600"/>
           </a:xfrm>
         </p:spPr>
         <p:txBody>
@@ -6948,7 +6948,7 @@
                 <a:latin typeface="Consolas"/>
                 <a:ea typeface="Consolas"/>
               </a:rPr>
-              <a:t>+9.3%</a:t>
+              <a:t>+12.4%</a:t>
             </a:r>
           </a:p>
         </p:txBody>
@@ -6968,7 +6968,7 @@
         <p:spPr>
           <a:xfrm>
             <a:off x="762000" y="4000500"/>
-            <a:ext cx="1143000" cy="228600"/>
+            <a:ext cx="819150" cy="228600"/>
           </a:xfrm>
         </p:spPr>
         <p:txBody>
@@ -7003,14 +7003,14 @@
         </p:nvSpPr>
         <p:spPr>
           <a:xfrm>
-            <a:off x="2000250" y="4010025"/>
-            <a:ext cx="457200" cy="209550"/>
+            <a:off x="2609850" y="4010025"/>
+            <a:ext cx="628650" cy="209550"/>
           </a:xfrm>
           <a:prstGeom prst="rect">
             <a:avLst/>
           </a:prstGeom>
           <a:solidFill>
-            <a:srgbClr val="2FD48A"/>
+            <a:srgbClr val="FF5C6C"/>
           </a:solidFill>
         </p:spPr>
         <p:txBody>
@@ -7038,8 +7038,8 @@
         </p:nvSpPr>
         <p:spPr>
           <a:xfrm>
-            <a:off x="2552700" y="4000500"/>
-            <a:ext cx="857250" cy="228600"/>
+            <a:off x="1981200" y="4000500"/>
+            <a:ext cx="571500" cy="228600"/>
           </a:xfrm>
         </p:spPr>
         <p:txBody>
@@ -7054,7 +7054,7 @@
                 <a:latin typeface="Consolas"/>
                 <a:ea typeface="Consolas"/>
               </a:rPr>
-              <a:t>+6.8%</a:t>
+              <a:t>-9.4%</a:t>
             </a:r>
           </a:p>
         </p:txBody>
@@ -7074,7 +7074,7 @@
         <p:spPr>
           <a:xfrm>
             <a:off x="762000" y="4438650"/>
-            <a:ext cx="1143000" cy="228600"/>
+            <a:ext cx="819150" cy="228600"/>
           </a:xfrm>
         </p:spPr>
         <p:txBody>
@@ -7090,7 +7090,7 @@
                 <a:latin typeface="Consolas"/>
                 <a:ea typeface="Consolas"/>
               </a:rPr>
-              <a:t>NATGAS</a:t>
+              <a:t>COPPER</a:t>
             </a:r>
           </a:p>
         </p:txBody>
@@ -7109,14 +7109,14 @@
         </p:nvSpPr>
         <p:spPr>
           <a:xfrm>
-            <a:off x="2000250" y="4448175"/>
-            <a:ext cx="276225" cy="209550"/>
+            <a:off x="2628900" y="4448175"/>
+            <a:ext cx="609600" cy="209550"/>
           </a:xfrm>
           <a:prstGeom prst="rect">
             <a:avLst/>
           </a:prstGeom>
           <a:solidFill>
-            <a:srgbClr val="2FD48A"/>
+            <a:srgbClr val="FF5C6C"/>
           </a:solidFill>
         </p:spPr>
         <p:txBody>
@@ -7144,8 +7144,8 @@
         </p:nvSpPr>
         <p:spPr>
           <a:xfrm>
-            <a:off x="2371725" y="4438650"/>
-            <a:ext cx="857250" cy="228600"/>
+            <a:off x="2000250" y="4438650"/>
+            <a:ext cx="571500" cy="228600"/>
           </a:xfrm>
         </p:spPr>
         <p:txBody>
@@ -7160,7 +7160,7 @@
                 <a:latin typeface="Consolas"/>
                 <a:ea typeface="Consolas"/>
               </a:rPr>
-              <a:t>+4.2%</a:t>
+              <a:t>-9.1%</a:t>
             </a:r>
           </a:p>
         </p:txBody>
@@ -7180,7 +7180,7 @@
         <p:spPr>
           <a:xfrm>
             <a:off x="762000" y="4876800"/>
-            <a:ext cx="1143000" cy="228600"/>
+            <a:ext cx="819150" cy="228600"/>
           </a:xfrm>
         </p:spPr>
         <p:txBody>
@@ -7196,7 +7196,7 @@
                 <a:latin typeface="Consolas"/>
                 <a:ea typeface="Consolas"/>
               </a:rPr>
-              <a:t>KSE100</a:t>
+              <a:t>OGDC</a:t>
             </a:r>
           </a:p>
         </p:txBody>
@@ -7215,14 +7215,14 @@
         </p:nvSpPr>
         <p:spPr>
           <a:xfrm>
-            <a:off x="2000250" y="4886325"/>
-            <a:ext cx="28575" cy="209550"/>
+            <a:off x="2286000" y="4886325"/>
+            <a:ext cx="952500" cy="209550"/>
           </a:xfrm>
           <a:prstGeom prst="rect">
             <a:avLst/>
           </a:prstGeom>
           <a:solidFill>
-            <a:srgbClr val="5A6478"/>
+            <a:srgbClr val="FF5C6C"/>
           </a:solidFill>
         </p:spPr>
         <p:txBody>
@@ -7250,8 +7250,8 @@
         </p:nvSpPr>
         <p:spPr>
           <a:xfrm>
-            <a:off x="2124075" y="4876800"/>
-            <a:ext cx="857250" cy="228600"/>
+            <a:off x="1638300" y="4876800"/>
+            <a:ext cx="590550" cy="228600"/>
           </a:xfrm>
         </p:spPr>
         <p:txBody>
@@ -7261,12 +7261,12 @@
             <a:r>
               <a:rPr sz="1250" b="1">
                 <a:solidFill>
-                  <a:srgbClr val="8B94A6"/>
+                  <a:srgbClr val="E6E9EF"/>
                 </a:solidFill>
                 <a:latin typeface="Consolas"/>
                 <a:ea typeface="Consolas"/>
               </a:rPr>
-              <a:t>+0.0%</a:t>
+              <a:t>-14.3%</a:t>
             </a:r>
           </a:p>
         </p:txBody>
@@ -7326,7 +7326,7 @@
         <p:spPr>
           <a:xfrm>
             <a:off x="7562850" y="1733550"/>
-            <a:ext cx="3619500" cy="3249422"/>
+            <a:ext cx="3619500" cy="3352800"/>
           </a:xfrm>
         </p:spPr>
         <p:txBody>
@@ -7342,7 +7342,7 @@
               </a:spcAft>
             </a:pPr>
             <a:r>
-              <a:rPr sz="1500" b="1">
+              <a:rPr sz="1400" b="1">
                 <a:solidFill>
                   <a:srgbClr val="E6E9EF"/>
                 </a:solidFill>
@@ -7359,24 +7359,31 @@
               </a:lnSpc>
             </a:pPr>
             <a:r>
-              <a:rPr sz="1300">
+              <a:rPr sz="1200">
                 <a:solidFill>
                   <a:srgbClr val="8B94A6"/>
                 </a:solidFill>
                 <a:latin typeface="Consolas"/>
                 <a:ea typeface="Consolas"/>
               </a:rPr>
-              <a:t>MCB        </a:t>
-            </a:r>
-            <a:r>
-              <a:rPr sz="1300" b="1">
-                <a:solidFill>
-                  <a:srgbClr val="FF5C6C"/>
+              <a:t>MCB -1.1%     EURUSD -1.3%</a:t>
+            </a:r>
+          </a:p>
+          <a:p>
+            <a:pPr>
+              <a:lnSpc>
+                <a:spcPct val="140000"/>
+              </a:lnSpc>
+            </a:pPr>
+            <a:r>
+              <a:rPr sz="1200">
+                <a:solidFill>
+                  <a:srgbClr val="8B94A6"/>
                 </a:solidFill>
                 <a:latin typeface="Consolas"/>
                 <a:ea typeface="Consolas"/>
               </a:rPr>
-              <a:t>-0.2%</a:t>
+              <a:t>NATGAS -1.5%     KSE100 -1.8%</a:t>
             </a:r>
           </a:p>
           <a:p>
@@ -7386,24 +7393,31 @@
               </a:lnSpc>
             </a:pPr>
             <a:r>
-              <a:rPr sz="1300">
+              <a:rPr sz="1200">
                 <a:solidFill>
                   <a:srgbClr val="8B94A6"/>
                 </a:solidFill>
                 <a:latin typeface="Consolas"/>
                 <a:ea typeface="Consolas"/>
               </a:rPr>
-              <a:t>EURUSD   </a:t>
-            </a:r>
-            <a:r>
-              <a:rPr sz="1300" b="1">
-                <a:solidFill>
-                  <a:srgbClr val="FF5C6C"/>
+              <a:t>BTC -3.9%     LUCK -6.1%</a:t>
+            </a:r>
+          </a:p>
+          <a:p>
+            <a:pPr>
+              <a:lnSpc>
+                <a:spcPct val="140000"/>
+              </a:lnSpc>
+            </a:pPr>
+            <a:r>
+              <a:rPr sz="1200">
+                <a:solidFill>
+                  <a:srgbClr val="8B94A6"/>
                 </a:solidFill>
                 <a:latin typeface="Consolas"/>
                 <a:ea typeface="Consolas"/>
               </a:rPr>
-              <a:t>-0.6%</a:t>
+              <a:t>COPPER -9.1%     BRENT -9.4%</a:t>
             </a:r>
           </a:p>
           <a:p>
@@ -7413,78 +7427,14 @@
               </a:lnSpc>
             </a:pPr>
             <a:r>
-              <a:rPr sz="1300">
+              <a:rPr sz="1200">
                 <a:solidFill>
                   <a:srgbClr val="8B94A6"/>
                 </a:solidFill>
                 <a:latin typeface="Consolas"/>
                 <a:ea typeface="Consolas"/>
               </a:rPr>
-              <a:t>BTC        </a:t>
-            </a:r>
-            <a:r>
-              <a:rPr sz="1300" b="1">
-                <a:solidFill>
-                  <a:srgbClr val="FF5C6C"/>
-                </a:solidFill>
-                <a:latin typeface="Consolas"/>
-                <a:ea typeface="Consolas"/>
-              </a:rPr>
-              <a:t>-0.8%</a:t>
-            </a:r>
-          </a:p>
-          <a:p>
-            <a:pPr>
-              <a:lnSpc>
-                <a:spcPct val="140000"/>
-              </a:lnSpc>
-            </a:pPr>
-            <a:r>
-              <a:rPr sz="1300">
-                <a:solidFill>
-                  <a:srgbClr val="8B94A6"/>
-                </a:solidFill>
-                <a:latin typeface="Consolas"/>
-                <a:ea typeface="Consolas"/>
-              </a:rPr>
-              <a:t>COPPER   </a:t>
-            </a:r>
-            <a:r>
-              <a:rPr sz="1300" b="1">
-                <a:solidFill>
-                  <a:srgbClr val="FF5C6C"/>
-                </a:solidFill>
-                <a:latin typeface="Consolas"/>
-                <a:ea typeface="Consolas"/>
-              </a:rPr>
-              <a:t>-4.7%</a:t>
-            </a:r>
-          </a:p>
-          <a:p>
-            <a:pPr>
-              <a:lnSpc>
-                <a:spcPct val="140000"/>
-              </a:lnSpc>
-            </a:pPr>
-            <a:r>
-              <a:rPr sz="1300">
-                <a:solidFill>
-                  <a:srgbClr val="8B94A6"/>
-                </a:solidFill>
-                <a:latin typeface="Consolas"/>
-                <a:ea typeface="Consolas"/>
-              </a:rPr>
-              <a:t>LUCK       </a:t>
-            </a:r>
-            <a:r>
-              <a:rPr sz="1300" b="1">
-                <a:solidFill>
-                  <a:srgbClr val="FF5C6C"/>
-                </a:solidFill>
-                <a:latin typeface="Consolas"/>
-                <a:ea typeface="Consolas"/>
-              </a:rPr>
-              <a:t>-9.2%</a:t>
+              <a:t>OGDC -14.3%</a:t>
             </a:r>
           </a:p>
           <a:p>
@@ -7497,24 +7447,14 @@
               </a:spcAft>
             </a:pPr>
             <a:r>
-              <a:rPr sz="1300">
-                <a:solidFill>
-                  <a:srgbClr val="8B94A6"/>
+              <a:rPr sz="1200">
+                <a:solidFill>
+                  <a:srgbClr val="E6E9EF"/>
                 </a:solidFill>
                 <a:latin typeface="Consolas"/>
                 <a:ea typeface="Consolas"/>
               </a:rPr>
-              <a:t>OGDC       </a:t>
-            </a:r>
-            <a:r>
-              <a:rPr sz="1300" b="1">
-                <a:solidFill>
-                  <a:srgbClr val="FF5C6C"/>
-                </a:solidFill>
-                <a:latin typeface="Consolas"/>
-                <a:ea typeface="Consolas"/>
-              </a:rPr>
-              <a:t>-14.1%</a:t>
+              <a:t>WHEAT Sharpe 1.60 · GOLD Sharpe 1.57</a:t>
             </a:r>
           </a:p>
           <a:p>
@@ -7527,14 +7467,14 @@
               </a:spcAft>
             </a:pPr>
             <a:r>
-              <a:rPr sz="1300">
+              <a:rPr sz="1200">
                 <a:solidFill>
                   <a:srgbClr val="E6E9EF"/>
                 </a:solidFill>
                 <a:latin typeface="Segoe UI"/>
                 <a:ea typeface="Segoe UI"/>
               </a:rPr>
-              <a:t>Sharpe 1.68 WTI · 1.61 GOLD · 1.46 SILVER</a:t>
+              <a:t>SILVER Sharpe 1.44 · WTI Sharpe 0.77</a:t>
             </a:r>
           </a:p>
           <a:p>
@@ -7544,14 +7484,48 @@
               </a:lnSpc>
             </a:pPr>
             <a:r>
-              <a:rPr sz="1250">
+              <a:rPr sz="1200">
+                <a:solidFill>
+                  <a:srgbClr val="E6E9EF"/>
+                </a:solidFill>
+                <a:latin typeface="Segoe UI"/>
+                <a:ea typeface="Segoe UI"/>
+              </a:rPr>
+              <a:t>HBL Sharpe 1.39 · all out-of-sample</a:t>
+            </a:r>
+          </a:p>
+          <a:p>
+            <a:pPr>
+              <a:lnSpc>
+                <a:spcPct val="145000"/>
+              </a:lnSpc>
+            </a:pPr>
+            <a:r>
+              <a:rPr sz="1150">
                 <a:solidFill>
                   <a:srgbClr val="F0B429"/>
                 </a:solidFill>
                 <a:latin typeface="Segoe UI"/>
                 <a:ea typeface="Segoe UI"/>
               </a:rPr>
-              <a:t>Backtests are not returns: published per instrument, never averaged.</a:t>
+              <a:t>Backtests are not returns: published per</a:t>
+            </a:r>
+          </a:p>
+          <a:p>
+            <a:pPr>
+              <a:lnSpc>
+                <a:spcPct val="145000"/>
+              </a:lnSpc>
+            </a:pPr>
+            <a:r>
+              <a:rPr sz="1150">
+                <a:solidFill>
+                  <a:srgbClr val="F0B429"/>
+                </a:solidFill>
+                <a:latin typeface="Segoe UI"/>
+                <a:ea typeface="Segoe UI"/>
+              </a:rPr>
+              <a:t>instrument, never averaged.</a:t>
             </a:r>
           </a:p>
         </p:txBody>
@@ -7591,7 +7565,7 @@
                 <a:latin typeface="Segoe UI"/>
                 <a:ea typeface="Segoe UI"/>
               </a:rPr>
-              <a:t>GOLD beat buy-and-hold (+13.4%). WTI did not (+61.8%) — a risk-adjusted win is not the same as an absolute one, and the deck says so.</a:t>
+              <a:t>GOLD beat buy-and-hold (+11.6%). WTI did not (+50.2%) — a risk-adjusted win is not the same as an absolute one, and the deck says so.</a:t>
             </a:r>
           </a:p>
         </p:txBody>
@@ -7854,7 +7828,7 @@
                 <a:latin typeface="Consolas"/>
                 <a:ea typeface="Consolas"/>
               </a:rPr>
-              <a:t>-2.8%</a:t>
+              <a:t>-2.2%</a:t>
             </a:r>
           </a:p>
         </p:txBody>
@@ -7929,7 +7903,7 @@
                 <a:latin typeface="Segoe UI"/>
                 <a:ea typeface="Segoe UI"/>
               </a:rPr>
-              <a:t>mean net return out-of-sample across OGDC, HBL, MCB, LUCK and KSE100. Only HBL finished positive.</a:t>
+              <a:t>mean net return out-of-sample across the five PSX names in the sweep. Only one of them finished positive.</a:t>
             </a:r>
           </a:p>
         </p:txBody>
@@ -7969,7 +7943,7 @@
                 <a:latin typeface="Consolas"/>
                 <a:ea typeface="Consolas"/>
               </a:rPr>
-              <a:t>+13.6%</a:t>
+              <a:t>+10.0%</a:t>
             </a:r>
           </a:p>
         </p:txBody>
@@ -8199,7 +8173,7 @@
                 <a:latin typeface="Consolas"/>
                 <a:ea typeface="Consolas"/>
               </a:rPr>
-              <a:t>5 equities vs 9 global instruments · same strategy library, same cost model</a:t>
+              <a:t>5 equities vs 9 global instruments · same risk layer, same cost model</a:t>
             </a:r>
           </a:p>
         </p:txBody>
@@ -8564,7 +8538,7 @@
                 <a:latin typeface="Segoe UI"/>
                 <a:ea typeface="Segoe UI"/>
               </a:rPr>
-              <a:t>A public repository: 12,354 lines, 37 modules, 259 tests, MIT.</a:t>
+              <a:t>A public repository: 12,354 lines, 37 modules, 283 tests, MIT.</a:t>
             </a:r>
           </a:p>
           <a:p>

--- a/docs/investors/KAIROS_Investor_Deck.pptx
+++ b/docs/investors/KAIROS_Investor_Deck.pptx
@@ -320,7 +320,7 @@
                 <a:latin typeface="Segoe UI"/>
                 <a:ea typeface="Segoe UI"/>
               </a:rPr>
-              <a:t>KAIROS v2.6.1 · 2026-10-21 · github.com/zhaider5142009-oss/kairos</a:t>
+              <a:t>KAIROS v2.6.2 · 2026-10-21 · github.com/zhaider5142009-oss/kairos</a:t>
             </a:r>
           </a:p>
         </p:txBody>
@@ -931,9 +931,15 @@
                 <a:latin typeface="Segoe UI"/>
                 <a:ea typeface="Segoe UI"/>
               </a:rPr>
-              <a:t>Walk-forward sweep, 100 strategies per instrument,</a:t>
-            </a:r>
-            <a:br/>
+              <a:t>Walk-forward sweep, one blended signal per instrument,</a:t>
+            </a:r>
+          </a:p>
+          <a:p>
+            <a:pPr algn="l">
+              <a:lnSpc>
+                <a:spcPct val="120000"/>
+              </a:lnSpc>
+            </a:pPr>
             <a:r>
               <a:rPr sz="1100">
                 <a:solidFill>
@@ -4672,7 +4678,7 @@
                 <a:latin typeface="Consolas"/>
                 <a:ea typeface="Consolas"/>
               </a:rPr>
-              <a:t>python -m pytest tests -q        # 283 tests</a:t>
+              <a:t>python -m pytest tests -q        # 286 tests</a:t>
             </a:r>
           </a:p>
           <a:p>
@@ -6015,7 +6021,7 @@
                 <a:latin typeface="Consolas"/>
                 <a:ea typeface="Consolas"/>
               </a:rPr>
-              <a:t>283</a:t>
+              <a:t>286</a:t>
             </a:r>
           </a:p>
           <a:p>
@@ -8538,7 +8544,7 @@
                 <a:latin typeface="Segoe UI"/>
                 <a:ea typeface="Segoe UI"/>
               </a:rPr>
-              <a:t>A public repository: 12,354 lines, 37 modules, 283 tests, MIT.</a:t>
+              <a:t>A public repository: 12,354 lines, 37 modules, 286 tests, MIT.</a:t>
             </a:r>
           </a:p>
           <a:p>

--- a/docs/investors/KAIROS_Investor_Deck.pptx
+++ b/docs/investors/KAIROS_Investor_Deck.pptx
@@ -4678,7 +4678,7 @@
                 <a:latin typeface="Consolas"/>
                 <a:ea typeface="Consolas"/>
               </a:rPr>
-              <a:t>python -m pytest tests -q        # 286 tests</a:t>
+              <a:t>python -m pytest tests -q        # 287 tests</a:t>
             </a:r>
           </a:p>
           <a:p>
@@ -5757,7 +5757,7 @@
                 <a:latin typeface="Consolas"/>
                 <a:ea typeface="Consolas"/>
               </a:rPr>
-              <a:t>12,354</a:t>
+              <a:t>12,358</a:t>
             </a:r>
           </a:p>
           <a:p>
@@ -6021,7 +6021,7 @@
                 <a:latin typeface="Consolas"/>
                 <a:ea typeface="Consolas"/>
               </a:rPr>
-              <a:t>286</a:t>
+              <a:t>287</a:t>
             </a:r>
           </a:p>
           <a:p>
@@ -8544,7 +8544,7 @@
                 <a:latin typeface="Segoe UI"/>
                 <a:ea typeface="Segoe UI"/>
               </a:rPr>
-              <a:t>A public repository: 12,354 lines, 37 modules, 286 tests, MIT.</a:t>
+              <a:t>A public repository: 12,358 lines, 37 modules, 287 tests, MIT.</a:t>
             </a:r>
           </a:p>
           <a:p>

--- a/docs/investors/KAIROS_Investor_Deck.pptx
+++ b/docs/investors/KAIROS_Investor_Deck.pptx
@@ -4678,7 +4678,7 @@
                 <a:latin typeface="Consolas"/>
                 <a:ea typeface="Consolas"/>
               </a:rPr>
-              <a:t>python -m pytest tests -q        # 287 tests</a:t>
+              <a:t>python -m pytest tests -q        # 289 tests</a:t>
             </a:r>
           </a:p>
           <a:p>
@@ -5757,7 +5757,7 @@
                 <a:latin typeface="Consolas"/>
                 <a:ea typeface="Consolas"/>
               </a:rPr>
-              <a:t>12,358</a:t>
+              <a:t>12,424</a:t>
             </a:r>
           </a:p>
           <a:p>
@@ -6021,7 +6021,7 @@
                 <a:latin typeface="Consolas"/>
                 <a:ea typeface="Consolas"/>
               </a:rPr>
-              <a:t>287</a:t>
+              <a:t>289</a:t>
             </a:r>
           </a:p>
           <a:p>
@@ -8544,7 +8544,7 @@
                 <a:latin typeface="Segoe UI"/>
                 <a:ea typeface="Segoe UI"/>
               </a:rPr>
-              <a:t>A public repository: 12,358 lines, 37 modules, 287 tests, MIT.</a:t>
+              <a:t>A public repository: 12,424 lines, 37 modules, 289 tests, MIT.</a:t>
             </a:r>
           </a:p>
           <a:p>

--- a/docs/investors/KAIROS_Investor_Deck.pptx
+++ b/docs/investors/KAIROS_Investor_Deck.pptx
@@ -4678,7 +4678,7 @@
                 <a:latin typeface="Consolas"/>
                 <a:ea typeface="Consolas"/>
               </a:rPr>
-              <a:t>python -m pytest tests -q        # 289 tests</a:t>
+              <a:t>python -m pytest tests -q        # 295 tests</a:t>
             </a:r>
           </a:p>
           <a:p>
@@ -5757,7 +5757,7 @@
                 <a:latin typeface="Consolas"/>
                 <a:ea typeface="Consolas"/>
               </a:rPr>
-              <a:t>12,424</a:t>
+              <a:t>12,459</a:t>
             </a:r>
           </a:p>
           <a:p>
@@ -6021,7 +6021,7 @@
                 <a:latin typeface="Consolas"/>
                 <a:ea typeface="Consolas"/>
               </a:rPr>
-              <a:t>289</a:t>
+              <a:t>295</a:t>
             </a:r>
           </a:p>
           <a:p>
@@ -8544,7 +8544,7 @@
                 <a:latin typeface="Segoe UI"/>
                 <a:ea typeface="Segoe UI"/>
               </a:rPr>
-              <a:t>A public repository: 12,424 lines, 37 modules, 289 tests, MIT.</a:t>
+              <a:t>A public repository: 12,459 lines, 37 modules, 295 tests, MIT.</a:t>
             </a:r>
           </a:p>
           <a:p>

--- a/docs/investors/KAIROS_Investor_Deck.pptx
+++ b/docs/investors/KAIROS_Investor_Deck.pptx
@@ -320,7 +320,7 @@
                 <a:latin typeface="Segoe UI"/>
                 <a:ea typeface="Segoe UI"/>
               </a:rPr>
-              <a:t>KAIROS v2.6.2 · 2026-10-21 · github.com/zhaider5142009-oss/kairos</a:t>
+              <a:t>KAIROS v2.6.2 · 2026-10-22 · github.com/zhaider5142009-oss/kairos</a:t>
             </a:r>
           </a:p>
         </p:txBody>
@@ -4678,7 +4678,7 @@
                 <a:latin typeface="Consolas"/>
                 <a:ea typeface="Consolas"/>
               </a:rPr>
-              <a:t>python -m pytest tests -q        # 295 tests</a:t>
+              <a:t>python -m pytest tests -q        # 307 tests</a:t>
             </a:r>
           </a:p>
           <a:p>
@@ -5757,7 +5757,7 @@
                 <a:latin typeface="Consolas"/>
                 <a:ea typeface="Consolas"/>
               </a:rPr>
-              <a:t>12,459</a:t>
+              <a:t>12,533</a:t>
             </a:r>
           </a:p>
           <a:p>
@@ -6021,7 +6021,7 @@
                 <a:latin typeface="Consolas"/>
                 <a:ea typeface="Consolas"/>
               </a:rPr>
-              <a:t>295</a:t>
+              <a:t>307</a:t>
             </a:r>
           </a:p>
           <a:p>
@@ -6246,7 +6246,7 @@
                 <a:latin typeface="Consolas"/>
                 <a:ea typeface="Consolas"/>
               </a:rPr>
-              <a:t>figures verified against the repository on 2026-10-21</a:t>
+              <a:t>figures verified against the repository on 2026-10-22</a:t>
             </a:r>
           </a:p>
         </p:txBody>
@@ -8544,7 +8544,7 @@
                 <a:latin typeface="Segoe UI"/>
                 <a:ea typeface="Segoe UI"/>
               </a:rPr>
-              <a:t>A public repository: 12,459 lines, 37 modules, 295 tests, MIT.</a:t>
+              <a:t>A public repository: 12,533 lines, 37 modules, 307 tests, MIT.</a:t>
             </a:r>
           </a:p>
           <a:p>

--- a/docs/investors/KAIROS_Investor_Deck.pptx
+++ b/docs/investors/KAIROS_Investor_Deck.pptx
@@ -4678,7 +4678,7 @@
                 <a:latin typeface="Consolas"/>
                 <a:ea typeface="Consolas"/>
               </a:rPr>
-              <a:t>python -m pytest tests -q        # 307 tests</a:t>
+              <a:t>python -m pytest tests -q        # 309 tests</a:t>
             </a:r>
           </a:p>
           <a:p>
@@ -5757,7 +5757,7 @@
                 <a:latin typeface="Consolas"/>
                 <a:ea typeface="Consolas"/>
               </a:rPr>
-              <a:t>12,533</a:t>
+              <a:t>12,538</a:t>
             </a:r>
           </a:p>
           <a:p>
@@ -6021,7 +6021,7 @@
                 <a:latin typeface="Consolas"/>
                 <a:ea typeface="Consolas"/>
               </a:rPr>
-              <a:t>307</a:t>
+              <a:t>309</a:t>
             </a:r>
           </a:p>
           <a:p>
@@ -8544,7 +8544,7 @@
                 <a:latin typeface="Segoe UI"/>
                 <a:ea typeface="Segoe UI"/>
               </a:rPr>
-              <a:t>A public repository: 12,533 lines, 37 modules, 307 tests, MIT.</a:t>
+              <a:t>A public repository: 12,538 lines, 37 modules, 309 tests, MIT.</a:t>
             </a:r>
           </a:p>
           <a:p>

--- a/docs/investors/KAIROS_Investor_Deck.pptx
+++ b/docs/investors/KAIROS_Investor_Deck.pptx
@@ -4678,7 +4678,7 @@
                 <a:latin typeface="Consolas"/>
                 <a:ea typeface="Consolas"/>
               </a:rPr>
-              <a:t>python -m pytest tests -q        # 309 tests</a:t>
+              <a:t>python -m pytest tests -q        # 319 tests</a:t>
             </a:r>
           </a:p>
           <a:p>
@@ -5757,7 +5757,7 @@
                 <a:latin typeface="Consolas"/>
                 <a:ea typeface="Consolas"/>
               </a:rPr>
-              <a:t>12,538</a:t>
+              <a:t>12,596</a:t>
             </a:r>
           </a:p>
           <a:p>
@@ -6021,7 +6021,7 @@
                 <a:latin typeface="Consolas"/>
                 <a:ea typeface="Consolas"/>
               </a:rPr>
-              <a:t>309</a:t>
+              <a:t>319</a:t>
             </a:r>
           </a:p>
           <a:p>
@@ -8544,7 +8544,7 @@
                 <a:latin typeface="Segoe UI"/>
                 <a:ea typeface="Segoe UI"/>
               </a:rPr>
-              <a:t>A public repository: 12,538 lines, 37 modules, 309 tests, MIT.</a:t>
+              <a:t>A public repository: 12,596 lines, 37 modules, 319 tests, MIT.</a:t>
             </a:r>
           </a:p>
           <a:p>

--- a/docs/investors/KAIROS_Investor_Deck.pptx
+++ b/docs/investors/KAIROS_Investor_Deck.pptx
@@ -4678,7 +4678,7 @@
                 <a:latin typeface="Consolas"/>
                 <a:ea typeface="Consolas"/>
               </a:rPr>
-              <a:t>python -m pytest tests -q        # 319 tests</a:t>
+              <a:t>python -m pytest tests -q        # 330 tests</a:t>
             </a:r>
           </a:p>
           <a:p>
@@ -5757,7 +5757,7 @@
                 <a:latin typeface="Consolas"/>
                 <a:ea typeface="Consolas"/>
               </a:rPr>
-              <a:t>12,596</a:t>
+              <a:t>12,668</a:t>
             </a:r>
           </a:p>
           <a:p>
@@ -6021,7 +6021,7 @@
                 <a:latin typeface="Consolas"/>
                 <a:ea typeface="Consolas"/>
               </a:rPr>
-              <a:t>319</a:t>
+              <a:t>330</a:t>
             </a:r>
           </a:p>
           <a:p>
@@ -8544,7 +8544,7 @@
                 <a:latin typeface="Segoe UI"/>
                 <a:ea typeface="Segoe UI"/>
               </a:rPr>
-              <a:t>A public repository: 12,596 lines, 37 modules, 319 tests, MIT.</a:t>
+              <a:t>A public repository: 12,668 lines, 37 modules, 330 tests, MIT.</a:t>
             </a:r>
           </a:p>
           <a:p>
@@ -9599,12 +9599,12 @@
               <a:buChar char="•"/>
             </a:pPr>
             <a:r>
-              <a:rPr sz="1000">
+              <a:rPr sz="750">
                 <a:solidFill>
                   <a:srgbClr val="8B94A6"/>
                 </a:solidFill>
               </a:rPr>
-              <a:t>Risk limits froze at process start; a tightened loss cap bound only after a restart.</a:t>
+              <a:t>•Risk limits froze at process start; a tightened loss cap bound only after a restart.</a:t>
             </a:r>
           </a:p>
           <a:p>
@@ -9615,12 +9615,12 @@
               <a:buChar char="•"/>
             </a:pPr>
             <a:r>
-              <a:rPr sz="1000">
+              <a:rPr sz="750">
                 <a:solidFill>
                   <a:srgbClr val="8B94A6"/>
                 </a:solidFill>
               </a:rPr>
-              <a:t>Ledgers were written in place — a torn write reset the paper book to full capital.</a:t>
+              <a:t>•Ledgers were written in place — a torn write reset the paper book to full capital.</a:t>
             </a:r>
           </a:p>
           <a:p>
@@ -9631,12 +9631,12 @@
               <a:buChar char="•"/>
             </a:pPr>
             <a:r>
-              <a:rPr sz="1000">
+              <a:rPr sz="750">
                 <a:solidFill>
                   <a:srgbClr val="8B94A6"/>
                 </a:solidFill>
               </a:rPr>
-              <a:t>The test suite could arm live mode and write the production audit trail.</a:t>
+              <a:t>•The test suite could arm live mode and write the production audit trail.</a:t>
             </a:r>
           </a:p>
           <a:p>
@@ -9647,12 +9647,12 @@
               <a:buChar char="•"/>
             </a:pPr>
             <a:r>
-              <a:rPr sz="1000">
+              <a:rPr sz="750">
                 <a:solidFill>
                   <a:srgbClr val="8B94A6"/>
                 </a:solidFill>
               </a:rPr>
-              <a:t>A restart reported LIVE while running paper; a score read today's threshold as history.</a:t>
+              <a:t>•A restart reported LIVE while running paper; a score read today's threshold as history.</a:t>
             </a:r>
           </a:p>
           <a:p>
@@ -9663,12 +9663,12 @@
               <a:buChar char="•"/>
             </a:pPr>
             <a:r>
-              <a:rPr sz="1000">
+              <a:rPr sz="750">
                 <a:solidFill>
                   <a:srgbClr val="8B94A6"/>
                 </a:solidFill>
               </a:rPr>
-              <a:t>A suspended provider was published healthy; one strategy could never vote long.</a:t>
+              <a:t>•A suspended provider was published healthy; one strategy could never vote long.</a:t>
             </a:r>
           </a:p>
           <a:p>
@@ -9679,12 +9679,28 @@
               <a:buChar char="•"/>
             </a:pPr>
             <a:r>
-              <a:rPr sz="1000">
+              <a:rPr sz="750">
                 <a:solidFill>
                   <a:srgbClr val="8B94A6"/>
                 </a:solidFill>
               </a:rPr>
-              <a:t>The guardrail against stale figures had stale figures of its own — including its date.</a:t>
+              <a:t>•The guardrail against stale figures had stale figures of its own — including its date.</a:t>
+            </a:r>
+          </a:p>
+          <a:p>
+            <a:pPr marL="228600" indent="-228600" algn="l">
+              <a:lnSpc>
+                <a:spcPct val="100000"/>
+              </a:lnSpc>
+              <a:buChar char="•"/>
+            </a:pPr>
+            <a:r>
+              <a:rPr sz="750">
+                <a:solidFill>
+                  <a:srgbClr val="8B94A6"/>
+                </a:solidFill>
+              </a:rPr>
+              <a:t>•The audit trail could stop quietly; both order doors now refuse a trade it cannot record.</a:t>
             </a:r>
           </a:p>
         </p:txBody>

--- a/docs/investors/KAIROS_Investor_Deck.pptx
+++ b/docs/investors/KAIROS_Investor_Deck.pptx
@@ -4678,7 +4678,7 @@
                 <a:latin typeface="Consolas"/>
                 <a:ea typeface="Consolas"/>
               </a:rPr>
-              <a:t>python -m pytest tests -q        # 330 tests</a:t>
+              <a:t>python -m pytest tests -q        # 357 tests</a:t>
             </a:r>
           </a:p>
           <a:p>
@@ -5757,7 +5757,7 @@
                 <a:latin typeface="Consolas"/>
                 <a:ea typeface="Consolas"/>
               </a:rPr>
-              <a:t>12,668</a:t>
+              <a:t>12,809</a:t>
             </a:r>
           </a:p>
           <a:p>
@@ -6021,7 +6021,7 @@
                 <a:latin typeface="Consolas"/>
                 <a:ea typeface="Consolas"/>
               </a:rPr>
-              <a:t>330</a:t>
+              <a:t>357</a:t>
             </a:r>
           </a:p>
           <a:p>
@@ -8544,7 +8544,7 @@
                 <a:latin typeface="Segoe UI"/>
                 <a:ea typeface="Segoe UI"/>
               </a:rPr>
-              <a:t>A public repository: 12,668 lines, 37 modules, 330 tests, MIT.</a:t>
+              <a:t>A public repository: 12,809 lines, 37 modules, 357 tests, MIT.</a:t>
             </a:r>
           </a:p>
           <a:p>
@@ -9599,12 +9599,12 @@
               <a:buChar char="•"/>
             </a:pPr>
             <a:r>
-              <a:rPr sz="750">
+              <a:rPr sz="600">
                 <a:solidFill>
                   <a:srgbClr val="8B94A6"/>
                 </a:solidFill>
               </a:rPr>
-              <a:t>•Risk limits froze at process start; a tightened loss cap bound only after a restart.</a:t>
+              <a:t>Risk limits froze at process start; a tightened loss cap bound only after a restart.</a:t>
             </a:r>
           </a:p>
           <a:p>
@@ -9615,12 +9615,12 @@
               <a:buChar char="•"/>
             </a:pPr>
             <a:r>
-              <a:rPr sz="750">
+              <a:rPr sz="600">
                 <a:solidFill>
                   <a:srgbClr val="8B94A6"/>
                 </a:solidFill>
               </a:rPr>
-              <a:t>•Ledgers were written in place — a torn write reset the paper book to full capital.</a:t>
+              <a:t>Ledgers were written in place — a torn write reset the paper book to full capital.</a:t>
             </a:r>
           </a:p>
           <a:p>
@@ -9631,12 +9631,12 @@
               <a:buChar char="•"/>
             </a:pPr>
             <a:r>
-              <a:rPr sz="750">
+              <a:rPr sz="600">
                 <a:solidFill>
                   <a:srgbClr val="8B94A6"/>
                 </a:solidFill>
               </a:rPr>
-              <a:t>•The test suite could arm live mode and write the production audit trail.</a:t>
+              <a:t>The test suite could arm live mode and write the production audit trail.</a:t>
             </a:r>
           </a:p>
           <a:p>
@@ -9647,12 +9647,12 @@
               <a:buChar char="•"/>
             </a:pPr>
             <a:r>
-              <a:rPr sz="750">
+              <a:rPr sz="600">
                 <a:solidFill>
                   <a:srgbClr val="8B94A6"/>
                 </a:solidFill>
               </a:rPr>
-              <a:t>•A restart reported LIVE while running paper; a score read today's threshold as history.</a:t>
+              <a:t>A restart reported LIVE while running paper; a score read today's threshold as history.</a:t>
             </a:r>
           </a:p>
           <a:p>
@@ -9663,12 +9663,12 @@
               <a:buChar char="•"/>
             </a:pPr>
             <a:r>
-              <a:rPr sz="750">
+              <a:rPr sz="600">
                 <a:solidFill>
                   <a:srgbClr val="8B94A6"/>
                 </a:solidFill>
               </a:rPr>
-              <a:t>•A suspended provider was published healthy; one strategy could never vote long.</a:t>
+              <a:t>A suspended provider was published healthy; one strategy could never vote long.</a:t>
             </a:r>
           </a:p>
           <a:p>
@@ -9679,12 +9679,12 @@
               <a:buChar char="•"/>
             </a:pPr>
             <a:r>
-              <a:rPr sz="750">
+              <a:rPr sz="600">
                 <a:solidFill>
                   <a:srgbClr val="8B94A6"/>
                 </a:solidFill>
               </a:rPr>
-              <a:t>•The guardrail against stale figures had stale figures of its own — including its date.</a:t>
+              <a:t>The guardrail against stale figures had stale figures of its own — including its date.</a:t>
             </a:r>
           </a:p>
           <a:p>
@@ -9695,12 +9695,28 @@
               <a:buChar char="•"/>
             </a:pPr>
             <a:r>
-              <a:rPr sz="750">
+              <a:rPr sz="600">
                 <a:solidFill>
                   <a:srgbClr val="8B94A6"/>
                 </a:solidFill>
               </a:rPr>
-              <a:t>•The audit trail could stop quietly; both order doors now refuse a trade it cannot record.</a:t>
+              <a:t>The audit trail could stop quietly; both order doors refuse a trade it cannot record.</a:t>
+            </a:r>
+          </a:p>
+          <a:p>
+            <a:pPr marL="228600" indent="-228600" algn="l">
+              <a:lnSpc>
+                <a:spcPct val="100000"/>
+              </a:lnSpc>
+              <a:buChar char="•"/>
+            </a:pPr>
+            <a:r>
+              <a:rPr sz="600">
+                <a:solidFill>
+                  <a:srgbClr val="8B94A6"/>
+                </a:solidFill>
+              </a:rPr>
+              <a:t>One daily loss limit had two names; the tighter one now stops both doors, and names itself.</a:t>
             </a:r>
           </a:p>
         </p:txBody>

--- a/docs/investors/KAIROS_Investor_Deck.pptx
+++ b/docs/investors/KAIROS_Investor_Deck.pptx
@@ -320,7 +320,7 @@
                 <a:latin typeface="Segoe UI"/>
                 <a:ea typeface="Segoe UI"/>
               </a:rPr>
-              <a:t>KAIROS v2.6.2 · 2026-10-22 · github.com/zhaider5142009-oss/kairos</a:t>
+              <a:t>KAIROS v2.6.2 · 2026-10-23 · github.com/zhaider5142009-oss/kairos</a:t>
             </a:r>
           </a:p>
         </p:txBody>
@@ -4390,7 +4390,7 @@
                 <a:latin typeface="Segoe UI"/>
                 <a:ea typeface="Segoe UI"/>
               </a:rPr>
-              <a:t>The journal grows on its own every ten minutes: every prediction is in the dated ledger; 140 horizons matured, zero directional calls resolved so far. Nobody has to trust a slide to check this number; it prints itself, and it will print the losses too.</a:t>
+              <a:t>The journal grows on its own every ten minutes: every prediction is in the dated ledger; 263 horizons matured, zero directional calls resolved so far. Nobody has to trust a slide to check this number; it prints itself, and it will print the losses too.</a:t>
             </a:r>
           </a:p>
         </p:txBody>
@@ -4678,7 +4678,7 @@
                 <a:latin typeface="Consolas"/>
                 <a:ea typeface="Consolas"/>
               </a:rPr>
-              <a:t>python -m pytest tests -q        # 357 tests</a:t>
+              <a:t>python -m pytest tests -q        # 373 tests</a:t>
             </a:r>
           </a:p>
           <a:p>
@@ -5757,7 +5757,7 @@
                 <a:latin typeface="Consolas"/>
                 <a:ea typeface="Consolas"/>
               </a:rPr>
-              <a:t>12,809</a:t>
+              <a:t>12,990</a:t>
             </a:r>
           </a:p>
           <a:p>
@@ -6021,7 +6021,7 @@
                 <a:latin typeface="Consolas"/>
                 <a:ea typeface="Consolas"/>
               </a:rPr>
-              <a:t>357</a:t>
+              <a:t>373</a:t>
             </a:r>
           </a:p>
           <a:p>
@@ -6246,7 +6246,7 @@
                 <a:latin typeface="Consolas"/>
                 <a:ea typeface="Consolas"/>
               </a:rPr>
-              <a:t>figures verified against the repository on 2026-10-22</a:t>
+              <a:t>figures verified against the repository on 2026-10-23</a:t>
             </a:r>
           </a:p>
         </p:txBody>
@@ -8544,7 +8544,7 @@
                 <a:latin typeface="Segoe UI"/>
                 <a:ea typeface="Segoe UI"/>
               </a:rPr>
-              <a:t>A public repository: 12,809 lines, 37 modules, 357 tests, MIT.</a:t>
+              <a:t>A public repository: 12,990 lines, 37 modules, 373 tests, MIT.</a:t>
             </a:r>
           </a:p>
           <a:p>
@@ -8676,7 +8676,7 @@
                 <a:latin typeface="Segoe UI"/>
                 <a:ea typeface="Segoe UI"/>
               </a:rPr>
-              <a:t>140 horizons matured, and all 140 were non-trades.</a:t>
+              <a:t>263 horizons matured, and all 263 were non-trades.</a:t>
             </a:r>
           </a:p>
           <a:p>
@@ -9053,7 +9053,7 @@
           <a:bodyPr wrap="square" rtlCol="0" lIns="0" tIns="0" rIns="0" bIns="0" anchor="t"/>
           <a:lstStyle/>
           <a:p>
-            <a:pPr>
+            <a:pPr algn="l">
               <a:lnSpc>
                 <a:spcPct val="135000"/>
               </a:lnSpc>
@@ -9066,17 +9066,7 @@
                 <a:latin typeface="Segoe UI"/>
                 <a:ea typeface="Segoe UI"/>
               </a:rPr>
-              <a:t>140 resolved snapshots graded as wins.</a:t>
-            </a:r>
-            <a:r>
-              <a:rPr sz="1400">
-                <a:solidFill>
-                  <a:srgbClr val="8B94A6"/>
-                </a:solidFill>
-                <a:latin typeface="Segoe UI"/>
-                <a:ea typeface="Segoe UI"/>
-              </a:rPr>
-              <a:t> Not one of them was a call.</a:t>
+              <a:t>Every snapshot it had resolved was graded a win. Not one of them was a call.</a:t>
             </a:r>
           </a:p>
         </p:txBody>
@@ -9717,6 +9707,22 @@
                 </a:solidFill>
               </a:rPr>
               <a:t>One daily loss limit had two names; the tighter one now stops both doors, and names itself.</a:t>
+            </a:r>
+          </a:p>
+          <a:p>
+            <a:pPr marL="228600" indent="-228600" algn="l">
+              <a:lnSpc>
+                <a:spcPct val="100000"/>
+              </a:lnSpc>
+              <a:buChar char="•"/>
+            </a:pPr>
+            <a:r>
+              <a:rPr sz="600">
+                <a:solidFill>
+                  <a:srgbClr val="8B94A6"/>
+                </a:solidFill>
+              </a:rPr>
+              <a:t>The order queue rebuilt itself from its own unreadable read; now it refuses and says where.</a:t>
             </a:r>
           </a:p>
         </p:txBody>

--- a/docs/investors/KAIROS_Investor_Deck.pptx
+++ b/docs/investors/KAIROS_Investor_Deck.pptx
@@ -1092,7 +1092,7 @@
                 <a:latin typeface="Segoe UI"/>
                 <a:ea typeface="Segoe UI"/>
               </a:rPr>
-              <a:t>five properties worth more than any single signal</a:t>
+              <a:t>six properties worth more than any single signal</a:t>
             </a:r>
           </a:p>
         </p:txBody>
@@ -1552,7 +1552,10 @@
                 <a:latin typeface="Segoe UI"/>
                 <a:ea typeface="Segoe UI"/>
               </a:rPr>
-              <a:t>A named seat is answered by that seat only. A dead model shrinks the council instead of substituting a second opinion into the median.</a:t>
+              <a:t>A named seat is answered by that seat
+only: a dead model shrinks the council
+instead of doubling an opinion in the
+median, and retired slugs get reported.</a:t>
             </a:r>
           </a:p>
         </p:txBody>
@@ -1622,7 +1625,7 @@
                 <a:latin typeface="Segoe UI"/>
                 <a:ea typeface="Segoe UI"/>
               </a:rPr>
-              <a:t>Anti-rot by design</a:t>
+              <a:t>Attribution, per regime</a:t>
             </a:r>
           </a:p>
         </p:txBody>
@@ -1662,7 +1665,10 @@
                 <a:latin typeface="Segoe UI"/>
                 <a:ea typeface="Segoe UI"/>
               </a:rPr>
-              <a:t>Vendor model slugs retire without warning. Configured seats are checked against the live catalog every six hours and dead ones are reported, never hidden.</a:t>
+              <a:t>Each vote is weighted by realized
+out-of-sample skill, per horizon and
+per regime. Thin evidence earns no
+weight: the poll stays flat.</a:t>
             </a:r>
           </a:p>
         </p:txBody>
@@ -1882,7 +1888,10 @@
                 <a:latin typeface="Segoe UI"/>
                 <a:ea typeface="Segoe UI"/>
               </a:rPr>
-              <a:t>The risk layer does not know which broker is underneath it. PSX today, MT5 now, PMX scaffolded: swap the venue, keep the discipline.</a:t>
+              <a:t>The risk layer does not know which
+broker is underneath it. PSX cash,
+MT5 commodities and FX, PMEX futures:
+swap the venue, keep the discipline.</a:t>
             </a:r>
           </a:p>
         </p:txBody>
@@ -4678,7 +4687,7 @@
                 <a:latin typeface="Consolas"/>
                 <a:ea typeface="Consolas"/>
               </a:rPr>
-              <a:t>python -m pytest tests -q        # 373 tests</a:t>
+              <a:t>python -m pytest tests -q        # 395 tests</a:t>
             </a:r>
           </a:p>
           <a:p>
@@ -5757,7 +5766,7 @@
                 <a:latin typeface="Consolas"/>
                 <a:ea typeface="Consolas"/>
               </a:rPr>
-              <a:t>12,990</a:t>
+              <a:t>13,112</a:t>
             </a:r>
           </a:p>
           <a:p>
@@ -6021,7 +6030,7 @@
                 <a:latin typeface="Consolas"/>
                 <a:ea typeface="Consolas"/>
               </a:rPr>
-              <a:t>373</a:t>
+              <a:t>395</a:t>
             </a:r>
           </a:p>
           <a:p>
@@ -8544,7 +8553,7 @@
                 <a:latin typeface="Segoe UI"/>
                 <a:ea typeface="Segoe UI"/>
               </a:rPr>
-              <a:t>A public repository: 12,990 lines, 37 modules, 373 tests, MIT.</a:t>
+              <a:t>A public repository: 13,112 lines, 37 modules, 395 tests, MIT.</a:t>
             </a:r>
           </a:p>
           <a:p>

--- a/docs/investors/KAIROS_Investor_Deck.pptx
+++ b/docs/investors/KAIROS_Investor_Deck.pptx
@@ -4687,7 +4687,7 @@
                 <a:latin typeface="Consolas"/>
                 <a:ea typeface="Consolas"/>
               </a:rPr>
-              <a:t>python -m pytest tests -q        # 395 tests</a:t>
+              <a:t>python -m pytest tests -q        # 405 tests</a:t>
             </a:r>
           </a:p>
           <a:p>
@@ -5766,7 +5766,7 @@
                 <a:latin typeface="Consolas"/>
                 <a:ea typeface="Consolas"/>
               </a:rPr>
-              <a:t>13,112</a:t>
+              <a:t>13,654</a:t>
             </a:r>
           </a:p>
           <a:p>
@@ -5803,7 +5803,7 @@
                 <a:latin typeface="Segoe UI"/>
                 <a:ea typeface="Segoe UI"/>
               </a:rPr>
-              <a:t>37 modules, public under MIT, no closed core</a:t>
+              <a:t>38 modules, public under MIT, no closed core</a:t>
             </a:r>
           </a:p>
         </p:txBody>
@@ -6030,7 +6030,7 @@
                 <a:latin typeface="Consolas"/>
                 <a:ea typeface="Consolas"/>
               </a:rPr>
-              <a:t>395</a:t>
+              <a:t>405</a:t>
             </a:r>
           </a:p>
           <a:p>
@@ -8553,7 +8553,7 @@
                 <a:latin typeface="Segoe UI"/>
                 <a:ea typeface="Segoe UI"/>
               </a:rPr>
-              <a:t>A public repository: 13,112 lines, 37 modules, 395 tests, MIT.</a:t>
+              <a:t>A public repository: 13,654 lines, 38 modules, 405 tests, MIT.</a:t>
             </a:r>
           </a:p>
           <a:p>

--- a/docs/investors/KAIROS_Investor_Deck.pptx
+++ b/docs/investors/KAIROS_Investor_Deck.pptx
@@ -1625,7 +1625,7 @@
                 <a:latin typeface="Segoe UI"/>
                 <a:ea typeface="Segoe UI"/>
               </a:rPr>
-              <a:t>Attribution, per regime</a:t>
+              <a:t>Attribution, both axes</a:t>
             </a:r>
           </a:p>
         </p:txBody>
@@ -1658,17 +1658,14 @@
               </a:lnSpc>
             </a:pPr>
             <a:r>
-              <a:rPr sz="1250">
+              <a:rPr sz="1300">
                 <a:solidFill>
                   <a:srgbClr val="8B94A6"/>
                 </a:solidFill>
                 <a:latin typeface="Segoe UI"/>
                 <a:ea typeface="Segoe UI"/>
               </a:rPr>
-              <a:t>Each vote is weighted by realized
-out-of-sample skill, per horizon and
-per regime. Thin evidence earns no
-weight: the poll stays flat.</a:t>
+              <a:t>Skill is measured out-of-sample in a condition with both axes named: its own regime and the cross-asset tape. Thin evidence earns no weight.</a:t>
             </a:r>
           </a:p>
         </p:txBody>
@@ -4687,7 +4684,7 @@
                 <a:latin typeface="Consolas"/>
                 <a:ea typeface="Consolas"/>
               </a:rPr>
-              <a:t>python -m pytest tests -q        # 405 tests</a:t>
+              <a:t>python -m pytest tests -q        # 453 tests</a:t>
             </a:r>
           </a:p>
           <a:p>
@@ -5766,7 +5763,7 @@
                 <a:latin typeface="Consolas"/>
                 <a:ea typeface="Consolas"/>
               </a:rPr>
-              <a:t>13,654</a:t>
+              <a:t>14,278</a:t>
             </a:r>
           </a:p>
           <a:p>
@@ -5803,7 +5800,7 @@
                 <a:latin typeface="Segoe UI"/>
                 <a:ea typeface="Segoe UI"/>
               </a:rPr>
-              <a:t>38 modules, public under MIT, no closed core</a:t>
+              <a:t>39 modules, public under MIT, no closed core</a:t>
             </a:r>
           </a:p>
         </p:txBody>
@@ -6030,7 +6027,7 @@
                 <a:latin typeface="Consolas"/>
                 <a:ea typeface="Consolas"/>
               </a:rPr>
-              <a:t>405</a:t>
+              <a:t>453</a:t>
             </a:r>
           </a:p>
           <a:p>
@@ -8553,7 +8550,7 @@
                 <a:latin typeface="Segoe UI"/>
                 <a:ea typeface="Segoe UI"/>
               </a:rPr>
-              <a:t>A public repository: 13,654 lines, 38 modules, 405 tests, MIT.</a:t>
+              <a:t>A public repository: 14,278 lines, 39 modules, 453 tests, MIT.</a:t>
             </a:r>
           </a:p>
           <a:p>

--- a/docs/investors/KAIROS_Investor_Deck.pptx
+++ b/docs/investors/KAIROS_Investor_Deck.pptx
@@ -4684,7 +4684,7 @@
                 <a:latin typeface="Consolas"/>
                 <a:ea typeface="Consolas"/>
               </a:rPr>
-              <a:t>python -m pytest tests -q        # 453 tests</a:t>
+              <a:t>python -m pytest tests -q        # 528 tests</a:t>
             </a:r>
           </a:p>
           <a:p>
@@ -5763,7 +5763,7 @@
                 <a:latin typeface="Consolas"/>
                 <a:ea typeface="Consolas"/>
               </a:rPr>
-              <a:t>14,278</a:t>
+              <a:t>15,444</a:t>
             </a:r>
           </a:p>
           <a:p>
@@ -5800,7 +5800,7 @@
                 <a:latin typeface="Segoe UI"/>
                 <a:ea typeface="Segoe UI"/>
               </a:rPr>
-              <a:t>39 modules, public under MIT, no closed core</a:t>
+              <a:t>40 modules, public under MIT, no closed core</a:t>
             </a:r>
           </a:p>
         </p:txBody>
@@ -6027,7 +6027,7 @@
                 <a:latin typeface="Consolas"/>
                 <a:ea typeface="Consolas"/>
               </a:rPr>
-              <a:t>453</a:t>
+              <a:t>528</a:t>
             </a:r>
           </a:p>
           <a:p>
@@ -8550,7 +8550,7 @@
                 <a:latin typeface="Segoe UI"/>
                 <a:ea typeface="Segoe UI"/>
               </a:rPr>
-              <a:t>A public repository: 14,278 lines, 39 modules, 453 tests, MIT.</a:t>
+              <a:t>A public repository: 15,444 lines, 40 modules, 528 tests, MIT.</a:t>
             </a:r>
           </a:p>
           <a:p>

--- a/docs/investors/KAIROS_Investor_Deck.pptx
+++ b/docs/investors/KAIROS_Investor_Deck.pptx
@@ -4684,7 +4684,7 @@
                 <a:latin typeface="Consolas"/>
                 <a:ea typeface="Consolas"/>
               </a:rPr>
-              <a:t>python -m pytest tests -q        # 528 tests</a:t>
+              <a:t>python -m pytest tests -q        # 607 tests</a:t>
             </a:r>
           </a:p>
           <a:p>
@@ -5763,7 +5763,7 @@
                 <a:latin typeface="Consolas"/>
                 <a:ea typeface="Consolas"/>
               </a:rPr>
-              <a:t>15,444</a:t>
+              <a:t>15,898</a:t>
             </a:r>
           </a:p>
           <a:p>
@@ -6027,7 +6027,7 @@
                 <a:latin typeface="Consolas"/>
                 <a:ea typeface="Consolas"/>
               </a:rPr>
-              <a:t>528</a:t>
+              <a:t>607</a:t>
             </a:r>
           </a:p>
           <a:p>
@@ -8550,7 +8550,7 @@
                 <a:latin typeface="Segoe UI"/>
                 <a:ea typeface="Segoe UI"/>
               </a:rPr>
-              <a:t>A public repository: 15,444 lines, 40 modules, 528 tests, MIT.</a:t>
+              <a:t>A public repository: 15,898 lines, 40 modules, 607 tests, MIT.</a:t>
             </a:r>
           </a:p>
           <a:p>

--- a/docs/investors/KAIROS_Investor_Deck.pptx
+++ b/docs/investors/KAIROS_Investor_Deck.pptx
@@ -4684,7 +4684,7 @@
                 <a:latin typeface="Consolas"/>
                 <a:ea typeface="Consolas"/>
               </a:rPr>
-              <a:t>python -m pytest tests -q        # 607 tests</a:t>
+              <a:t>python -m pytest tests -q        # 621 tests</a:t>
             </a:r>
           </a:p>
           <a:p>
@@ -5763,7 +5763,7 @@
                 <a:latin typeface="Consolas"/>
                 <a:ea typeface="Consolas"/>
               </a:rPr>
-              <a:t>15,898</a:t>
+              <a:t>16,347</a:t>
             </a:r>
           </a:p>
           <a:p>
@@ -5800,7 +5800,7 @@
                 <a:latin typeface="Segoe UI"/>
                 <a:ea typeface="Segoe UI"/>
               </a:rPr>
-              <a:t>40 modules, public under MIT, no closed core</a:t>
+              <a:t>41 modules, public under MIT, no closed core</a:t>
             </a:r>
           </a:p>
         </p:txBody>
@@ -6027,7 +6027,7 @@
                 <a:latin typeface="Consolas"/>
                 <a:ea typeface="Consolas"/>
               </a:rPr>
-              <a:t>607</a:t>
+              <a:t>621</a:t>
             </a:r>
           </a:p>
           <a:p>
@@ -8550,7 +8550,7 @@
                 <a:latin typeface="Segoe UI"/>
                 <a:ea typeface="Segoe UI"/>
               </a:rPr>
-              <a:t>A public repository: 15,898 lines, 40 modules, 607 tests, MIT.</a:t>
+              <a:t>A public repository: 16,347 lines, 41 modules, 621 tests, MIT.</a:t>
             </a:r>
           </a:p>
           <a:p>

--- a/docs/investors/KAIROS_Investor_Deck.pptx
+++ b/docs/investors/KAIROS_Investor_Deck.pptx
@@ -4684,7 +4684,7 @@
                 <a:latin typeface="Consolas"/>
                 <a:ea typeface="Consolas"/>
               </a:rPr>
-              <a:t>python -m pytest tests -q        # 621 tests</a:t>
+              <a:t>python -m pytest tests -q        # 667 tests</a:t>
             </a:r>
           </a:p>
           <a:p>
@@ -5763,7 +5763,7 @@
                 <a:latin typeface="Consolas"/>
                 <a:ea typeface="Consolas"/>
               </a:rPr>
-              <a:t>16,347</a:t>
+              <a:t>17,212</a:t>
             </a:r>
           </a:p>
           <a:p>
@@ -5800,7 +5800,7 @@
                 <a:latin typeface="Segoe UI"/>
                 <a:ea typeface="Segoe UI"/>
               </a:rPr>
-              <a:t>41 modules, public under MIT, no closed core</a:t>
+              <a:t>42 modules, public under MIT, no closed core</a:t>
             </a:r>
           </a:p>
         </p:txBody>
@@ -6027,7 +6027,7 @@
                 <a:latin typeface="Consolas"/>
                 <a:ea typeface="Consolas"/>
               </a:rPr>
-              <a:t>621</a:t>
+              <a:t>667</a:t>
             </a:r>
           </a:p>
           <a:p>
@@ -8550,7 +8550,7 @@
                 <a:latin typeface="Segoe UI"/>
                 <a:ea typeface="Segoe UI"/>
               </a:rPr>
-              <a:t>A public repository: 16,347 lines, 41 modules, 621 tests, MIT.</a:t>
+              <a:t>A public repository: 17,212 lines of Python, 42 modules, 667 passing tests, MIT.</a:t>
             </a:r>
           </a:p>
           <a:p>

--- a/docs/investors/KAIROS_Investor_Deck.pptx
+++ b/docs/investors/KAIROS_Investor_Deck.pptx
@@ -320,7 +320,7 @@
                 <a:latin typeface="Segoe UI"/>
                 <a:ea typeface="Segoe UI"/>
               </a:rPr>
-              <a:t>KAIROS v2.6.2 · 2026-10-23 · github.com/zhaider5142009-oss/kairos</a:t>
+              <a:t>KAIROS v2.6.2 · 2026-10-24 · github.com/zhaider5142009-oss/kairos</a:t>
             </a:r>
           </a:p>
         </p:txBody>
@@ -4684,7 +4684,7 @@
                 <a:latin typeface="Consolas"/>
                 <a:ea typeface="Consolas"/>
               </a:rPr>
-              <a:t>python -m pytest tests -q        # 667 tests</a:t>
+              <a:t>python -m pytest tests -q        # 673 tests</a:t>
             </a:r>
           </a:p>
           <a:p>
@@ -5763,7 +5763,7 @@
                 <a:latin typeface="Consolas"/>
                 <a:ea typeface="Consolas"/>
               </a:rPr>
-              <a:t>17,212</a:t>
+              <a:t>17,226</a:t>
             </a:r>
           </a:p>
           <a:p>
@@ -6027,7 +6027,7 @@
                 <a:latin typeface="Consolas"/>
                 <a:ea typeface="Consolas"/>
               </a:rPr>
-              <a:t>667</a:t>
+              <a:t>673</a:t>
             </a:r>
           </a:p>
           <a:p>
@@ -6252,7 +6252,7 @@
                 <a:latin typeface="Consolas"/>
                 <a:ea typeface="Consolas"/>
               </a:rPr>
-              <a:t>figures verified against the repository on 2026-10-23</a:t>
+              <a:t>figures verified against the repository on 2026-10-24</a:t>
             </a:r>
           </a:p>
         </p:txBody>
@@ -8550,7 +8550,7 @@
                 <a:latin typeface="Segoe UI"/>
                 <a:ea typeface="Segoe UI"/>
               </a:rPr>
-              <a:t>A public repository: 17,212 lines of Python, 42 modules, 667 passing tests, MIT.</a:t>
+              <a:t>A public repository: 17,226 lines of Python, 42 modules, 673 passing tests, MIT.</a:t>
             </a:r>
           </a:p>
           <a:p>

--- a/docs/investors/KAIROS_Investor_Deck.pptx
+++ b/docs/investors/KAIROS_Investor_Deck.pptx
@@ -4684,7 +4684,7 @@
                 <a:latin typeface="Consolas"/>
                 <a:ea typeface="Consolas"/>
               </a:rPr>
-              <a:t>python -m pytest tests -q        # 673 tests</a:t>
+              <a:t>python -m pytest tests -q        # 675 tests</a:t>
             </a:r>
           </a:p>
           <a:p>
@@ -6027,7 +6027,7 @@
                 <a:latin typeface="Consolas"/>
                 <a:ea typeface="Consolas"/>
               </a:rPr>
-              <a:t>673</a:t>
+              <a:t>675</a:t>
             </a:r>
           </a:p>
           <a:p>
@@ -8550,7 +8550,7 @@
                 <a:latin typeface="Segoe UI"/>
                 <a:ea typeface="Segoe UI"/>
               </a:rPr>
-              <a:t>A public repository: 17,226 lines of Python, 42 modules, 673 passing tests, MIT.</a:t>
+              <a:t>A public repository: 17,226 lines of Python, 42 modules, 675 passing tests, MIT.</a:t>
             </a:r>
           </a:p>
           <a:p>

--- a/docs/investors/KAIROS_Investor_Deck.pptx
+++ b/docs/investors/KAIROS_Investor_Deck.pptx
@@ -4684,7 +4684,7 @@
                 <a:latin typeface="Consolas"/>
                 <a:ea typeface="Consolas"/>
               </a:rPr>
-              <a:t>python -m pytest tests -q        # 675 tests</a:t>
+              <a:t>python -m pytest tests -q        # 676 tests</a:t>
             </a:r>
           </a:p>
           <a:p>
@@ -5763,7 +5763,7 @@
                 <a:latin typeface="Consolas"/>
                 <a:ea typeface="Consolas"/>
               </a:rPr>
-              <a:t>17,226</a:t>
+              <a:t>17,236</a:t>
             </a:r>
           </a:p>
           <a:p>
@@ -6027,7 +6027,7 @@
                 <a:latin typeface="Consolas"/>
                 <a:ea typeface="Consolas"/>
               </a:rPr>
-              <a:t>675</a:t>
+              <a:t>676</a:t>
             </a:r>
           </a:p>
           <a:p>
@@ -8550,7 +8550,7 @@
                 <a:latin typeface="Segoe UI"/>
                 <a:ea typeface="Segoe UI"/>
               </a:rPr>
-              <a:t>A public repository: 17,226 lines of Python, 42 modules, 675 passing tests, MIT.</a:t>
+              <a:t>A public repository: 17,236 lines of Python, 42 modules, 676 passing tests, MIT.</a:t>
             </a:r>
           </a:p>
           <a:p>

--- a/docs/investors/KAIROS_Investor_Deck.pptx
+++ b/docs/investors/KAIROS_Investor_Deck.pptx
@@ -4396,7 +4396,7 @@
                 <a:latin typeface="Segoe UI"/>
                 <a:ea typeface="Segoe UI"/>
               </a:rPr>
-              <a:t>The journal grows on its own every ten minutes: every prediction is in the dated ledger; 263 horizons matured, zero directional calls resolved so far. Nobody has to trust a slide to check this number; it prints itself, and it will print the losses too.</a:t>
+              <a:t>The journal grows on its own every ten minutes: every prediction is in the dated ledger; 288 horizons matured, zero directional calls resolved so far. Nobody has to trust a slide to check this number; it prints itself, and it will print the losses too.</a:t>
             </a:r>
           </a:p>
         </p:txBody>
@@ -4684,7 +4684,7 @@
                 <a:latin typeface="Consolas"/>
                 <a:ea typeface="Consolas"/>
               </a:rPr>
-              <a:t>python -m pytest tests -q        # 676 tests</a:t>
+              <a:t>python -m pytest tests -q        # 681 tests</a:t>
             </a:r>
           </a:p>
           <a:p>
@@ -5763,7 +5763,7 @@
                 <a:latin typeface="Consolas"/>
                 <a:ea typeface="Consolas"/>
               </a:rPr>
-              <a:t>17,236</a:t>
+              <a:t>17,273</a:t>
             </a:r>
           </a:p>
           <a:p>
@@ -6027,7 +6027,7 @@
                 <a:latin typeface="Consolas"/>
                 <a:ea typeface="Consolas"/>
               </a:rPr>
-              <a:t>676</a:t>
+              <a:t>681</a:t>
             </a:r>
           </a:p>
           <a:p>
@@ -8550,7 +8550,7 @@
                 <a:latin typeface="Segoe UI"/>
                 <a:ea typeface="Segoe UI"/>
               </a:rPr>
-              <a:t>A public repository: 17,236 lines of Python, 42 modules, 676 passing tests, MIT.</a:t>
+              <a:t>A public repository: 17,273 lines of Python, 42 modules, 681 passing tests, MIT.</a:t>
             </a:r>
           </a:p>
           <a:p>
@@ -8682,7 +8682,7 @@
                 <a:latin typeface="Segoe UI"/>
                 <a:ea typeface="Segoe UI"/>
               </a:rPr>
-              <a:t>263 horizons matured, and all 263 were non-trades.</a:t>
+              <a:t>288 horizons matured, and all 288 were non-trades.</a:t>
             </a:r>
           </a:p>
           <a:p>

--- a/docs/investors/KAIROS_Investor_Deck.pptx
+++ b/docs/investors/KAIROS_Investor_Deck.pptx
@@ -4684,7 +4684,7 @@
                 <a:latin typeface="Consolas"/>
                 <a:ea typeface="Consolas"/>
               </a:rPr>
-              <a:t>python -m pytest tests -q        # 681 tests</a:t>
+              <a:t>python -m pytest tests -q        # 683 tests</a:t>
             </a:r>
           </a:p>
           <a:p>
@@ -5763,7 +5763,7 @@
                 <a:latin typeface="Consolas"/>
                 <a:ea typeface="Consolas"/>
               </a:rPr>
-              <a:t>17,273</a:t>
+              <a:t>17,275</a:t>
             </a:r>
           </a:p>
           <a:p>
@@ -6027,7 +6027,7 @@
                 <a:latin typeface="Consolas"/>
                 <a:ea typeface="Consolas"/>
               </a:rPr>
-              <a:t>681</a:t>
+              <a:t>683</a:t>
             </a:r>
           </a:p>
           <a:p>
@@ -8550,7 +8550,7 @@
                 <a:latin typeface="Segoe UI"/>
                 <a:ea typeface="Segoe UI"/>
               </a:rPr>
-              <a:t>A public repository: 17,273 lines of Python, 42 modules, 681 passing tests, MIT.</a:t>
+              <a:t>A public repository: 17,275 lines of Python, 42 modules, 683 passing tests, MIT.</a:t>
             </a:r>
           </a:p>
           <a:p>

--- a/docs/investors/KAIROS_Investor_Deck.pptx
+++ b/docs/investors/KAIROS_Investor_Deck.pptx
@@ -374,8 +374,8 @@
         </p:nvSpPr>
         <p:spPr>
           <a:xfrm>
-            <a:off x="7620000" y="1819275"/>
-            <a:ext cx="190500" cy="2276475"/>
+            <a:off x="7620000" y="1676400"/>
+            <a:ext cx="190500" cy="2419350"/>
           </a:xfrm>
           <a:prstGeom prst="rect">
             <a:avLst/>
@@ -409,8 +409,8 @@
         </p:nvSpPr>
         <p:spPr>
           <a:xfrm>
-            <a:off x="7886700" y="2562225"/>
-            <a:ext cx="190500" cy="1533525"/>
+            <a:off x="7886700" y="2667000"/>
+            <a:ext cx="190500" cy="1428750"/>
           </a:xfrm>
           <a:prstGeom prst="rect">
             <a:avLst/>
@@ -444,8 +444,8 @@
         </p:nvSpPr>
         <p:spPr>
           <a:xfrm>
-            <a:off x="8153400" y="2695575"/>
-            <a:ext cx="190500" cy="1400175"/>
+            <a:off x="8153400" y="2809875"/>
+            <a:ext cx="190500" cy="1285875"/>
           </a:xfrm>
           <a:prstGeom prst="rect">
             <a:avLst/>
@@ -479,8 +479,8 @@
         </p:nvSpPr>
         <p:spPr>
           <a:xfrm>
-            <a:off x="8420100" y="3257550"/>
-            <a:ext cx="190500" cy="838200"/>
+            <a:off x="8420100" y="3448050"/>
+            <a:ext cx="190500" cy="647700"/>
           </a:xfrm>
           <a:prstGeom prst="rect">
             <a:avLst/>
@@ -514,8 +514,8 @@
         </p:nvSpPr>
         <p:spPr>
           <a:xfrm>
-            <a:off x="8686800" y="3448050"/>
-            <a:ext cx="190500" cy="647700"/>
+            <a:off x="8686800" y="3714750"/>
+            <a:ext cx="190500" cy="381000"/>
           </a:xfrm>
           <a:prstGeom prst="rect">
             <a:avLst/>
@@ -549,8 +549,43 @@
         </p:nvSpPr>
         <p:spPr>
           <a:xfrm>
-            <a:off x="8953500" y="4095750"/>
-            <a:ext cx="190500" cy="57150"/>
+            <a:off x="8953500" y="3943350"/>
+            <a:ext cx="190500" cy="152400"/>
+          </a:xfrm>
+          <a:prstGeom prst="rect">
+            <a:avLst/>
+          </a:prstGeom>
+          <a:solidFill>
+            <a:srgbClr val="2FD48A"/>
+          </a:solidFill>
+        </p:spPr>
+        <p:txBody>
+          <a:bodyPr wrap="square" rtlCol="0"/>
+          <a:lstStyle/>
+          <a:p>
+            <a:r>
+              <a:rPr/>
+              <a:t/>
+            </a:r>
+          </a:p>
+        </p:txBody>
+      </p:sp>
+      <p:sp>
+        <p:nvSpPr>
+          <p:cNvPr id="15" name="Shape 15">
+            <a:extLst>
+              <a:ext uri="{FF2B5EF4-FFF2-40B4-BE49-F238E27FC236}">
+                <a16:creationId xmlns:a16="http://schemas.microsoft.com/office/drawing/2014/main" id="{05422713-4FB9-4B7A-95AD-FB81EBAA1A8D}"/>
+              </a:ext>
+            </a:extLst>
+          </p:cNvPr>
+          <p:cNvSpPr/>
+          <p:nvPr/>
+        </p:nvSpPr>
+        <p:spPr>
+          <a:xfrm>
+            <a:off x="9220200" y="4095750"/>
+            <a:ext cx="190500" cy="66675"/>
           </a:xfrm>
           <a:prstGeom prst="rect">
             <a:avLst/>
@@ -572,10 +607,10 @@
       </p:sp>
       <p:sp>
         <p:nvSpPr>
-          <p:cNvPr id="15" name="Shape 15">
-            <a:extLst>
-              <a:ext uri="{FF2B5EF4-FFF2-40B4-BE49-F238E27FC236}">
-                <a16:creationId xmlns:a16="http://schemas.microsoft.com/office/drawing/2014/main" id="{05422713-4FB9-4B7A-95AD-FB81EBAA1A8D}"/>
+          <p:cNvPr id="16" name="Shape 16">
+            <a:extLst>
+              <a:ext uri="{FF2B5EF4-FFF2-40B4-BE49-F238E27FC236}">
+                <a16:creationId xmlns:a16="http://schemas.microsoft.com/office/drawing/2014/main" id="{280B217D-25B0-41E0-B813-5BBF990C60B5}"/>
               </a:ext>
             </a:extLst>
           </p:cNvPr>
@@ -584,8 +619,8 @@
         </p:nvSpPr>
         <p:spPr>
           <a:xfrm>
-            <a:off x="9220200" y="4095750"/>
-            <a:ext cx="190500" cy="66675"/>
+            <a:off x="9486900" y="4095750"/>
+            <a:ext cx="190500" cy="161925"/>
           </a:xfrm>
           <a:prstGeom prst="rect">
             <a:avLst/>
@@ -607,10 +642,10 @@
       </p:sp>
       <p:sp>
         <p:nvSpPr>
-          <p:cNvPr id="16" name="Shape 16">
-            <a:extLst>
-              <a:ext uri="{FF2B5EF4-FFF2-40B4-BE49-F238E27FC236}">
-                <a16:creationId xmlns:a16="http://schemas.microsoft.com/office/drawing/2014/main" id="{280B217D-25B0-41E0-B813-5BBF990C60B5}"/>
+          <p:cNvPr id="17" name="Shape 17">
+            <a:extLst>
+              <a:ext uri="{FF2B5EF4-FFF2-40B4-BE49-F238E27FC236}">
+                <a16:creationId xmlns:a16="http://schemas.microsoft.com/office/drawing/2014/main" id="{D08CB9DE-C8DB-423E-8BAD-B4306B0E7D32}"/>
               </a:ext>
             </a:extLst>
           </p:cNvPr>
@@ -619,8 +654,8 @@
         </p:nvSpPr>
         <p:spPr>
           <a:xfrm>
-            <a:off x="9486900" y="4095750"/>
-            <a:ext cx="190500" cy="76200"/>
+            <a:off x="9753600" y="4095750"/>
+            <a:ext cx="190500" cy="266700"/>
           </a:xfrm>
           <a:prstGeom prst="rect">
             <a:avLst/>
@@ -642,10 +677,10 @@
       </p:sp>
       <p:sp>
         <p:nvSpPr>
-          <p:cNvPr id="17" name="Shape 17">
-            <a:extLst>
-              <a:ext uri="{FF2B5EF4-FFF2-40B4-BE49-F238E27FC236}">
-                <a16:creationId xmlns:a16="http://schemas.microsoft.com/office/drawing/2014/main" id="{D08CB9DE-C8DB-423E-8BAD-B4306B0E7D32}"/>
+          <p:cNvPr id="18" name="Shape 18">
+            <a:extLst>
+              <a:ext uri="{FF2B5EF4-FFF2-40B4-BE49-F238E27FC236}">
+                <a16:creationId xmlns:a16="http://schemas.microsoft.com/office/drawing/2014/main" id="{E2066A32-3B17-4AD7-AD36-BE01098C4AA9}"/>
               </a:ext>
             </a:extLst>
           </p:cNvPr>
@@ -654,8 +689,8 @@
         </p:nvSpPr>
         <p:spPr>
           <a:xfrm>
-            <a:off x="9753600" y="4095750"/>
-            <a:ext cx="190500" cy="95250"/>
+            <a:off x="10020300" y="4095750"/>
+            <a:ext cx="190500" cy="304800"/>
           </a:xfrm>
           <a:prstGeom prst="rect">
             <a:avLst/>
@@ -677,10 +712,10 @@
       </p:sp>
       <p:sp>
         <p:nvSpPr>
-          <p:cNvPr id="18" name="Shape 18">
-            <a:extLst>
-              <a:ext uri="{FF2B5EF4-FFF2-40B4-BE49-F238E27FC236}">
-                <a16:creationId xmlns:a16="http://schemas.microsoft.com/office/drawing/2014/main" id="{E2066A32-3B17-4AD7-AD36-BE01098C4AA9}"/>
+          <p:cNvPr id="19" name="Shape 19">
+            <a:extLst>
+              <a:ext uri="{FF2B5EF4-FFF2-40B4-BE49-F238E27FC236}">
+                <a16:creationId xmlns:a16="http://schemas.microsoft.com/office/drawing/2014/main" id="{687C8485-A68B-45AD-8F5C-B7A1FEC2D968}"/>
               </a:ext>
             </a:extLst>
           </p:cNvPr>
@@ -689,8 +724,8 @@
         </p:nvSpPr>
         <p:spPr>
           <a:xfrm>
-            <a:off x="10020300" y="4095750"/>
-            <a:ext cx="190500" cy="200025"/>
+            <a:off x="10287000" y="4095750"/>
+            <a:ext cx="190500" cy="342900"/>
           </a:xfrm>
           <a:prstGeom prst="rect">
             <a:avLst/>
@@ -712,10 +747,10 @@
       </p:sp>
       <p:sp>
         <p:nvSpPr>
-          <p:cNvPr id="19" name="Shape 19">
-            <a:extLst>
-              <a:ext uri="{FF2B5EF4-FFF2-40B4-BE49-F238E27FC236}">
-                <a16:creationId xmlns:a16="http://schemas.microsoft.com/office/drawing/2014/main" id="{687C8485-A68B-45AD-8F5C-B7A1FEC2D968}"/>
+          <p:cNvPr id="20" name="Shape 20">
+            <a:extLst>
+              <a:ext uri="{FF2B5EF4-FFF2-40B4-BE49-F238E27FC236}">
+                <a16:creationId xmlns:a16="http://schemas.microsoft.com/office/drawing/2014/main" id="{480CA3AA-D10D-41B9-9A3C-5D2CDB848764}"/>
               </a:ext>
             </a:extLst>
           </p:cNvPr>
@@ -724,8 +759,8 @@
         </p:nvSpPr>
         <p:spPr>
           <a:xfrm>
-            <a:off x="10287000" y="4095750"/>
-            <a:ext cx="190500" cy="323850"/>
+            <a:off x="10553700" y="4095750"/>
+            <a:ext cx="190500" cy="371475"/>
           </a:xfrm>
           <a:prstGeom prst="rect">
             <a:avLst/>
@@ -747,10 +782,10 @@
       </p:sp>
       <p:sp>
         <p:nvSpPr>
-          <p:cNvPr id="20" name="Shape 20">
-            <a:extLst>
-              <a:ext uri="{FF2B5EF4-FFF2-40B4-BE49-F238E27FC236}">
-                <a16:creationId xmlns:a16="http://schemas.microsoft.com/office/drawing/2014/main" id="{480CA3AA-D10D-41B9-9A3C-5D2CDB848764}"/>
+          <p:cNvPr id="21" name="Shape 21">
+            <a:extLst>
+              <a:ext uri="{FF2B5EF4-FFF2-40B4-BE49-F238E27FC236}">
+                <a16:creationId xmlns:a16="http://schemas.microsoft.com/office/drawing/2014/main" id="{6E7BC438-91E5-4D5F-91E5-57851538C12B}"/>
               </a:ext>
             </a:extLst>
           </p:cNvPr>
@@ -759,8 +794,8 @@
         </p:nvSpPr>
         <p:spPr>
           <a:xfrm>
-            <a:off x="10553700" y="4095750"/>
-            <a:ext cx="190500" cy="476250"/>
+            <a:off x="10820400" y="4095750"/>
+            <a:ext cx="190500" cy="819150"/>
           </a:xfrm>
           <a:prstGeom prst="rect">
             <a:avLst/>
@@ -782,10 +817,10 @@
       </p:sp>
       <p:sp>
         <p:nvSpPr>
-          <p:cNvPr id="21" name="Shape 21">
-            <a:extLst>
-              <a:ext uri="{FF2B5EF4-FFF2-40B4-BE49-F238E27FC236}">
-                <a16:creationId xmlns:a16="http://schemas.microsoft.com/office/drawing/2014/main" id="{6E7BC438-91E5-4D5F-91E5-57851538C12B}"/>
+          <p:cNvPr id="22" name="Shape 22">
+            <a:extLst>
+              <a:ext uri="{FF2B5EF4-FFF2-40B4-BE49-F238E27FC236}">
+                <a16:creationId xmlns:a16="http://schemas.microsoft.com/office/drawing/2014/main" id="{366D369E-0F43-4485-9DF1-242E90A93444}"/>
               </a:ext>
             </a:extLst>
           </p:cNvPr>
@@ -794,8 +829,8 @@
         </p:nvSpPr>
         <p:spPr>
           <a:xfrm>
-            <a:off x="10820400" y="4095750"/>
-            <a:ext cx="190500" cy="495300"/>
+            <a:off x="11087100" y="4095750"/>
+            <a:ext cx="190500" cy="828675"/>
           </a:xfrm>
           <a:prstGeom prst="rect">
             <a:avLst/>
@@ -817,41 +852,6 @@
       </p:sp>
       <p:sp>
         <p:nvSpPr>
-          <p:cNvPr id="22" name="Shape 22">
-            <a:extLst>
-              <a:ext uri="{FF2B5EF4-FFF2-40B4-BE49-F238E27FC236}">
-                <a16:creationId xmlns:a16="http://schemas.microsoft.com/office/drawing/2014/main" id="{366D369E-0F43-4485-9DF1-242E90A93444}"/>
-              </a:ext>
-            </a:extLst>
-          </p:cNvPr>
-          <p:cNvSpPr/>
-          <p:nvPr/>
-        </p:nvSpPr>
-        <p:spPr>
-          <a:xfrm>
-            <a:off x="11087100" y="4095750"/>
-            <a:ext cx="190500" cy="752475"/>
-          </a:xfrm>
-          <a:prstGeom prst="rect">
-            <a:avLst/>
-          </a:prstGeom>
-          <a:solidFill>
-            <a:srgbClr val="FF5C6C"/>
-          </a:solidFill>
-        </p:spPr>
-        <p:txBody>
-          <a:bodyPr wrap="square" rtlCol="0"/>
-          <a:lstStyle/>
-          <a:p>
-            <a:r>
-              <a:rPr/>
-              <a:t/>
-            </a:r>
-          </a:p>
-        </p:txBody>
-      </p:sp>
-      <p:sp>
-        <p:nvSpPr>
           <p:cNvPr id="23" name="TextBox 23">
             <a:extLst>
               <a:ext uri="{FF2B5EF4-FFF2-40B4-BE49-F238E27FC236}">
@@ -881,7 +881,7 @@
                 <a:latin typeface="Segoe UI"/>
                 <a:ea typeface="Segoe UI"/>
               </a:rPr>
-              <a:t>5 / 14</a:t>
+              <a:t>4 / 14</a:t>
             </a:r>
             <a:r>
               <a:rPr sz="1300">
@@ -968,7 +968,7 @@
         <p:spPr>
           <a:xfrm>
             <a:off x="7524750" y="4267200"/>
-            <a:ext cx="3810000" cy="335280"/>
+            <a:ext cx="3810000" cy="571500"/>
           </a:xfrm>
         </p:spPr>
         <p:txBody>
@@ -984,7 +984,33 @@
                 <a:latin typeface="Consolas"/>
                 <a:ea typeface="Consolas"/>
               </a:rPr>
-              <a:t>SILVER  GOLD  WHEAT  WTI  HBL | MCB  EURUSD  NATGAS  KSE100  BTC  LUCK  COPPER  BRENT  OGDC</a:t>
+              <a:t>SILVER  WHEAT  GOLD  HBL  WTI  BRENT |</a:t>
+            </a:r>
+          </a:p>
+          <a:p>
+            <a:pPr algn="l"/>
+            <a:r>
+              <a:rPr sz="1100">
+                <a:solidFill>
+                  <a:srgbClr val="5A6478"/>
+                </a:solidFill>
+                <a:latin typeface="Consolas"/>
+                <a:ea typeface="Consolas"/>
+              </a:rPr>
+              <a:t>EURUSD  MCB  KSE100  BTC  COPPER</a:t>
+            </a:r>
+          </a:p>
+          <a:p>
+            <a:pPr algn="l"/>
+            <a:r>
+              <a:rPr sz="1100">
+                <a:solidFill>
+                  <a:srgbClr val="5A6478"/>
+                </a:solidFill>
+                <a:latin typeface="Consolas"/>
+                <a:ea typeface="Consolas"/>
+              </a:rPr>
+              <a:t>LUCK  NATGAS  OGDC</a:t>
             </a:r>
           </a:p>
         </p:txBody>
@@ -4684,7 +4710,7 @@
                 <a:latin typeface="Consolas"/>
                 <a:ea typeface="Consolas"/>
               </a:rPr>
-              <a:t>python -m pytest tests -q        # 683 tests</a:t>
+              <a:t>python -m pytest tests -q        # 696 tests</a:t>
             </a:r>
           </a:p>
           <a:p>
@@ -5763,7 +5789,7 @@
                 <a:latin typeface="Consolas"/>
                 <a:ea typeface="Consolas"/>
               </a:rPr>
-              <a:t>17,275</a:t>
+              <a:t>17,411</a:t>
             </a:r>
           </a:p>
           <a:p>
@@ -6027,7 +6053,7 @@
                 <a:latin typeface="Consolas"/>
                 <a:ea typeface="Consolas"/>
               </a:rPr>
-              <a:t>683</a:t>
+              <a:t>696</a:t>
             </a:r>
           </a:p>
           <a:p>
@@ -6325,7 +6351,7 @@
                 <a:latin typeface="Segoe UI"/>
                 <a:ea typeface="Segoe UI"/>
               </a:rPr>
-              <a:t>Out-of-sample: 5 of 14 profitable</a:t>
+              <a:t>Out-of-sample: 4 of 14 profitable</a:t>
             </a:r>
           </a:p>
         </p:txBody>
@@ -6486,7 +6512,7 @@
         <p:spPr>
           <a:xfrm>
             <a:off x="3248025" y="1819275"/>
-            <a:ext cx="2905125" cy="209550"/>
+            <a:ext cx="2857500" cy="209550"/>
           </a:xfrm>
           <a:prstGeom prst="rect">
             <a:avLst/>
@@ -6520,7 +6546,7 @@
         </p:nvSpPr>
         <p:spPr>
           <a:xfrm>
-            <a:off x="6248400" y="1809750"/>
+            <a:off x="6200775" y="1809750"/>
             <a:ext cx="762000" cy="228600"/>
           </a:xfrm>
         </p:spPr>
@@ -6536,7 +6562,7 @@
                 <a:latin typeface="Consolas"/>
                 <a:ea typeface="Consolas"/>
               </a:rPr>
-              <a:t>+43.5%</a:t>
+              <a:t>+46.2%</a:t>
             </a:r>
           </a:p>
         </p:txBody>
@@ -6572,7 +6598,7 @@
                 <a:latin typeface="Consolas"/>
                 <a:ea typeface="Consolas"/>
               </a:rPr>
-              <a:t>GOLD</a:t>
+              <a:t>WHEAT</a:t>
             </a:r>
           </a:p>
         </p:txBody>
@@ -6592,7 +6618,7 @@
         <p:spPr>
           <a:xfrm>
             <a:off x="3248025" y="2257425"/>
-            <a:ext cx="1952625" cy="209550"/>
+            <a:ext cx="1685925" cy="209550"/>
           </a:xfrm>
           <a:prstGeom prst="rect">
             <a:avLst/>
@@ -6626,7 +6652,7 @@
         </p:nvSpPr>
         <p:spPr>
           <a:xfrm>
-            <a:off x="5295900" y="2247900"/>
+            <a:off x="5029200" y="2247900"/>
             <a:ext cx="762000" cy="228600"/>
           </a:xfrm>
         </p:spPr>
@@ -6642,7 +6668,7 @@
                 <a:latin typeface="Consolas"/>
                 <a:ea typeface="Consolas"/>
               </a:rPr>
-              <a:t>+29.3%</a:t>
+              <a:t>+27.2%</a:t>
             </a:r>
           </a:p>
         </p:txBody>
@@ -6678,7 +6704,7 @@
                 <a:latin typeface="Consolas"/>
                 <a:ea typeface="Consolas"/>
               </a:rPr>
-              <a:t>WHEAT</a:t>
+              <a:t>GOLD</a:t>
             </a:r>
           </a:p>
         </p:txBody>
@@ -6698,7 +6724,7 @@
         <p:spPr>
           <a:xfrm>
             <a:off x="3248025" y="2695575"/>
-            <a:ext cx="1790700" cy="209550"/>
+            <a:ext cx="1514475" cy="209550"/>
           </a:xfrm>
           <a:prstGeom prst="rect">
             <a:avLst/>
@@ -6732,7 +6758,7 @@
         </p:nvSpPr>
         <p:spPr>
           <a:xfrm>
-            <a:off x="5133975" y="2686050"/>
+            <a:off x="4857750" y="2686050"/>
             <a:ext cx="762000" cy="228600"/>
           </a:xfrm>
         </p:spPr>
@@ -6748,7 +6774,7 @@
                 <a:latin typeface="Consolas"/>
                 <a:ea typeface="Consolas"/>
               </a:rPr>
-              <a:t>+26.8%</a:t>
+              <a:t>+24.5%</a:t>
             </a:r>
           </a:p>
         </p:txBody>
@@ -6784,7 +6810,7 @@
                 <a:latin typeface="Consolas"/>
                 <a:ea typeface="Consolas"/>
               </a:rPr>
-              <a:t>WTI</a:t>
+              <a:t>HBL</a:t>
             </a:r>
           </a:p>
         </p:txBody>
@@ -6804,7 +6830,7 @@
         <p:spPr>
           <a:xfrm>
             <a:off x="3248025" y="3133725"/>
-            <a:ext cx="1066800" cy="209550"/>
+            <a:ext cx="771525" cy="209550"/>
           </a:xfrm>
           <a:prstGeom prst="rect">
             <a:avLst/>
@@ -6838,7 +6864,7 @@
         </p:nvSpPr>
         <p:spPr>
           <a:xfrm>
-            <a:off x="4410075" y="3124200"/>
+            <a:off x="4114800" y="3124200"/>
             <a:ext cx="762000" cy="228600"/>
           </a:xfrm>
         </p:spPr>
@@ -6854,7 +6880,7 @@
                 <a:latin typeface="Consolas"/>
                 <a:ea typeface="Consolas"/>
               </a:rPr>
-              <a:t>+16.0%</a:t>
+              <a:t>+12.4%</a:t>
             </a:r>
           </a:p>
         </p:txBody>
@@ -6890,7 +6916,7 @@
                 <a:latin typeface="Consolas"/>
                 <a:ea typeface="Consolas"/>
               </a:rPr>
-              <a:t>HBL</a:t>
+              <a:t>WTI</a:t>
             </a:r>
           </a:p>
         </p:txBody>
@@ -6910,7 +6936,7 @@
         <p:spPr>
           <a:xfrm>
             <a:off x="3248025" y="3571875"/>
-            <a:ext cx="828675" cy="209550"/>
+            <a:ext cx="447675" cy="209550"/>
           </a:xfrm>
           <a:prstGeom prst="rect">
             <a:avLst/>
@@ -6944,7 +6970,7 @@
         </p:nvSpPr>
         <p:spPr>
           <a:xfrm>
-            <a:off x="4171950" y="3562350"/>
+            <a:off x="3790950" y="3562350"/>
             <a:ext cx="762000" cy="228600"/>
           </a:xfrm>
         </p:spPr>
@@ -6960,7 +6986,7 @@
                 <a:latin typeface="Consolas"/>
                 <a:ea typeface="Consolas"/>
               </a:rPr>
-              <a:t>+12.4%</a:t>
+              <a:t>+7.3%</a:t>
             </a:r>
           </a:p>
         </p:txBody>
@@ -7015,8 +7041,114 @@
         </p:nvSpPr>
         <p:spPr>
           <a:xfrm>
-            <a:off x="2609850" y="4010025"/>
-            <a:ext cx="628650" cy="209550"/>
+            <a:off x="3248025" y="4010025"/>
+            <a:ext cx="180975" cy="209550"/>
+          </a:xfrm>
+          <a:prstGeom prst="rect">
+            <a:avLst/>
+          </a:prstGeom>
+          <a:solidFill>
+            <a:srgbClr val="2FD48A"/>
+          </a:solidFill>
+        </p:spPr>
+        <p:txBody>
+          <a:bodyPr wrap="square" rtlCol="0"/>
+          <a:lstStyle/>
+          <a:p>
+            <a:r>
+              <a:rPr/>
+              <a:t/>
+            </a:r>
+          </a:p>
+        </p:txBody>
+      </p:sp>
+      <p:sp>
+        <p:nvSpPr>
+          <p:cNvPr id="24" name="TextBox 24">
+            <a:extLst>
+              <a:ext uri="{FF2B5EF4-FFF2-40B4-BE49-F238E27FC236}">
+                <a16:creationId xmlns:a16="http://schemas.microsoft.com/office/drawing/2014/main" id="{96965E29-22B1-4222-9C74-B08412B7DDB1}"/>
+              </a:ext>
+            </a:extLst>
+          </p:cNvPr>
+          <p:cNvSpPr txBox="1"/>
+          <p:nvPr/>
+        </p:nvSpPr>
+        <p:spPr>
+          <a:xfrm>
+            <a:off x="3524250" y="4000500"/>
+            <a:ext cx="762000" cy="228600"/>
+          </a:xfrm>
+        </p:spPr>
+        <p:txBody>
+          <a:bodyPr wrap="square" rtlCol="0" lIns="0" tIns="0" rIns="0" bIns="0" anchor="t"/>
+          <a:lstStyle/>
+          <a:p>
+            <a:r>
+              <a:rPr sz="1250" b="1">
+                <a:solidFill>
+                  <a:srgbClr val="E6E9EF"/>
+                </a:solidFill>
+                <a:latin typeface="Consolas"/>
+                <a:ea typeface="Consolas"/>
+              </a:rPr>
+              <a:t>+2.9%</a:t>
+            </a:r>
+          </a:p>
+        </p:txBody>
+      </p:sp>
+      <p:sp>
+        <p:nvSpPr>
+          <p:cNvPr id="25" name="TextBox 25">
+            <a:extLst>
+              <a:ext uri="{FF2B5EF4-FFF2-40B4-BE49-F238E27FC236}">
+                <a16:creationId xmlns:a16="http://schemas.microsoft.com/office/drawing/2014/main" id="{33556FAE-4864-49B8-AD92-C909333C22C0}"/>
+              </a:ext>
+            </a:extLst>
+          </p:cNvPr>
+          <p:cNvSpPr txBox="1"/>
+          <p:nvPr/>
+        </p:nvSpPr>
+        <p:spPr>
+          <a:xfrm>
+            <a:off x="762000" y="4438650"/>
+            <a:ext cx="819150" cy="228600"/>
+          </a:xfrm>
+        </p:spPr>
+        <p:txBody>
+          <a:bodyPr wrap="square" rtlCol="0" lIns="0" tIns="0" rIns="0" bIns="0" anchor="t"/>
+          <a:lstStyle/>
+          <a:p>
+            <a:pPr algn="r"/>
+            <a:r>
+              <a:rPr sz="1250">
+                <a:solidFill>
+                  <a:srgbClr val="8B94A6"/>
+                </a:solidFill>
+                <a:latin typeface="Consolas"/>
+                <a:ea typeface="Consolas"/>
+              </a:rPr>
+              <a:t>NATGAS</a:t>
+            </a:r>
+          </a:p>
+        </p:txBody>
+      </p:sp>
+      <p:sp>
+        <p:nvSpPr>
+          <p:cNvPr id="26" name="Shape 26">
+            <a:extLst>
+              <a:ext uri="{FF2B5EF4-FFF2-40B4-BE49-F238E27FC236}">
+                <a16:creationId xmlns:a16="http://schemas.microsoft.com/office/drawing/2014/main" id="{85D2400A-8D4D-448A-88AA-CEE8A758A715}"/>
+              </a:ext>
+            </a:extLst>
+          </p:cNvPr>
+          <p:cNvSpPr/>
+          <p:nvPr/>
+        </p:nvSpPr>
+        <p:spPr>
+          <a:xfrm>
+            <a:off x="2266950" y="4448175"/>
+            <a:ext cx="971550" cy="209550"/>
           </a:xfrm>
           <a:prstGeom prst="rect">
             <a:avLst/>
@@ -7038,20 +7170,20 @@
       </p:sp>
       <p:sp>
         <p:nvSpPr>
-          <p:cNvPr id="24" name="TextBox 24">
-            <a:extLst>
-              <a:ext uri="{FF2B5EF4-FFF2-40B4-BE49-F238E27FC236}">
-                <a16:creationId xmlns:a16="http://schemas.microsoft.com/office/drawing/2014/main" id="{96965E29-22B1-4222-9C74-B08412B7DDB1}"/>
-              </a:ext>
-            </a:extLst>
-          </p:cNvPr>
-          <p:cNvSpPr txBox="1"/>
-          <p:nvPr/>
-        </p:nvSpPr>
-        <p:spPr>
-          <a:xfrm>
-            <a:off x="1981200" y="4000500"/>
-            <a:ext cx="571500" cy="228600"/>
+          <p:cNvPr id="27" name="TextBox 27">
+            <a:extLst>
+              <a:ext uri="{FF2B5EF4-FFF2-40B4-BE49-F238E27FC236}">
+                <a16:creationId xmlns:a16="http://schemas.microsoft.com/office/drawing/2014/main" id="{8CDD32C8-A398-4721-BCBC-6CA22CDEBB2F}"/>
+              </a:ext>
+            </a:extLst>
+          </p:cNvPr>
+          <p:cNvSpPr txBox="1"/>
+          <p:nvPr/>
+        </p:nvSpPr>
+        <p:spPr>
+          <a:xfrm>
+            <a:off x="1619250" y="4438650"/>
+            <a:ext cx="590550" cy="228600"/>
           </a:xfrm>
         </p:spPr>
         <p:txBody>
@@ -7066,26 +7198,26 @@
                 <a:latin typeface="Consolas"/>
                 <a:ea typeface="Consolas"/>
               </a:rPr>
-              <a:t>-9.4%</a:t>
-            </a:r>
-          </a:p>
-        </p:txBody>
-      </p:sp>
-      <p:sp>
-        <p:nvSpPr>
-          <p:cNvPr id="25" name="TextBox 25">
-            <a:extLst>
-              <a:ext uri="{FF2B5EF4-FFF2-40B4-BE49-F238E27FC236}">
-                <a16:creationId xmlns:a16="http://schemas.microsoft.com/office/drawing/2014/main" id="{33556FAE-4864-49B8-AD92-C909333C22C0}"/>
-              </a:ext>
-            </a:extLst>
-          </p:cNvPr>
-          <p:cNvSpPr txBox="1"/>
-          <p:nvPr/>
-        </p:nvSpPr>
-        <p:spPr>
-          <a:xfrm>
-            <a:off x="762000" y="4438650"/>
+              <a:t>-15.7%</a:t>
+            </a:r>
+          </a:p>
+        </p:txBody>
+      </p:sp>
+      <p:sp>
+        <p:nvSpPr>
+          <p:cNvPr id="28" name="TextBox 28">
+            <a:extLst>
+              <a:ext uri="{FF2B5EF4-FFF2-40B4-BE49-F238E27FC236}">
+                <a16:creationId xmlns:a16="http://schemas.microsoft.com/office/drawing/2014/main" id="{335391C0-E4B6-48EC-8F29-60B04AE47D33}"/>
+              </a:ext>
+            </a:extLst>
+          </p:cNvPr>
+          <p:cNvSpPr txBox="1"/>
+          <p:nvPr/>
+        </p:nvSpPr>
+        <p:spPr>
+          <a:xfrm>
+            <a:off x="762000" y="4876800"/>
             <a:ext cx="819150" cy="228600"/>
           </a:xfrm>
         </p:spPr>
@@ -7102,17 +7234,17 @@
                 <a:latin typeface="Consolas"/>
                 <a:ea typeface="Consolas"/>
               </a:rPr>
-              <a:t>COPPER</a:t>
-            </a:r>
-          </a:p>
-        </p:txBody>
-      </p:sp>
-      <p:sp>
-        <p:nvSpPr>
-          <p:cNvPr id="26" name="Shape 26">
-            <a:extLst>
-              <a:ext uri="{FF2B5EF4-FFF2-40B4-BE49-F238E27FC236}">
-                <a16:creationId xmlns:a16="http://schemas.microsoft.com/office/drawing/2014/main" id="{85D2400A-8D4D-448A-88AA-CEE8A758A715}"/>
+              <a:t>OGDC</a:t>
+            </a:r>
+          </a:p>
+        </p:txBody>
+      </p:sp>
+      <p:sp>
+        <p:nvSpPr>
+          <p:cNvPr id="29" name="Shape 29">
+            <a:extLst>
+              <a:ext uri="{FF2B5EF4-FFF2-40B4-BE49-F238E27FC236}">
+                <a16:creationId xmlns:a16="http://schemas.microsoft.com/office/drawing/2014/main" id="{EF757462-2E2F-4DAB-A585-F0418D2860AA}"/>
               </a:ext>
             </a:extLst>
           </p:cNvPr>
@@ -7121,8 +7253,8 @@
         </p:nvSpPr>
         <p:spPr>
           <a:xfrm>
-            <a:off x="2628900" y="4448175"/>
-            <a:ext cx="609600" cy="209550"/>
+            <a:off x="2257425" y="4886325"/>
+            <a:ext cx="981075" cy="209550"/>
           </a:xfrm>
           <a:prstGeom prst="rect">
             <a:avLst/>
@@ -7144,20 +7276,20 @@
       </p:sp>
       <p:sp>
         <p:nvSpPr>
-          <p:cNvPr id="27" name="TextBox 27">
-            <a:extLst>
-              <a:ext uri="{FF2B5EF4-FFF2-40B4-BE49-F238E27FC236}">
-                <a16:creationId xmlns:a16="http://schemas.microsoft.com/office/drawing/2014/main" id="{8CDD32C8-A398-4721-BCBC-6CA22CDEBB2F}"/>
-              </a:ext>
-            </a:extLst>
-          </p:cNvPr>
-          <p:cNvSpPr txBox="1"/>
-          <p:nvPr/>
-        </p:nvSpPr>
-        <p:spPr>
-          <a:xfrm>
-            <a:off x="2000250" y="4438650"/>
-            <a:ext cx="571500" cy="228600"/>
+          <p:cNvPr id="30" name="TextBox 30">
+            <a:extLst>
+              <a:ext uri="{FF2B5EF4-FFF2-40B4-BE49-F238E27FC236}">
+                <a16:creationId xmlns:a16="http://schemas.microsoft.com/office/drawing/2014/main" id="{60F5A93B-0BF5-45FD-B570-5E4F62187545}"/>
+              </a:ext>
+            </a:extLst>
+          </p:cNvPr>
+          <p:cNvSpPr txBox="1"/>
+          <p:nvPr/>
+        </p:nvSpPr>
+        <p:spPr>
+          <a:xfrm>
+            <a:off x="1609725" y="4876800"/>
+            <a:ext cx="590550" cy="228600"/>
           </a:xfrm>
         </p:spPr>
         <p:txBody>
@@ -7172,113 +7304,7 @@
                 <a:latin typeface="Consolas"/>
                 <a:ea typeface="Consolas"/>
               </a:rPr>
-              <a:t>-9.1%</a:t>
-            </a:r>
-          </a:p>
-        </p:txBody>
-      </p:sp>
-      <p:sp>
-        <p:nvSpPr>
-          <p:cNvPr id="28" name="TextBox 28">
-            <a:extLst>
-              <a:ext uri="{FF2B5EF4-FFF2-40B4-BE49-F238E27FC236}">
-                <a16:creationId xmlns:a16="http://schemas.microsoft.com/office/drawing/2014/main" id="{335391C0-E4B6-48EC-8F29-60B04AE47D33}"/>
-              </a:ext>
-            </a:extLst>
-          </p:cNvPr>
-          <p:cNvSpPr txBox="1"/>
-          <p:nvPr/>
-        </p:nvSpPr>
-        <p:spPr>
-          <a:xfrm>
-            <a:off x="762000" y="4876800"/>
-            <a:ext cx="819150" cy="228600"/>
-          </a:xfrm>
-        </p:spPr>
-        <p:txBody>
-          <a:bodyPr wrap="square" rtlCol="0" lIns="0" tIns="0" rIns="0" bIns="0" anchor="t"/>
-          <a:lstStyle/>
-          <a:p>
-            <a:pPr algn="r"/>
-            <a:r>
-              <a:rPr sz="1250">
-                <a:solidFill>
-                  <a:srgbClr val="8B94A6"/>
-                </a:solidFill>
-                <a:latin typeface="Consolas"/>
-                <a:ea typeface="Consolas"/>
-              </a:rPr>
-              <a:t>OGDC</a:t>
-            </a:r>
-          </a:p>
-        </p:txBody>
-      </p:sp>
-      <p:sp>
-        <p:nvSpPr>
-          <p:cNvPr id="29" name="Shape 29">
-            <a:extLst>
-              <a:ext uri="{FF2B5EF4-FFF2-40B4-BE49-F238E27FC236}">
-                <a16:creationId xmlns:a16="http://schemas.microsoft.com/office/drawing/2014/main" id="{EF757462-2E2F-4DAB-A585-F0418D2860AA}"/>
-              </a:ext>
-            </a:extLst>
-          </p:cNvPr>
-          <p:cNvSpPr/>
-          <p:nvPr/>
-        </p:nvSpPr>
-        <p:spPr>
-          <a:xfrm>
-            <a:off x="2286000" y="4886325"/>
-            <a:ext cx="952500" cy="209550"/>
-          </a:xfrm>
-          <a:prstGeom prst="rect">
-            <a:avLst/>
-          </a:prstGeom>
-          <a:solidFill>
-            <a:srgbClr val="FF5C6C"/>
-          </a:solidFill>
-        </p:spPr>
-        <p:txBody>
-          <a:bodyPr wrap="square" rtlCol="0"/>
-          <a:lstStyle/>
-          <a:p>
-            <a:r>
-              <a:rPr/>
-              <a:t/>
-            </a:r>
-          </a:p>
-        </p:txBody>
-      </p:sp>
-      <p:sp>
-        <p:nvSpPr>
-          <p:cNvPr id="30" name="TextBox 30">
-            <a:extLst>
-              <a:ext uri="{FF2B5EF4-FFF2-40B4-BE49-F238E27FC236}">
-                <a16:creationId xmlns:a16="http://schemas.microsoft.com/office/drawing/2014/main" id="{60F5A93B-0BF5-45FD-B570-5E4F62187545}"/>
-              </a:ext>
-            </a:extLst>
-          </p:cNvPr>
-          <p:cNvSpPr txBox="1"/>
-          <p:nvPr/>
-        </p:nvSpPr>
-        <p:spPr>
-          <a:xfrm>
-            <a:off x="1638300" y="4876800"/>
-            <a:ext cx="590550" cy="228600"/>
-          </a:xfrm>
-        </p:spPr>
-        <p:txBody>
-          <a:bodyPr wrap="square" rtlCol="0" lIns="0" tIns="0" rIns="0" bIns="0" anchor="t"/>
-          <a:lstStyle/>
-          <a:p>
-            <a:r>
-              <a:rPr sz="1250" b="1">
-                <a:solidFill>
-                  <a:srgbClr val="E6E9EF"/>
-                </a:solidFill>
-                <a:latin typeface="Consolas"/>
-                <a:ea typeface="Consolas"/>
-              </a:rPr>
-              <a:t>-14.3%</a:t>
+              <a:t>-15.8%</a:t>
             </a:r>
           </a:p>
         </p:txBody>
@@ -7378,7 +7404,7 @@
                 <a:latin typeface="Consolas"/>
                 <a:ea typeface="Consolas"/>
               </a:rPr>
-              <a:t>MCB -1.1%     EURUSD -1.3%</a:t>
+              <a:t>MCB -3.0%     EURUSD -1.3%</a:t>
             </a:r>
           </a:p>
           <a:p>
@@ -7395,7 +7421,7 @@
                 <a:latin typeface="Consolas"/>
                 <a:ea typeface="Consolas"/>
               </a:rPr>
-              <a:t>NATGAS -1.5%     KSE100 -1.8%</a:t>
+              <a:t>KSE100 -5.0%     BTC -5.8%</a:t>
             </a:r>
           </a:p>
           <a:p>
@@ -7412,7 +7438,7 @@
                 <a:latin typeface="Consolas"/>
                 <a:ea typeface="Consolas"/>
               </a:rPr>
-              <a:t>BTC -3.9%     LUCK -6.1%</a:t>
+              <a:t>COPPER -6.5%     LUCK -7.0%</a:t>
             </a:r>
           </a:p>
           <a:p>
@@ -7429,7 +7455,7 @@
                 <a:latin typeface="Consolas"/>
                 <a:ea typeface="Consolas"/>
               </a:rPr>
-              <a:t>COPPER -9.1%     BRENT -9.4%</a:t>
+              <a:t>WHEAT Sharpe 1.59 · SILVER Sharpe 1.56</a:t>
             </a:r>
           </a:p>
           <a:p>
@@ -7446,7 +7472,7 @@
                 <a:latin typeface="Consolas"/>
                 <a:ea typeface="Consolas"/>
               </a:rPr>
-              <a:t>OGDC -14.3%</a:t>
+              <a:t>GOLD Sharpe 1.32 · HBL Sharpe 1.39</a:t>
             </a:r>
           </a:p>
           <a:p>
@@ -7461,12 +7487,12 @@
             <a:r>
               <a:rPr sz="1200">
                 <a:solidFill>
-                  <a:srgbClr val="E6E9EF"/>
+                  <a:srgbClr val="8B94A6"/>
                 </a:solidFill>
                 <a:latin typeface="Consolas"/>
                 <a:ea typeface="Consolas"/>
               </a:rPr>
-              <a:t>WHEAT Sharpe 1.60 · GOLD Sharpe 1.57</a:t>
+              <a:t>WTI Sharpe 0.44 · BRENT Sharpe 0.36</a:t>
             </a:r>
           </a:p>
           <a:p>
@@ -7481,12 +7507,12 @@
             <a:r>
               <a:rPr sz="1200">
                 <a:solidFill>
-                  <a:srgbClr val="E6E9EF"/>
-                </a:solidFill>
-                <a:latin typeface="Segoe UI"/>
-                <a:ea typeface="Segoe UI"/>
-              </a:rPr>
-              <a:t>SILVER Sharpe 1.44 · WTI Sharpe 0.77</a:t>
+                  <a:srgbClr val="8B94A6"/>
+                </a:solidFill>
+                <a:latin typeface="Segoe UI"/>
+                <a:ea typeface="Segoe UI"/>
+              </a:rPr>
+              <a:t>All out-of-sample.</a:t>
             </a:r>
           </a:p>
           <a:p>
@@ -7496,14 +7522,14 @@
               </a:lnSpc>
             </a:pPr>
             <a:r>
-              <a:rPr sz="1200">
-                <a:solidFill>
-                  <a:srgbClr val="E6E9EF"/>
-                </a:solidFill>
-                <a:latin typeface="Segoe UI"/>
-                <a:ea typeface="Segoe UI"/>
-              </a:rPr>
-              <a:t>HBL Sharpe 1.39 · all out-of-sample</a:t>
+              <a:rPr sz="1150">
+                <a:solidFill>
+                  <a:srgbClr val="8B94A6"/>
+                </a:solidFill>
+                <a:latin typeface="Segoe UI"/>
+                <a:ea typeface="Segoe UI"/>
+              </a:rPr>
+              <a:t>Backtests are not returns: published per</a:t>
             </a:r>
           </a:p>
           <a:p>
@@ -7515,24 +7541,7 @@
             <a:r>
               <a:rPr sz="1150">
                 <a:solidFill>
-                  <a:srgbClr val="F0B429"/>
-                </a:solidFill>
-                <a:latin typeface="Segoe UI"/>
-                <a:ea typeface="Segoe UI"/>
-              </a:rPr>
-              <a:t>Backtests are not returns: published per</a:t>
-            </a:r>
-          </a:p>
-          <a:p>
-            <a:pPr>
-              <a:lnSpc>
-                <a:spcPct val="145000"/>
-              </a:lnSpc>
-            </a:pPr>
-            <a:r>
-              <a:rPr sz="1150">
-                <a:solidFill>
-                  <a:srgbClr val="F0B429"/>
+                  <a:srgbClr val="8B94A6"/>
                 </a:solidFill>
                 <a:latin typeface="Segoe UI"/>
                 <a:ea typeface="Segoe UI"/>
@@ -7577,7 +7586,41 @@
                 <a:latin typeface="Segoe UI"/>
                 <a:ea typeface="Segoe UI"/>
               </a:rPr>
-              <a:t>GOLD beat buy-and-hold (+11.6%). WTI did not (+50.2%) — a risk-adjusted win is not the same as an absolute one, and the deck says so.</a:t>
+              <a:t>GOLD beat buy-and-hold (+8.9%). WTI did not (+62.4%) — a</a:t>
+            </a:r>
+          </a:p>
+          <a:p>
+            <a:pPr>
+              <a:lnSpc>
+                <a:spcPct val="145000"/>
+              </a:lnSpc>
+            </a:pPr>
+            <a:r>
+              <a:rPr sz="1300">
+                <a:solidFill>
+                  <a:srgbClr val="8B94A6"/>
+                </a:solidFill>
+                <a:latin typeface="Segoe UI"/>
+                <a:ea typeface="Segoe UI"/>
+              </a:rPr>
+              <a:t>risk-adjusted win is not the same as an absolute one, and the deck</a:t>
+            </a:r>
+          </a:p>
+          <a:p>
+            <a:pPr>
+              <a:lnSpc>
+                <a:spcPct val="145000"/>
+              </a:lnSpc>
+            </a:pPr>
+            <a:r>
+              <a:rPr sz="1300">
+                <a:solidFill>
+                  <a:srgbClr val="8B94A6"/>
+                </a:solidFill>
+                <a:latin typeface="Segoe UI"/>
+                <a:ea typeface="Segoe UI"/>
+              </a:rPr>
+              <a:t>says so.</a:t>
             </a:r>
           </a:p>
         </p:txBody>
@@ -7840,7 +7883,7 @@
                 <a:latin typeface="Consolas"/>
                 <a:ea typeface="Consolas"/>
               </a:rPr>
-              <a:t>-2.2%</a:t>
+              <a:t>-3.7%</a:t>
             </a:r>
           </a:p>
         </p:txBody>
@@ -7955,7 +7998,7 @@
                 <a:latin typeface="Consolas"/>
                 <a:ea typeface="Consolas"/>
               </a:rPr>
-              <a:t>+10.0%</a:t>
+              <a:t>+8.8%</a:t>
             </a:r>
           </a:p>
         </p:txBody>
@@ -8030,7 +8073,24 @@
                 <a:latin typeface="Segoe UI"/>
                 <a:ea typeface="Segoe UI"/>
               </a:rPr>
-              <a:t>mean net return across 9 FX, commodity, crypto and index instruments on the same engine and the same risk layer.</a:t>
+              <a:t>mean net return across 9 FX, commodity and crypto</a:t>
+            </a:r>
+          </a:p>
+          <a:p>
+            <a:pPr>
+              <a:lnSpc>
+                <a:spcPct val="140000"/>
+              </a:lnSpc>
+            </a:pPr>
+            <a:r>
+              <a:rPr sz="1300">
+                <a:solidFill>
+                  <a:srgbClr val="8B94A6"/>
+                </a:solidFill>
+                <a:latin typeface="Segoe UI"/>
+                <a:ea typeface="Segoe UI"/>
+              </a:rPr>
+              <a:t>instruments on the same engine and the same risk layer.</a:t>
             </a:r>
           </a:p>
         </p:txBody>
@@ -8550,7 +8610,7 @@
                 <a:latin typeface="Segoe UI"/>
                 <a:ea typeface="Segoe UI"/>
               </a:rPr>
-              <a:t>A public repository: 17,275 lines of Python, 42 modules, 683 passing tests, MIT.</a:t>
+              <a:t>A public repository: 17,411 lines of Python, 42 modules, 696 passing tests, MIT.</a:t>
             </a:r>
           </a:p>
           <a:p>

--- a/docs/investors/KAIROS_Investor_Deck.pptx
+++ b/docs/investors/KAIROS_Investor_Deck.pptx
@@ -4422,7 +4422,7 @@
                 <a:latin typeface="Segoe UI"/>
                 <a:ea typeface="Segoe UI"/>
               </a:rPr>
-              <a:t>The journal grows on its own every ten minutes: every prediction is in the dated ledger; 288 horizons matured, zero directional calls resolved so far. Nobody has to trust a slide to check this number; it prints itself, and it will print the losses too.</a:t>
+              <a:t>The journal grows on its own every ten minutes: every prediction is in the dated ledger; 404 horizons matured, zero directional calls resolved so far. Nobody has to trust a slide to check this number; it prints itself, and it will print the losses too.</a:t>
             </a:r>
           </a:p>
         </p:txBody>
@@ -4710,7 +4710,7 @@
                 <a:latin typeface="Consolas"/>
                 <a:ea typeface="Consolas"/>
               </a:rPr>
-              <a:t>python -m pytest tests -q        # 696 tests</a:t>
+              <a:t>python -m pytest tests -q        # 701 tests</a:t>
             </a:r>
           </a:p>
           <a:p>
@@ -5789,7 +5789,7 @@
                 <a:latin typeface="Consolas"/>
                 <a:ea typeface="Consolas"/>
               </a:rPr>
-              <a:t>17,411</a:t>
+              <a:t>17,425</a:t>
             </a:r>
           </a:p>
           <a:p>
@@ -6053,7 +6053,7 @@
                 <a:latin typeface="Consolas"/>
                 <a:ea typeface="Consolas"/>
               </a:rPr>
-              <a:t>696</a:t>
+              <a:t>701</a:t>
             </a:r>
           </a:p>
           <a:p>
@@ -8610,7 +8610,7 @@
                 <a:latin typeface="Segoe UI"/>
                 <a:ea typeface="Segoe UI"/>
               </a:rPr>
-              <a:t>A public repository: 17,411 lines of Python, 42 modules, 696 passing tests, MIT.</a:t>
+              <a:t>A public repository: 17,425 lines of Python, 42 modules, 701 passing tests, MIT.</a:t>
             </a:r>
           </a:p>
           <a:p>
@@ -8742,7 +8742,7 @@
                 <a:latin typeface="Segoe UI"/>
                 <a:ea typeface="Segoe UI"/>
               </a:rPr>
-              <a:t>288 horizons matured, and all 288 were non-trades.</a:t>
+              <a:t>404 horizons matured, and all 404 were non-trades.</a:t>
             </a:r>
           </a:p>
           <a:p>

--- a/docs/investors/KAIROS_Investor_Deck.pptx
+++ b/docs/investors/KAIROS_Investor_Deck.pptx
@@ -4710,7 +4710,7 @@
                 <a:latin typeface="Consolas"/>
                 <a:ea typeface="Consolas"/>
               </a:rPr>
-              <a:t>python -m pytest tests -q        # 701 tests</a:t>
+              <a:t>python -m pytest tests -q        # 705 tests</a:t>
             </a:r>
           </a:p>
           <a:p>
@@ -5789,7 +5789,7 @@
                 <a:latin typeface="Consolas"/>
                 <a:ea typeface="Consolas"/>
               </a:rPr>
-              <a:t>17,425</a:t>
+              <a:t>17,441</a:t>
             </a:r>
           </a:p>
           <a:p>
@@ -6053,7 +6053,7 @@
                 <a:latin typeface="Consolas"/>
                 <a:ea typeface="Consolas"/>
               </a:rPr>
-              <a:t>701</a:t>
+              <a:t>705</a:t>
             </a:r>
           </a:p>
           <a:p>
@@ -8610,7 +8610,7 @@
                 <a:latin typeface="Segoe UI"/>
                 <a:ea typeface="Segoe UI"/>
               </a:rPr>
-              <a:t>A public repository: 17,425 lines of Python, 42 modules, 701 passing tests, MIT.</a:t>
+              <a:t>A public repository: 17,441 lines of Python, 42 modules, 705 passing tests, MIT.</a:t>
             </a:r>
           </a:p>
           <a:p>

--- a/docs/investors/KAIROS_Investor_Deck.pptx
+++ b/docs/investors/KAIROS_Investor_Deck.pptx
@@ -4710,7 +4710,7 @@
                 <a:latin typeface="Consolas"/>
                 <a:ea typeface="Consolas"/>
               </a:rPr>
-              <a:t>python -m pytest tests -q        # 705 tests</a:t>
+              <a:t>python -m pytest tests -q        # 713 tests</a:t>
             </a:r>
           </a:p>
           <a:p>
@@ -5789,7 +5789,7 @@
                 <a:latin typeface="Consolas"/>
                 <a:ea typeface="Consolas"/>
               </a:rPr>
-              <a:t>17,441</a:t>
+              <a:t>17,535</a:t>
             </a:r>
           </a:p>
           <a:p>
@@ -6053,7 +6053,7 @@
                 <a:latin typeface="Consolas"/>
                 <a:ea typeface="Consolas"/>
               </a:rPr>
-              <a:t>705</a:t>
+              <a:t>713</a:t>
             </a:r>
           </a:p>
           <a:p>
@@ -8610,7 +8610,7 @@
                 <a:latin typeface="Segoe UI"/>
                 <a:ea typeface="Segoe UI"/>
               </a:rPr>
-              <a:t>A public repository: 17,441 lines of Python, 42 modules, 705 passing tests, MIT.</a:t>
+              <a:t>A public repository: 17,535 lines of Python, 42 modules, 713 passing tests, MIT.</a:t>
             </a:r>
           </a:p>
           <a:p>

--- a/docs/investors/KAIROS_Investor_Deck.pptx
+++ b/docs/investors/KAIROS_Investor_Deck.pptx
@@ -4710,7 +4710,7 @@
                 <a:latin typeface="Consolas"/>
                 <a:ea typeface="Consolas"/>
               </a:rPr>
-              <a:t>python -m pytest tests -q        # 713 tests</a:t>
+              <a:t>python -m pytest tests -q        # 719 tests</a:t>
             </a:r>
           </a:p>
           <a:p>
@@ -5789,7 +5789,7 @@
                 <a:latin typeface="Consolas"/>
                 <a:ea typeface="Consolas"/>
               </a:rPr>
-              <a:t>17,535</a:t>
+              <a:t>17,549</a:t>
             </a:r>
           </a:p>
           <a:p>
@@ -6053,7 +6053,7 @@
                 <a:latin typeface="Consolas"/>
                 <a:ea typeface="Consolas"/>
               </a:rPr>
-              <a:t>713</a:t>
+              <a:t>719</a:t>
             </a:r>
           </a:p>
           <a:p>
@@ -8610,7 +8610,7 @@
                 <a:latin typeface="Segoe UI"/>
                 <a:ea typeface="Segoe UI"/>
               </a:rPr>
-              <a:t>A public repository: 17,535 lines of Python, 42 modules, 713 passing tests, MIT.</a:t>
+              <a:t>A public repository: 17,549 lines of Python, 42 modules, 719 passing tests, MIT.</a:t>
             </a:r>
           </a:p>
           <a:p>

--- a/docs/investors/KAIROS_Investor_Deck.pptx
+++ b/docs/investors/KAIROS_Investor_Deck.pptx
@@ -4710,7 +4710,7 @@
                 <a:latin typeface="Consolas"/>
                 <a:ea typeface="Consolas"/>
               </a:rPr>
-              <a:t>python -m pytest tests -q        # 719 tests</a:t>
+              <a:t>python -m pytest tests -q        # 725 tests</a:t>
             </a:r>
           </a:p>
           <a:p>
@@ -6053,7 +6053,7 @@
                 <a:latin typeface="Consolas"/>
                 <a:ea typeface="Consolas"/>
               </a:rPr>
-              <a:t>719</a:t>
+              <a:t>725</a:t>
             </a:r>
           </a:p>
           <a:p>
@@ -8610,7 +8610,7 @@
                 <a:latin typeface="Segoe UI"/>
                 <a:ea typeface="Segoe UI"/>
               </a:rPr>
-              <a:t>A public repository: 17,549 lines of Python, 42 modules, 719 passing tests, MIT.</a:t>
+              <a:t>A public repository: 17,549 lines of Python, 42 modules, 725 passing tests, MIT.</a:t>
             </a:r>
           </a:p>
           <a:p>

--- a/docs/investors/KAIROS_Investor_Deck.pptx
+++ b/docs/investors/KAIROS_Investor_Deck.pptx
@@ -4710,7 +4710,7 @@
                 <a:latin typeface="Consolas"/>
                 <a:ea typeface="Consolas"/>
               </a:rPr>
-              <a:t>python -m pytest tests -q        # 725 tests</a:t>
+              <a:t>python -m pytest tests -q        # 740 tests</a:t>
             </a:r>
           </a:p>
           <a:p>
@@ -5789,7 +5789,7 @@
                 <a:latin typeface="Consolas"/>
                 <a:ea typeface="Consolas"/>
               </a:rPr>
-              <a:t>17,549</a:t>
+              <a:t>17,655</a:t>
             </a:r>
           </a:p>
           <a:p>
@@ -6053,7 +6053,7 @@
                 <a:latin typeface="Consolas"/>
                 <a:ea typeface="Consolas"/>
               </a:rPr>
-              <a:t>725</a:t>
+              <a:t>740</a:t>
             </a:r>
           </a:p>
           <a:p>
@@ -8610,7 +8610,7 @@
                 <a:latin typeface="Segoe UI"/>
                 <a:ea typeface="Segoe UI"/>
               </a:rPr>
-              <a:t>A public repository: 17,549 lines of Python, 42 modules, 725 passing tests, MIT.</a:t>
+              <a:t>A public repository: 17,655 lines of Python, 42 modules, 740 passing tests, MIT.</a:t>
             </a:r>
           </a:p>
           <a:p>

--- a/docs/investors/KAIROS_Investor_Deck.pptx
+++ b/docs/investors/KAIROS_Investor_Deck.pptx
@@ -4710,7 +4710,7 @@
                 <a:latin typeface="Consolas"/>
                 <a:ea typeface="Consolas"/>
               </a:rPr>
-              <a:t>python -m pytest tests -q        # 740 tests</a:t>
+              <a:t>python -m pytest tests -q        # 750 tests</a:t>
             </a:r>
           </a:p>
           <a:p>
@@ -5789,7 +5789,7 @@
                 <a:latin typeface="Consolas"/>
                 <a:ea typeface="Consolas"/>
               </a:rPr>
-              <a:t>17,655</a:t>
+              <a:t>17,688</a:t>
             </a:r>
           </a:p>
           <a:p>
@@ -6053,7 +6053,7 @@
                 <a:latin typeface="Consolas"/>
                 <a:ea typeface="Consolas"/>
               </a:rPr>
-              <a:t>740</a:t>
+              <a:t>750</a:t>
             </a:r>
           </a:p>
           <a:p>
@@ -8610,7 +8610,7 @@
                 <a:latin typeface="Segoe UI"/>
                 <a:ea typeface="Segoe UI"/>
               </a:rPr>
-              <a:t>A public repository: 17,655 lines of Python, 42 modules, 740 passing tests, MIT.</a:t>
+              <a:t>A public repository: 17,688 lines of Python, 42 modules, 750 passing tests, MIT.</a:t>
             </a:r>
           </a:p>
           <a:p>

--- a/docs/investors/KAIROS_Investor_Deck.pptx
+++ b/docs/investors/KAIROS_Investor_Deck.pptx
@@ -4710,7 +4710,7 @@
                 <a:latin typeface="Consolas"/>
                 <a:ea typeface="Consolas"/>
               </a:rPr>
-              <a:t>python -m pytest tests -q        # 750 tests</a:t>
+              <a:t>python -m pytest tests -q        # 754 tests</a:t>
             </a:r>
           </a:p>
           <a:p>
@@ -5789,7 +5789,7 @@
                 <a:latin typeface="Consolas"/>
                 <a:ea typeface="Consolas"/>
               </a:rPr>
-              <a:t>17,688</a:t>
+              <a:t>17,698</a:t>
             </a:r>
           </a:p>
           <a:p>
@@ -6053,7 +6053,7 @@
                 <a:latin typeface="Consolas"/>
                 <a:ea typeface="Consolas"/>
               </a:rPr>
-              <a:t>750</a:t>
+              <a:t>754</a:t>
             </a:r>
           </a:p>
           <a:p>
@@ -8610,7 +8610,7 @@
                 <a:latin typeface="Segoe UI"/>
                 <a:ea typeface="Segoe UI"/>
               </a:rPr>
-              <a:t>A public repository: 17,688 lines of Python, 42 modules, 750 passing tests, MIT.</a:t>
+              <a:t>A public repository: 17,698 lines of Python, 42 modules, 754 passing tests, MIT.</a:t>
             </a:r>
           </a:p>
           <a:p>

--- a/docs/investors/KAIROS_Investor_Deck.pptx
+++ b/docs/investors/KAIROS_Investor_Deck.pptx
@@ -4710,7 +4710,7 @@
                 <a:latin typeface="Consolas"/>
                 <a:ea typeface="Consolas"/>
               </a:rPr>
-              <a:t>python -m pytest tests -q        # 754 tests</a:t>
+              <a:t>python -m pytest tests -q        # 766 tests</a:t>
             </a:r>
           </a:p>
           <a:p>
@@ -5789,7 +5789,7 @@
                 <a:latin typeface="Consolas"/>
                 <a:ea typeface="Consolas"/>
               </a:rPr>
-              <a:t>17,698</a:t>
+              <a:t>17,742</a:t>
             </a:r>
           </a:p>
           <a:p>
@@ -6053,7 +6053,7 @@
                 <a:latin typeface="Consolas"/>
                 <a:ea typeface="Consolas"/>
               </a:rPr>
-              <a:t>754</a:t>
+              <a:t>766</a:t>
             </a:r>
           </a:p>
           <a:p>
@@ -8610,7 +8610,7 @@
                 <a:latin typeface="Segoe UI"/>
                 <a:ea typeface="Segoe UI"/>
               </a:rPr>
-              <a:t>A public repository: 17,698 lines of Python, 42 modules, 754 passing tests, MIT.</a:t>
+              <a:t>A public repository: 17,742 lines of Python, 42 modules, 766 passing tests, MIT.</a:t>
             </a:r>
           </a:p>
           <a:p>

--- a/docs/investors/KAIROS_Investor_Deck.pptx
+++ b/docs/investors/KAIROS_Investor_Deck.pptx
@@ -4710,7 +4710,7 @@
                 <a:latin typeface="Consolas"/>
                 <a:ea typeface="Consolas"/>
               </a:rPr>
-              <a:t>python -m pytest tests -q        # 766 tests</a:t>
+              <a:t>python -m pytest tests -q        # 786 tests</a:t>
             </a:r>
           </a:p>
           <a:p>
@@ -5789,7 +5789,7 @@
                 <a:latin typeface="Consolas"/>
                 <a:ea typeface="Consolas"/>
               </a:rPr>
-              <a:t>17,742</a:t>
+              <a:t>17,843</a:t>
             </a:r>
           </a:p>
           <a:p>
@@ -5826,7 +5826,7 @@
                 <a:latin typeface="Segoe UI"/>
                 <a:ea typeface="Segoe UI"/>
               </a:rPr>
-              <a:t>42 modules, public under MIT, no closed core</a:t>
+              <a:t>43 modules, public under MIT, no closed core</a:t>
             </a:r>
           </a:p>
         </p:txBody>
@@ -6053,7 +6053,7 @@
                 <a:latin typeface="Consolas"/>
                 <a:ea typeface="Consolas"/>
               </a:rPr>
-              <a:t>766</a:t>
+              <a:t>786</a:t>
             </a:r>
           </a:p>
           <a:p>
@@ -8610,7 +8610,7 @@
                 <a:latin typeface="Segoe UI"/>
                 <a:ea typeface="Segoe UI"/>
               </a:rPr>
-              <a:t>A public repository: 17,742 lines of Python, 42 modules, 766 passing tests, MIT.</a:t>
+              <a:t>A public repository: 17,843 lines of Python, 43 modules, 786 passing tests, MIT.</a:t>
             </a:r>
           </a:p>
           <a:p>

--- a/docs/investors/KAIROS_Investor_Deck.pptx
+++ b/docs/investors/KAIROS_Investor_Deck.pptx
@@ -4710,7 +4710,7 @@
                 <a:latin typeface="Consolas"/>
                 <a:ea typeface="Consolas"/>
               </a:rPr>
-              <a:t>python -m pytest tests -q        # 786 tests</a:t>
+              <a:t>python -m pytest tests -q        # 800 tests</a:t>
             </a:r>
           </a:p>
           <a:p>
@@ -5789,7 +5789,7 @@
                 <a:latin typeface="Consolas"/>
                 <a:ea typeface="Consolas"/>
               </a:rPr>
-              <a:t>17,843</a:t>
+              <a:t>17,901</a:t>
             </a:r>
           </a:p>
           <a:p>
@@ -6053,7 +6053,7 @@
                 <a:latin typeface="Consolas"/>
                 <a:ea typeface="Consolas"/>
               </a:rPr>
-              <a:t>786</a:t>
+              <a:t>800</a:t>
             </a:r>
           </a:p>
           <a:p>
@@ -8610,7 +8610,7 @@
                 <a:latin typeface="Segoe UI"/>
                 <a:ea typeface="Segoe UI"/>
               </a:rPr>
-              <a:t>A public repository: 17,843 lines of Python, 43 modules, 786 passing tests, MIT.</a:t>
+              <a:t>A public repository: 17,901 lines of Python, 43 modules, 800 passing tests, MIT.</a:t>
             </a:r>
           </a:p>
           <a:p>

--- a/docs/investors/KAIROS_Investor_Deck.pptx
+++ b/docs/investors/KAIROS_Investor_Deck.pptx
@@ -4710,7 +4710,7 @@
                 <a:latin typeface="Consolas"/>
                 <a:ea typeface="Consolas"/>
               </a:rPr>
-              <a:t>python -m pytest tests -q        # 800 tests</a:t>
+              <a:t>python -m pytest tests -q        # 827 tests</a:t>
             </a:r>
           </a:p>
           <a:p>
@@ -5789,7 +5789,7 @@
                 <a:latin typeface="Consolas"/>
                 <a:ea typeface="Consolas"/>
               </a:rPr>
-              <a:t>17,901</a:t>
+              <a:t>17,985</a:t>
             </a:r>
           </a:p>
           <a:p>
@@ -6053,7 +6053,7 @@
                 <a:latin typeface="Consolas"/>
                 <a:ea typeface="Consolas"/>
               </a:rPr>
-              <a:t>800</a:t>
+              <a:t>827</a:t>
             </a:r>
           </a:p>
           <a:p>
@@ -8610,7 +8610,7 @@
                 <a:latin typeface="Segoe UI"/>
                 <a:ea typeface="Segoe UI"/>
               </a:rPr>
-              <a:t>A public repository: 17,901 lines of Python, 43 modules, 800 passing tests, MIT.</a:t>
+              <a:t>A public repository: 17,985 lines of Python, 43 modules, 827 passing tests, MIT.</a:t>
             </a:r>
           </a:p>
           <a:p>

--- a/docs/investors/KAIROS_Investor_Deck.pptx
+++ b/docs/investors/KAIROS_Investor_Deck.pptx
@@ -4710,7 +4710,7 @@
                 <a:latin typeface="Consolas"/>
                 <a:ea typeface="Consolas"/>
               </a:rPr>
-              <a:t>python -m pytest tests -q        # 827 tests</a:t>
+              <a:t>python -m pytest tests -q        # 843 tests</a:t>
             </a:r>
           </a:p>
           <a:p>
@@ -5789,7 +5789,7 @@
                 <a:latin typeface="Consolas"/>
                 <a:ea typeface="Consolas"/>
               </a:rPr>
-              <a:t>17,985</a:t>
+              <a:t>18,018</a:t>
             </a:r>
           </a:p>
           <a:p>
@@ -6053,7 +6053,7 @@
                 <a:latin typeface="Consolas"/>
                 <a:ea typeface="Consolas"/>
               </a:rPr>
-              <a:t>827</a:t>
+              <a:t>843</a:t>
             </a:r>
           </a:p>
           <a:p>
@@ -8610,7 +8610,7 @@
                 <a:latin typeface="Segoe UI"/>
                 <a:ea typeface="Segoe UI"/>
               </a:rPr>
-              <a:t>A public repository: 17,985 lines of Python, 43 modules, 827 passing tests, MIT.</a:t>
+              <a:t>A public repository: 18,018 lines of Python, 43 modules, 843 passing tests, MIT.</a:t>
             </a:r>
           </a:p>
           <a:p>

--- a/docs/investors/KAIROS_Investor_Deck.pptx
+++ b/docs/investors/KAIROS_Investor_Deck.pptx
@@ -4710,7 +4710,7 @@
                 <a:latin typeface="Consolas"/>
                 <a:ea typeface="Consolas"/>
               </a:rPr>
-              <a:t>python -m pytest tests -q        # 843 tests</a:t>
+              <a:t>python -m pytest tests -q        # 857 tests</a:t>
             </a:r>
           </a:p>
           <a:p>
@@ -5789,7 +5789,7 @@
                 <a:latin typeface="Consolas"/>
                 <a:ea typeface="Consolas"/>
               </a:rPr>
-              <a:t>18,018</a:t>
+              <a:t>18,043</a:t>
             </a:r>
           </a:p>
           <a:p>
@@ -6053,7 +6053,7 @@
                 <a:latin typeface="Consolas"/>
                 <a:ea typeface="Consolas"/>
               </a:rPr>
-              <a:t>843</a:t>
+              <a:t>857</a:t>
             </a:r>
           </a:p>
           <a:p>
@@ -8610,7 +8610,7 @@
                 <a:latin typeface="Segoe UI"/>
                 <a:ea typeface="Segoe UI"/>
               </a:rPr>
-              <a:t>A public repository: 18,018 lines of Python, 43 modules, 843 passing tests, MIT.</a:t>
+              <a:t>A public repository: 18,043 lines of Python, 43 modules, 857 passing tests, MIT.</a:t>
             </a:r>
           </a:p>
           <a:p>

--- a/docs/investors/KAIROS_Investor_Deck.pptx
+++ b/docs/investors/KAIROS_Investor_Deck.pptx
@@ -4710,7 +4710,7 @@
                 <a:latin typeface="Consolas"/>
                 <a:ea typeface="Consolas"/>
               </a:rPr>
-              <a:t>python -m pytest tests -q        # 857 tests</a:t>
+              <a:t>python -m pytest tests -q        # 875 tests</a:t>
             </a:r>
           </a:p>
           <a:p>
@@ -5789,7 +5789,7 @@
                 <a:latin typeface="Consolas"/>
                 <a:ea typeface="Consolas"/>
               </a:rPr>
-              <a:t>18,043</a:t>
+              <a:t>18,068</a:t>
             </a:r>
           </a:p>
           <a:p>
@@ -6053,7 +6053,7 @@
                 <a:latin typeface="Consolas"/>
                 <a:ea typeface="Consolas"/>
               </a:rPr>
-              <a:t>857</a:t>
+              <a:t>875</a:t>
             </a:r>
           </a:p>
           <a:p>
@@ -8610,7 +8610,7 @@
                 <a:latin typeface="Segoe UI"/>
                 <a:ea typeface="Segoe UI"/>
               </a:rPr>
-              <a:t>A public repository: 18,043 lines of Python, 43 modules, 857 passing tests, MIT.</a:t>
+              <a:t>A public repository: 18,068 lines of Python, 43 modules, 875 passing tests, MIT.</a:t>
             </a:r>
           </a:p>
           <a:p>

--- a/docs/investors/KAIROS_Investor_Deck.pptx
+++ b/docs/investors/KAIROS_Investor_Deck.pptx
@@ -4422,7 +4422,7 @@
                 <a:latin typeface="Segoe UI"/>
                 <a:ea typeface="Segoe UI"/>
               </a:rPr>
-              <a:t>The journal grows on its own every ten minutes: every prediction is in the dated ledger; 404 horizons matured, zero directional calls resolved so far. Nobody has to trust a slide to check this number; it prints itself, and it will print the losses too.</a:t>
+              <a:t>The journal grows on its own every ten minutes: every prediction is in the dated ledger; 429 horizons matured, zero directional calls resolved so far. Nobody has to trust a slide to check this number; it prints itself, and it will print the losses too.</a:t>
             </a:r>
           </a:p>
         </p:txBody>
@@ -4710,7 +4710,7 @@
                 <a:latin typeface="Consolas"/>
                 <a:ea typeface="Consolas"/>
               </a:rPr>
-              <a:t>python -m pytest tests -q        # 875 tests</a:t>
+              <a:t>python -m pytest tests -q        # 885 tests</a:t>
             </a:r>
           </a:p>
           <a:p>
@@ -5789,7 +5789,7 @@
                 <a:latin typeface="Consolas"/>
                 <a:ea typeface="Consolas"/>
               </a:rPr>
-              <a:t>18,068</a:t>
+              <a:t>18,080</a:t>
             </a:r>
           </a:p>
           <a:p>
@@ -6053,7 +6053,7 @@
                 <a:latin typeface="Consolas"/>
                 <a:ea typeface="Consolas"/>
               </a:rPr>
-              <a:t>875</a:t>
+              <a:t>885</a:t>
             </a:r>
           </a:p>
           <a:p>
@@ -8610,7 +8610,7 @@
                 <a:latin typeface="Segoe UI"/>
                 <a:ea typeface="Segoe UI"/>
               </a:rPr>
-              <a:t>A public repository: 18,068 lines of Python, 43 modules, 875 passing tests, MIT.</a:t>
+              <a:t>A public repository: 18,080 lines of Python, 43 modules, 885 passing tests, MIT.</a:t>
             </a:r>
           </a:p>
           <a:p>
@@ -8742,7 +8742,7 @@
                 <a:latin typeface="Segoe UI"/>
                 <a:ea typeface="Segoe UI"/>
               </a:rPr>
-              <a:t>404 horizons matured, and all 404 were non-trades.</a:t>
+              <a:t>429 horizons matured, and all 429 were non-trades.</a:t>
             </a:r>
           </a:p>
           <a:p>

--- a/docs/investors/KAIROS_Investor_Deck.pptx
+++ b/docs/investors/KAIROS_Investor_Deck.pptx
@@ -4710,7 +4710,7 @@
                 <a:latin typeface="Consolas"/>
                 <a:ea typeface="Consolas"/>
               </a:rPr>
-              <a:t>python -m pytest tests -q        # 885 tests</a:t>
+              <a:t>python -m pytest tests -q        # 900 tests</a:t>
             </a:r>
           </a:p>
           <a:p>
@@ -5789,7 +5789,7 @@
                 <a:latin typeface="Consolas"/>
                 <a:ea typeface="Consolas"/>
               </a:rPr>
-              <a:t>18,080</a:t>
+              <a:t>18,111</a:t>
             </a:r>
           </a:p>
           <a:p>
@@ -6053,7 +6053,7 @@
                 <a:latin typeface="Consolas"/>
                 <a:ea typeface="Consolas"/>
               </a:rPr>
-              <a:t>885</a:t>
+              <a:t>900</a:t>
             </a:r>
           </a:p>
           <a:p>
@@ -8610,7 +8610,7 @@
                 <a:latin typeface="Segoe UI"/>
                 <a:ea typeface="Segoe UI"/>
               </a:rPr>
-              <a:t>A public repository: 18,080 lines of Python, 43 modules, 885 passing tests, MIT.</a:t>
+              <a:t>A public repository: 18,111 lines of Python, 43 modules, 900 passing tests, MIT.</a:t>
             </a:r>
           </a:p>
           <a:p>

--- a/docs/investors/KAIROS_Investor_Deck.pptx
+++ b/docs/investors/KAIROS_Investor_Deck.pptx
@@ -4710,7 +4710,7 @@
                 <a:latin typeface="Consolas"/>
                 <a:ea typeface="Consolas"/>
               </a:rPr>
-              <a:t>python -m pytest tests -q        # 900 tests</a:t>
+              <a:t>python -m pytest tests -q        # 924 tests</a:t>
             </a:r>
           </a:p>
           <a:p>
@@ -5789,7 +5789,7 @@
                 <a:latin typeface="Consolas"/>
                 <a:ea typeface="Consolas"/>
               </a:rPr>
-              <a:t>18,111</a:t>
+              <a:t>18,305</a:t>
             </a:r>
           </a:p>
           <a:p>
@@ -5826,7 +5826,7 @@
                 <a:latin typeface="Segoe UI"/>
                 <a:ea typeface="Segoe UI"/>
               </a:rPr>
-              <a:t>43 modules, public under MIT, no closed core</a:t>
+              <a:t>44 modules, public under MIT, no closed core</a:t>
             </a:r>
           </a:p>
         </p:txBody>
@@ -6053,7 +6053,7 @@
                 <a:latin typeface="Consolas"/>
                 <a:ea typeface="Consolas"/>
               </a:rPr>
-              <a:t>900</a:t>
+              <a:t>924</a:t>
             </a:r>
           </a:p>
           <a:p>
@@ -8610,7 +8610,7 @@
                 <a:latin typeface="Segoe UI"/>
                 <a:ea typeface="Segoe UI"/>
               </a:rPr>
-              <a:t>A public repository: 18,111 lines of Python, 43 modules, 900 passing tests, MIT.</a:t>
+              <a:t>A public repository: 18,305 lines of Python, 44 modules, 924 passing tests, MIT.</a:t>
             </a:r>
           </a:p>
           <a:p>

--- a/docs/investors/KAIROS_Investor_Deck.pptx
+++ b/docs/investors/KAIROS_Investor_Deck.pptx
@@ -4710,7 +4710,7 @@
                 <a:latin typeface="Consolas"/>
                 <a:ea typeface="Consolas"/>
               </a:rPr>
-              <a:t>python -m pytest tests -q        # 924 tests</a:t>
+              <a:t>python -m pytest tests -q        # 940 tests</a:t>
             </a:r>
           </a:p>
           <a:p>
@@ -5789,7 +5789,7 @@
                 <a:latin typeface="Consolas"/>
                 <a:ea typeface="Consolas"/>
               </a:rPr>
-              <a:t>18,305</a:t>
+              <a:t>18,524</a:t>
             </a:r>
           </a:p>
           <a:p>
@@ -5826,7 +5826,7 @@
                 <a:latin typeface="Segoe UI"/>
                 <a:ea typeface="Segoe UI"/>
               </a:rPr>
-              <a:t>44 modules, public under MIT, no closed core</a:t>
+              <a:t>45 modules, public under MIT, no closed core</a:t>
             </a:r>
           </a:p>
         </p:txBody>
@@ -6053,7 +6053,7 @@
                 <a:latin typeface="Consolas"/>
                 <a:ea typeface="Consolas"/>
               </a:rPr>
-              <a:t>924</a:t>
+              <a:t>940</a:t>
             </a:r>
           </a:p>
           <a:p>
@@ -8610,7 +8610,7 @@
                 <a:latin typeface="Segoe UI"/>
                 <a:ea typeface="Segoe UI"/>
               </a:rPr>
-              <a:t>A public repository: 18,305 lines of Python, 44 modules, 924 passing tests, MIT.</a:t>
+              <a:t>A public repository: 18,524 lines of Python, 45 modules, 940 passing tests, MIT.</a:t>
             </a:r>
           </a:p>
           <a:p>

--- a/docs/investors/KAIROS_Investor_Deck.pptx
+++ b/docs/investors/KAIROS_Investor_Deck.pptx
@@ -4710,7 +4710,7 @@
                 <a:latin typeface="Consolas"/>
                 <a:ea typeface="Consolas"/>
               </a:rPr>
-              <a:t>python -m pytest tests -q        # 940 tests</a:t>
+              <a:t>python -m pytest tests -q        # 947 tests</a:t>
             </a:r>
           </a:p>
           <a:p>
@@ -5789,7 +5789,7 @@
                 <a:latin typeface="Consolas"/>
                 <a:ea typeface="Consolas"/>
               </a:rPr>
-              <a:t>18,524</a:t>
+              <a:t>18,549</a:t>
             </a:r>
           </a:p>
           <a:p>
@@ -6053,7 +6053,7 @@
                 <a:latin typeface="Consolas"/>
                 <a:ea typeface="Consolas"/>
               </a:rPr>
-              <a:t>940</a:t>
+              <a:t>947</a:t>
             </a:r>
           </a:p>
           <a:p>
@@ -8610,7 +8610,7 @@
                 <a:latin typeface="Segoe UI"/>
                 <a:ea typeface="Segoe UI"/>
               </a:rPr>
-              <a:t>A public repository: 18,524 lines of Python, 45 modules, 940 passing tests, MIT.</a:t>
+              <a:t>A public repository: 18,549 lines of Python, 45 modules, 947 passing tests, MIT.</a:t>
             </a:r>
           </a:p>
           <a:p>

--- a/docs/investors/KAIROS_Investor_Deck.pptx
+++ b/docs/investors/KAIROS_Investor_Deck.pptx
@@ -4710,7 +4710,7 @@
                 <a:latin typeface="Consolas"/>
                 <a:ea typeface="Consolas"/>
               </a:rPr>
-              <a:t>python -m pytest tests -q        # 947 tests</a:t>
+              <a:t>python -m pytest tests -q        # 949 tests</a:t>
             </a:r>
           </a:p>
           <a:p>
@@ -5789,7 +5789,7 @@
                 <a:latin typeface="Consolas"/>
                 <a:ea typeface="Consolas"/>
               </a:rPr>
-              <a:t>18,549</a:t>
+              <a:t>18,550</a:t>
             </a:r>
           </a:p>
           <a:p>
@@ -6053,7 +6053,7 @@
                 <a:latin typeface="Consolas"/>
                 <a:ea typeface="Consolas"/>
               </a:rPr>
-              <a:t>947</a:t>
+              <a:t>949</a:t>
             </a:r>
           </a:p>
           <a:p>
@@ -8610,7 +8610,7 @@
                 <a:latin typeface="Segoe UI"/>
                 <a:ea typeface="Segoe UI"/>
               </a:rPr>
-              <a:t>A public repository: 18,549 lines of Python, 45 modules, 947 passing tests, MIT.</a:t>
+              <a:t>A public repository: 18,550 lines of Python, 45 modules, 949 passing tests, MIT.</a:t>
             </a:r>
           </a:p>
           <a:p>

--- a/docs/investors/KAIROS_Investor_Deck.pptx
+++ b/docs/investors/KAIROS_Investor_Deck.pptx
@@ -4710,7 +4710,7 @@
                 <a:latin typeface="Consolas"/>
                 <a:ea typeface="Consolas"/>
               </a:rPr>
-              <a:t>python -m pytest tests -q        # 949 tests</a:t>
+              <a:t>python -m pytest tests -q        # 950 tests</a:t>
             </a:r>
           </a:p>
           <a:p>
@@ -5789,7 +5789,7 @@
                 <a:latin typeface="Consolas"/>
                 <a:ea typeface="Consolas"/>
               </a:rPr>
-              <a:t>18,550</a:t>
+              <a:t>18,557</a:t>
             </a:r>
           </a:p>
           <a:p>
@@ -6053,7 +6053,7 @@
                 <a:latin typeface="Consolas"/>
                 <a:ea typeface="Consolas"/>
               </a:rPr>
-              <a:t>949</a:t>
+              <a:t>950</a:t>
             </a:r>
           </a:p>
           <a:p>
@@ -8610,7 +8610,7 @@
                 <a:latin typeface="Segoe UI"/>
                 <a:ea typeface="Segoe UI"/>
               </a:rPr>
-              <a:t>A public repository: 18,550 lines of Python, 45 modules, 949 passing tests, MIT.</a:t>
+              <a:t>A public repository: 18,557 lines of Python, 45 modules, 950 passing tests, MIT.</a:t>
             </a:r>
           </a:p>
           <a:p>

--- a/docs/investors/KAIROS_Investor_Deck.pptx
+++ b/docs/investors/KAIROS_Investor_Deck.pptx
@@ -4710,7 +4710,7 @@
                 <a:latin typeface="Consolas"/>
                 <a:ea typeface="Consolas"/>
               </a:rPr>
-              <a:t>python -m pytest tests -q        # 950 tests</a:t>
+              <a:t>python -m pytest tests -q        # 957 tests</a:t>
             </a:r>
           </a:p>
           <a:p>
@@ -5789,7 +5789,7 @@
                 <a:latin typeface="Consolas"/>
                 <a:ea typeface="Consolas"/>
               </a:rPr>
-              <a:t>18,557</a:t>
+              <a:t>18,603</a:t>
             </a:r>
           </a:p>
           <a:p>
@@ -6053,7 +6053,7 @@
                 <a:latin typeface="Consolas"/>
                 <a:ea typeface="Consolas"/>
               </a:rPr>
-              <a:t>950</a:t>
+              <a:t>957</a:t>
             </a:r>
           </a:p>
           <a:p>
@@ -8610,7 +8610,7 @@
                 <a:latin typeface="Segoe UI"/>
                 <a:ea typeface="Segoe UI"/>
               </a:rPr>
-              <a:t>A public repository: 18,557 lines of Python, 45 modules, 950 passing tests, MIT.</a:t>
+              <a:t>A public repository: 18,603 lines of Python, 45 modules, 957 passing tests, MIT.</a:t>
             </a:r>
           </a:p>
           <a:p>

--- a/docs/investors/KAIROS_Investor_Deck.pptx
+++ b/docs/investors/KAIROS_Investor_Deck.pptx
@@ -4422,7 +4422,7 @@
                 <a:latin typeface="Segoe UI"/>
                 <a:ea typeface="Segoe UI"/>
               </a:rPr>
-              <a:t>The journal grows on its own every ten minutes: every prediction is in the dated ledger; 429 horizons matured, zero directional calls resolved so far. Nobody has to trust a slide to check this number; it prints itself, and it will print the losses too.</a:t>
+              <a:t>The journal grows on its own every ten minutes: every prediction is in the dated ledger; 779 horizons matured, zero directional calls resolved so far. Nobody has to trust a slide to check this number; it prints itself, and it will print the losses too.</a:t>
             </a:r>
           </a:p>
         </p:txBody>
@@ -4710,7 +4710,7 @@
                 <a:latin typeface="Consolas"/>
                 <a:ea typeface="Consolas"/>
               </a:rPr>
-              <a:t>python -m pytest tests -q        # 957 tests</a:t>
+              <a:t>python -m pytest tests -q        # 958 tests</a:t>
             </a:r>
           </a:p>
           <a:p>
@@ -5789,7 +5789,7 @@
                 <a:latin typeface="Consolas"/>
                 <a:ea typeface="Consolas"/>
               </a:rPr>
-              <a:t>18,603</a:t>
+              <a:t>18,618</a:t>
             </a:r>
           </a:p>
           <a:p>
@@ -6053,7 +6053,7 @@
                 <a:latin typeface="Consolas"/>
                 <a:ea typeface="Consolas"/>
               </a:rPr>
-              <a:t>957</a:t>
+              <a:t>958</a:t>
             </a:r>
           </a:p>
           <a:p>
@@ -8610,7 +8610,7 @@
                 <a:latin typeface="Segoe UI"/>
                 <a:ea typeface="Segoe UI"/>
               </a:rPr>
-              <a:t>A public repository: 18,603 lines of Python, 45 modules, 957 passing tests, MIT.</a:t>
+              <a:t>A public repository: 18,618 lines of Python, 45 modules, 958 passing tests, MIT.</a:t>
             </a:r>
           </a:p>
           <a:p>
@@ -8742,7 +8742,7 @@
                 <a:latin typeface="Segoe UI"/>
                 <a:ea typeface="Segoe UI"/>
               </a:rPr>
-              <a:t>429 horizons matured, and all 429 were non-trades.</a:t>
+              <a:t>779 horizons matured, and all 779 were non-trades.</a:t>
             </a:r>
           </a:p>
           <a:p>

--- a/docs/investors/KAIROS_Investor_Deck.pptx
+++ b/docs/investors/KAIROS_Investor_Deck.pptx
@@ -4710,7 +4710,7 @@
                 <a:latin typeface="Consolas"/>
                 <a:ea typeface="Consolas"/>
               </a:rPr>
-              <a:t>python -m pytest tests -q        # 958 tests</a:t>
+              <a:t>python -m pytest tests -q        # 960 tests</a:t>
             </a:r>
           </a:p>
           <a:p>
@@ -6053,7 +6053,7 @@
                 <a:latin typeface="Consolas"/>
                 <a:ea typeface="Consolas"/>
               </a:rPr>
-              <a:t>958</a:t>
+              <a:t>960</a:t>
             </a:r>
           </a:p>
           <a:p>
@@ -8610,7 +8610,7 @@
                 <a:latin typeface="Segoe UI"/>
                 <a:ea typeface="Segoe UI"/>
               </a:rPr>
-              <a:t>A public repository: 18,618 lines of Python, 45 modules, 958 passing tests, MIT.</a:t>
+              <a:t>A public repository: 18,618 lines of Python, 45 modules, 960 passing tests, MIT.</a:t>
             </a:r>
           </a:p>
           <a:p>

--- a/docs/investors/KAIROS_Investor_Deck.pptx
+++ b/docs/investors/KAIROS_Investor_Deck.pptx
@@ -4710,7 +4710,7 @@
                 <a:latin typeface="Consolas"/>
                 <a:ea typeface="Consolas"/>
               </a:rPr>
-              <a:t>python -m pytest tests -q        # 960 tests</a:t>
+              <a:t>python -m pytest tests -q        # 982 tests</a:t>
             </a:r>
           </a:p>
           <a:p>
@@ -5789,7 +5789,7 @@
                 <a:latin typeface="Consolas"/>
                 <a:ea typeface="Consolas"/>
               </a:rPr>
-              <a:t>18,618</a:t>
+              <a:t>18,846</a:t>
             </a:r>
           </a:p>
           <a:p>
@@ -6053,7 +6053,7 @@
                 <a:latin typeface="Consolas"/>
                 <a:ea typeface="Consolas"/>
               </a:rPr>
-              <a:t>960</a:t>
+              <a:t>982</a:t>
             </a:r>
           </a:p>
           <a:p>
@@ -8610,7 +8610,7 @@
                 <a:latin typeface="Segoe UI"/>
                 <a:ea typeface="Segoe UI"/>
               </a:rPr>
-              <a:t>A public repository: 18,618 lines of Python, 45 modules, 960 passing tests, MIT.</a:t>
+              <a:t>A public repository: 18,846 lines of Python, 45 modules, 982 passing tests, MIT.</a:t>
             </a:r>
           </a:p>
           <a:p>

--- a/docs/investors/KAIROS_Investor_Deck.pptx
+++ b/docs/investors/KAIROS_Investor_Deck.pptx
@@ -4710,7 +4710,7 @@
                 <a:latin typeface="Consolas"/>
                 <a:ea typeface="Consolas"/>
               </a:rPr>
-              <a:t>python -m pytest tests -q        # 982 tests</a:t>
+              <a:t>python -m pytest tests -q        # 988 tests</a:t>
             </a:r>
           </a:p>
           <a:p>
@@ -5789,7 +5789,7 @@
                 <a:latin typeface="Consolas"/>
                 <a:ea typeface="Consolas"/>
               </a:rPr>
-              <a:t>18,846</a:t>
+              <a:t>18,888</a:t>
             </a:r>
           </a:p>
           <a:p>
@@ -6053,7 +6053,7 @@
                 <a:latin typeface="Consolas"/>
                 <a:ea typeface="Consolas"/>
               </a:rPr>
-              <a:t>982</a:t>
+              <a:t>988</a:t>
             </a:r>
           </a:p>
           <a:p>
@@ -8610,7 +8610,7 @@
                 <a:latin typeface="Segoe UI"/>
                 <a:ea typeface="Segoe UI"/>
               </a:rPr>
-              <a:t>A public repository: 18,846 lines of Python, 45 modules, 982 passing tests, MIT.</a:t>
+              <a:t>A public repository: 18,888 lines of Python, 45 modules, 988 passing tests, MIT.</a:t>
             </a:r>
           </a:p>
           <a:p>

--- a/docs/investors/KAIROS_Investor_Deck.pptx
+++ b/docs/investors/KAIROS_Investor_Deck.pptx
@@ -4710,7 +4710,7 @@
                 <a:latin typeface="Consolas"/>
                 <a:ea typeface="Consolas"/>
               </a:rPr>
-              <a:t>python -m pytest tests -q        # 988 tests</a:t>
+              <a:t>python -m pytest tests -q        # 993 tests</a:t>
             </a:r>
           </a:p>
           <a:p>
@@ -5789,7 +5789,7 @@
                 <a:latin typeface="Consolas"/>
                 <a:ea typeface="Consolas"/>
               </a:rPr>
-              <a:t>18,888</a:t>
+              <a:t>18,982</a:t>
             </a:r>
           </a:p>
           <a:p>
@@ -6053,7 +6053,7 @@
                 <a:latin typeface="Consolas"/>
                 <a:ea typeface="Consolas"/>
               </a:rPr>
-              <a:t>988</a:t>
+              <a:t>993</a:t>
             </a:r>
           </a:p>
           <a:p>
@@ -8610,7 +8610,7 @@
                 <a:latin typeface="Segoe UI"/>
                 <a:ea typeface="Segoe UI"/>
               </a:rPr>
-              <a:t>A public repository: 18,888 lines of Python, 45 modules, 988 passing tests, MIT.</a:t>
+              <a:t>A public repository: 18,982 lines of Python, 45 modules, 993 passing tests, MIT.</a:t>
             </a:r>
           </a:p>
           <a:p>

--- a/docs/investors/KAIROS_Investor_Deck.pptx
+++ b/docs/investors/KAIROS_Investor_Deck.pptx
@@ -4710,7 +4710,7 @@
                 <a:latin typeface="Consolas"/>
                 <a:ea typeface="Consolas"/>
               </a:rPr>
-              <a:t>python -m pytest tests -q        # 993 tests</a:t>
+              <a:t>python -m pytest tests -q        # 997 tests</a:t>
             </a:r>
           </a:p>
           <a:p>
@@ -5789,7 +5789,7 @@
                 <a:latin typeface="Consolas"/>
                 <a:ea typeface="Consolas"/>
               </a:rPr>
-              <a:t>18,982</a:t>
+              <a:t>19,010</a:t>
             </a:r>
           </a:p>
           <a:p>
@@ -6053,7 +6053,7 @@
                 <a:latin typeface="Consolas"/>
                 <a:ea typeface="Consolas"/>
               </a:rPr>
-              <a:t>993</a:t>
+              <a:t>997</a:t>
             </a:r>
           </a:p>
           <a:p>
@@ -8610,7 +8610,7 @@
                 <a:latin typeface="Segoe UI"/>
                 <a:ea typeface="Segoe UI"/>
               </a:rPr>
-              <a:t>A public repository: 18,982 lines of Python, 45 modules, 993 passing tests, MIT.</a:t>
+              <a:t>A public repository: 19,010 lines of Python, 45 modules, 997 passing tests, MIT.</a:t>
             </a:r>
           </a:p>
           <a:p>

--- a/docs/investors/KAIROS_Investor_Deck.pptx
+++ b/docs/investors/KAIROS_Investor_Deck.pptx
@@ -4710,7 +4710,7 @@
                 <a:latin typeface="Consolas"/>
                 <a:ea typeface="Consolas"/>
               </a:rPr>
-              <a:t>python -m pytest tests -q        # 997 tests</a:t>
+              <a:t>python -m pytest tests -q        # 1001 tests</a:t>
             </a:r>
           </a:p>
           <a:p>
@@ -5789,7 +5789,7 @@
                 <a:latin typeface="Consolas"/>
                 <a:ea typeface="Consolas"/>
               </a:rPr>
-              <a:t>19,010</a:t>
+              <a:t>19,004</a:t>
             </a:r>
           </a:p>
           <a:p>
@@ -6053,7 +6053,7 @@
                 <a:latin typeface="Consolas"/>
                 <a:ea typeface="Consolas"/>
               </a:rPr>
-              <a:t>997</a:t>
+              <a:t>1001</a:t>
             </a:r>
           </a:p>
           <a:p>
@@ -8610,7 +8610,7 @@
                 <a:latin typeface="Segoe UI"/>
                 <a:ea typeface="Segoe UI"/>
               </a:rPr>
-              <a:t>A public repository: 19,010 lines of Python, 45 modules, 997 passing tests, MIT.</a:t>
+              <a:t>A public repository: 19,004 lines of Python, 45 modules, 1001 passing tests, MIT.</a:t>
             </a:r>
           </a:p>
           <a:p>

--- a/docs/investors/KAIROS_Investor_Deck.pptx
+++ b/docs/investors/KAIROS_Investor_Deck.pptx
@@ -4710,7 +4710,7 @@
                 <a:latin typeface="Consolas"/>
                 <a:ea typeface="Consolas"/>
               </a:rPr>
-              <a:t>python -m pytest tests -q        # 1001 tests</a:t>
+              <a:t>python -m pytest tests -q        # 1009 tests</a:t>
             </a:r>
           </a:p>
           <a:p>
@@ -5789,7 +5789,7 @@
                 <a:latin typeface="Consolas"/>
                 <a:ea typeface="Consolas"/>
               </a:rPr>
-              <a:t>19,004</a:t>
+              <a:t>19,034</a:t>
             </a:r>
           </a:p>
           <a:p>
@@ -6053,7 +6053,7 @@
                 <a:latin typeface="Consolas"/>
                 <a:ea typeface="Consolas"/>
               </a:rPr>
-              <a:t>1001</a:t>
+              <a:t>1009</a:t>
             </a:r>
           </a:p>
           <a:p>
@@ -8610,7 +8610,7 @@
                 <a:latin typeface="Segoe UI"/>
                 <a:ea typeface="Segoe UI"/>
               </a:rPr>
-              <a:t>A public repository: 19,004 lines of Python, 45 modules, 1001 passing tests, MIT.</a:t>
+              <a:t>A public repository: 19,034 lines of Python, 45 modules, 1009 passing tests, MIT.</a:t>
             </a:r>
           </a:p>
           <a:p>

--- a/docs/investors/KAIROS_Investor_Deck.pptx
+++ b/docs/investors/KAIROS_Investor_Deck.pptx
@@ -4710,7 +4710,7 @@
                 <a:latin typeface="Consolas"/>
                 <a:ea typeface="Consolas"/>
               </a:rPr>
-              <a:t>python -m pytest tests -q        # 1009 tests</a:t>
+              <a:t>python -m pytest tests -q        # 1014 tests</a:t>
             </a:r>
           </a:p>
           <a:p>
@@ -5789,7 +5789,7 @@
                 <a:latin typeface="Consolas"/>
                 <a:ea typeface="Consolas"/>
               </a:rPr>
-              <a:t>19,034</a:t>
+              <a:t>19,054</a:t>
             </a:r>
           </a:p>
           <a:p>
@@ -6053,7 +6053,7 @@
                 <a:latin typeface="Consolas"/>
                 <a:ea typeface="Consolas"/>
               </a:rPr>
-              <a:t>1009</a:t>
+              <a:t>1014</a:t>
             </a:r>
           </a:p>
           <a:p>
@@ -8610,7 +8610,7 @@
                 <a:latin typeface="Segoe UI"/>
                 <a:ea typeface="Segoe UI"/>
               </a:rPr>
-              <a:t>A public repository: 19,034 lines of Python, 45 modules, 1009 passing tests, MIT.</a:t>
+              <a:t>A public repository: 19,054 lines of Python, 45 modules, 1014 passing tests, MIT.</a:t>
             </a:r>
           </a:p>
           <a:p>

--- a/docs/investors/KAIROS_Investor_Deck.pptx
+++ b/docs/investors/KAIROS_Investor_Deck.pptx
@@ -4710,7 +4710,7 @@
                 <a:latin typeface="Consolas"/>
                 <a:ea typeface="Consolas"/>
               </a:rPr>
-              <a:t>python -m pytest tests -q        # 1014 tests</a:t>
+              <a:t>python -m pytest tests -q        # 1022 tests</a:t>
             </a:r>
           </a:p>
           <a:p>
@@ -5789,7 +5789,7 @@
                 <a:latin typeface="Consolas"/>
                 <a:ea typeface="Consolas"/>
               </a:rPr>
-              <a:t>19,054</a:t>
+              <a:t>19,124</a:t>
             </a:r>
           </a:p>
           <a:p>
@@ -6053,7 +6053,7 @@
                 <a:latin typeface="Consolas"/>
                 <a:ea typeface="Consolas"/>
               </a:rPr>
-              <a:t>1014</a:t>
+              <a:t>1022</a:t>
             </a:r>
           </a:p>
           <a:p>
@@ -8610,7 +8610,7 @@
                 <a:latin typeface="Segoe UI"/>
                 <a:ea typeface="Segoe UI"/>
               </a:rPr>
-              <a:t>A public repository: 19,054 lines of Python, 45 modules, 1014 passing tests, MIT.</a:t>
+              <a:t>A public repository: 19,124 lines of Python, 45 modules, 1022 passing tests, MIT.</a:t>
             </a:r>
           </a:p>
           <a:p>

--- a/docs/investors/KAIROS_Investor_Deck.pptx
+++ b/docs/investors/KAIROS_Investor_Deck.pptx
@@ -4710,7 +4710,7 @@
                 <a:latin typeface="Consolas"/>
                 <a:ea typeface="Consolas"/>
               </a:rPr>
-              <a:t>python -m pytest tests -q        # 1022 tests</a:t>
+              <a:t>python -m pytest tests -q        # 1026 tests</a:t>
             </a:r>
           </a:p>
           <a:p>
@@ -5789,7 +5789,7 @@
                 <a:latin typeface="Consolas"/>
                 <a:ea typeface="Consolas"/>
               </a:rPr>
-              <a:t>19,124</a:t>
+              <a:t>19,143</a:t>
             </a:r>
           </a:p>
           <a:p>
@@ -6053,7 +6053,7 @@
                 <a:latin typeface="Consolas"/>
                 <a:ea typeface="Consolas"/>
               </a:rPr>
-              <a:t>1022</a:t>
+              <a:t>1026</a:t>
             </a:r>
           </a:p>
           <a:p>
@@ -8610,7 +8610,7 @@
                 <a:latin typeface="Segoe UI"/>
                 <a:ea typeface="Segoe UI"/>
               </a:rPr>
-              <a:t>A public repository: 19,124 lines of Python, 45 modules, 1022 passing tests, MIT.</a:t>
+              <a:t>A public repository: 19,143 lines of Python, 45 modules, 1026 passing tests, MIT.</a:t>
             </a:r>
           </a:p>
           <a:p>

--- a/docs/investors/KAIROS_Investor_Deck.pptx
+++ b/docs/investors/KAIROS_Investor_Deck.pptx
@@ -4710,7 +4710,7 @@
                 <a:latin typeface="Consolas"/>
                 <a:ea typeface="Consolas"/>
               </a:rPr>
-              <a:t>python -m pytest tests -q        # 1026 tests</a:t>
+              <a:t>python -m pytest tests -q        # 1035 tests</a:t>
             </a:r>
           </a:p>
           <a:p>
@@ -5789,7 +5789,7 @@
                 <a:latin typeface="Consolas"/>
                 <a:ea typeface="Consolas"/>
               </a:rPr>
-              <a:t>19,143</a:t>
+              <a:t>19,202</a:t>
             </a:r>
           </a:p>
           <a:p>
@@ -6053,7 +6053,7 @@
                 <a:latin typeface="Consolas"/>
                 <a:ea typeface="Consolas"/>
               </a:rPr>
-              <a:t>1026</a:t>
+              <a:t>1035</a:t>
             </a:r>
           </a:p>
           <a:p>
@@ -8610,7 +8610,7 @@
                 <a:latin typeface="Segoe UI"/>
                 <a:ea typeface="Segoe UI"/>
               </a:rPr>
-              <a:t>A public repository: 19,143 lines of Python, 45 modules, 1026 passing tests, MIT.</a:t>
+              <a:t>A public repository: 19,202 lines of Python, 45 modules, 1035 passing tests, MIT.</a:t>
             </a:r>
           </a:p>
           <a:p>

--- a/docs/investors/KAIROS_Investor_Deck.pptx
+++ b/docs/investors/KAIROS_Investor_Deck.pptx
@@ -4710,7 +4710,7 @@
                 <a:latin typeface="Consolas"/>
                 <a:ea typeface="Consolas"/>
               </a:rPr>
-              <a:t>python -m pytest tests -q        # 1035 tests</a:t>
+              <a:t>python -m pytest tests -q        # 1051 tests</a:t>
             </a:r>
           </a:p>
           <a:p>
@@ -5789,7 +5789,7 @@
                 <a:latin typeface="Consolas"/>
                 <a:ea typeface="Consolas"/>
               </a:rPr>
-              <a:t>19,202</a:t>
+              <a:t>19,326</a:t>
             </a:r>
           </a:p>
           <a:p>
@@ -6053,7 +6053,7 @@
                 <a:latin typeface="Consolas"/>
                 <a:ea typeface="Consolas"/>
               </a:rPr>
-              <a:t>1035</a:t>
+              <a:t>1051</a:t>
             </a:r>
           </a:p>
           <a:p>
@@ -8610,7 +8610,7 @@
                 <a:latin typeface="Segoe UI"/>
                 <a:ea typeface="Segoe UI"/>
               </a:rPr>
-              <a:t>A public repository: 19,202 lines of Python, 45 modules, 1035 passing tests, MIT.</a:t>
+              <a:t>A public repository: 19,326 lines of Python, 45 modules, 1051 passing tests, MIT.</a:t>
             </a:r>
           </a:p>
           <a:p>

--- a/docs/investors/KAIROS_Investor_Deck.pptx
+++ b/docs/investors/KAIROS_Investor_Deck.pptx
@@ -320,7 +320,7 @@
                 <a:latin typeface="Segoe UI"/>
                 <a:ea typeface="Segoe UI"/>
               </a:rPr>
-              <a:t>KAIROS v2.6.2 · 2026-10-24 · github.com/zhaider5142009-oss/kairos</a:t>
+              <a:t>KAIROS v2.6.2 · 2026-10-25 · github.com/zhaider5142009-oss/kairos</a:t>
             </a:r>
           </a:p>
         </p:txBody>
@@ -4710,7 +4710,7 @@
                 <a:latin typeface="Consolas"/>
                 <a:ea typeface="Consolas"/>
               </a:rPr>
-              <a:t>python -m pytest tests -q        # 1051 tests</a:t>
+              <a:t>python -m pytest tests -q        # 1057 tests</a:t>
             </a:r>
           </a:p>
           <a:p>
@@ -5789,7 +5789,7 @@
                 <a:latin typeface="Consolas"/>
                 <a:ea typeface="Consolas"/>
               </a:rPr>
-              <a:t>19,326</a:t>
+              <a:t>19,357</a:t>
             </a:r>
           </a:p>
           <a:p>
@@ -6053,7 +6053,7 @@
                 <a:latin typeface="Consolas"/>
                 <a:ea typeface="Consolas"/>
               </a:rPr>
-              <a:t>1051</a:t>
+              <a:t>1057</a:t>
             </a:r>
           </a:p>
           <a:p>
@@ -6278,7 +6278,7 @@
                 <a:latin typeface="Consolas"/>
                 <a:ea typeface="Consolas"/>
               </a:rPr>
-              <a:t>figures verified against the repository on 2026-10-24</a:t>
+              <a:t>figures verified against the repository on 2026-10-25</a:t>
             </a:r>
           </a:p>
         </p:txBody>
@@ -8610,7 +8610,7 @@
                 <a:latin typeface="Segoe UI"/>
                 <a:ea typeface="Segoe UI"/>
               </a:rPr>
-              <a:t>A public repository: 19,326 lines of Python, 45 modules, 1051 passing tests, MIT.</a:t>
+              <a:t>A public repository: 19,357 lines of Python, 45 modules, 1057 passing tests, MIT.</a:t>
             </a:r>
           </a:p>
           <a:p>

--- a/docs/investors/KAIROS_Investor_Deck.pptx
+++ b/docs/investors/KAIROS_Investor_Deck.pptx
@@ -4710,7 +4710,7 @@
                 <a:latin typeface="Consolas"/>
                 <a:ea typeface="Consolas"/>
               </a:rPr>
-              <a:t>python -m pytest tests -q        # 1057 tests</a:t>
+              <a:t>python -m pytest tests -q        # 1059 tests</a:t>
             </a:r>
           </a:p>
           <a:p>
@@ -5789,7 +5789,7 @@
                 <a:latin typeface="Consolas"/>
                 <a:ea typeface="Consolas"/>
               </a:rPr>
-              <a:t>19,357</a:t>
+              <a:t>19,373</a:t>
             </a:r>
           </a:p>
           <a:p>
@@ -6053,7 +6053,7 @@
                 <a:latin typeface="Consolas"/>
                 <a:ea typeface="Consolas"/>
               </a:rPr>
-              <a:t>1057</a:t>
+              <a:t>1059</a:t>
             </a:r>
           </a:p>
           <a:p>
@@ -8610,7 +8610,7 @@
                 <a:latin typeface="Segoe UI"/>
                 <a:ea typeface="Segoe UI"/>
               </a:rPr>
-              <a:t>A public repository: 19,357 lines of Python, 45 modules, 1057 passing tests, MIT.</a:t>
+              <a:t>A public repository: 19,373 lines of Python, 45 modules, 1059 passing tests, MIT.</a:t>
             </a:r>
           </a:p>
           <a:p>

--- a/docs/investors/KAIROS_Investor_Deck.pptx
+++ b/docs/investors/KAIROS_Investor_Deck.pptx
@@ -4710,7 +4710,7 @@
                 <a:latin typeface="Consolas"/>
                 <a:ea typeface="Consolas"/>
               </a:rPr>
-              <a:t>python -m pytest tests -q        # 1059 tests</a:t>
+              <a:t>python -m pytest tests -q        # 1067 tests</a:t>
             </a:r>
           </a:p>
           <a:p>
@@ -5789,7 +5789,7 @@
                 <a:latin typeface="Consolas"/>
                 <a:ea typeface="Consolas"/>
               </a:rPr>
-              <a:t>19,373</a:t>
+              <a:t>19,442</a:t>
             </a:r>
           </a:p>
           <a:p>
@@ -6053,7 +6053,7 @@
                 <a:latin typeface="Consolas"/>
                 <a:ea typeface="Consolas"/>
               </a:rPr>
-              <a:t>1059</a:t>
+              <a:t>1067</a:t>
             </a:r>
           </a:p>
           <a:p>
@@ -8610,7 +8610,7 @@
                 <a:latin typeface="Segoe UI"/>
                 <a:ea typeface="Segoe UI"/>
               </a:rPr>
-              <a:t>A public repository: 19,373 lines of Python, 45 modules, 1059 passing tests, MIT.</a:t>
+              <a:t>A public repository: 19,442 lines of Python, 45 modules, 1067 passing tests, MIT.</a:t>
             </a:r>
           </a:p>
           <a:p>

--- a/docs/investors/KAIROS_Investor_Deck.pptx
+++ b/docs/investors/KAIROS_Investor_Deck.pptx
@@ -4710,7 +4710,7 @@
                 <a:latin typeface="Consolas"/>
                 <a:ea typeface="Consolas"/>
               </a:rPr>
-              <a:t>python -m pytest tests -q        # 1067 tests</a:t>
+              <a:t>python -m pytest tests -q        # 1078 tests</a:t>
             </a:r>
           </a:p>
           <a:p>
@@ -5789,7 +5789,7 @@
                 <a:latin typeface="Consolas"/>
                 <a:ea typeface="Consolas"/>
               </a:rPr>
-              <a:t>19,442</a:t>
+              <a:t>19,514</a:t>
             </a:r>
           </a:p>
           <a:p>
@@ -6053,7 +6053,7 @@
                 <a:latin typeface="Consolas"/>
                 <a:ea typeface="Consolas"/>
               </a:rPr>
-              <a:t>1067</a:t>
+              <a:t>1078</a:t>
             </a:r>
           </a:p>
           <a:p>
@@ -8610,7 +8610,7 @@
                 <a:latin typeface="Segoe UI"/>
                 <a:ea typeface="Segoe UI"/>
               </a:rPr>
-              <a:t>A public repository: 19,442 lines of Python, 45 modules, 1067 passing tests, MIT.</a:t>
+              <a:t>A public repository: 19,514 lines of Python, 45 modules, 1078 passing tests, MIT.</a:t>
             </a:r>
           </a:p>
           <a:p>

--- a/docs/investors/KAIROS_Investor_Deck.pptx
+++ b/docs/investors/KAIROS_Investor_Deck.pptx
@@ -4710,7 +4710,7 @@
                 <a:latin typeface="Consolas"/>
                 <a:ea typeface="Consolas"/>
               </a:rPr>
-              <a:t>python -m pytest tests -q        # 1078 tests</a:t>
+              <a:t>python -m pytest tests -q        # 1109 tests</a:t>
             </a:r>
           </a:p>
           <a:p>
@@ -5789,7 +5789,7 @@
                 <a:latin typeface="Consolas"/>
                 <a:ea typeface="Consolas"/>
               </a:rPr>
-              <a:t>19,514</a:t>
+              <a:t>19,632</a:t>
             </a:r>
           </a:p>
           <a:p>
@@ -6053,7 +6053,7 @@
                 <a:latin typeface="Consolas"/>
                 <a:ea typeface="Consolas"/>
               </a:rPr>
-              <a:t>1078</a:t>
+              <a:t>1109</a:t>
             </a:r>
           </a:p>
           <a:p>
@@ -8610,7 +8610,7 @@
                 <a:latin typeface="Segoe UI"/>
                 <a:ea typeface="Segoe UI"/>
               </a:rPr>
-              <a:t>A public repository: 19,514 lines of Python, 45 modules, 1078 passing tests, MIT.</a:t>
+              <a:t>A public repository: 19,632 lines of Python, 45 modules, 1109 passing tests, MIT.</a:t>
             </a:r>
           </a:p>
           <a:p>

--- a/docs/investors/KAIROS_Investor_Deck.pptx
+++ b/docs/investors/KAIROS_Investor_Deck.pptx
@@ -4710,7 +4710,7 @@
                 <a:latin typeface="Consolas"/>
                 <a:ea typeface="Consolas"/>
               </a:rPr>
-              <a:t>python -m pytest tests -q        # 1109 tests</a:t>
+              <a:t>python -m pytest tests -q        # 1171 tests</a:t>
             </a:r>
           </a:p>
           <a:p>
@@ -5789,7 +5789,7 @@
                 <a:latin typeface="Consolas"/>
                 <a:ea typeface="Consolas"/>
               </a:rPr>
-              <a:t>19,632</a:t>
+              <a:t>19,961</a:t>
             </a:r>
           </a:p>
           <a:p>
@@ -6053,7 +6053,7 @@
                 <a:latin typeface="Consolas"/>
                 <a:ea typeface="Consolas"/>
               </a:rPr>
-              <a:t>1109</a:t>
+              <a:t>1171</a:t>
             </a:r>
           </a:p>
           <a:p>
@@ -8610,7 +8610,7 @@
                 <a:latin typeface="Segoe UI"/>
                 <a:ea typeface="Segoe UI"/>
               </a:rPr>
-              <a:t>A public repository: 19,632 lines of Python, 45 modules, 1109 passing tests, MIT.</a:t>
+              <a:t>A public repository: 19,961 lines of Python, 45 modules, 1171 passing tests, MIT.</a:t>
             </a:r>
           </a:p>
           <a:p>
@@ -8784,7 +8784,7 @@
                 <a:latin typeface="Segoe UI"/>
                 <a:ea typeface="Segoe UI"/>
               </a:rPr>
-              <a:t>Paper book: -Rs 13.05 realized on Rs 1,000,000, 2 fills.</a:t>
+              <a:t>Paper book: −Rs 3,501.69 realized on Rs 1,000,000, 2 fills.</a:t>
             </a:r>
           </a:p>
           <a:p>

--- a/docs/investors/KAIROS_Investor_Deck.pptx
+++ b/docs/investors/KAIROS_Investor_Deck.pptx
@@ -4710,7 +4710,7 @@
                 <a:latin typeface="Consolas"/>
                 <a:ea typeface="Consolas"/>
               </a:rPr>
-              <a:t>python -m pytest tests -q        # 1171 tests</a:t>
+              <a:t>python -m pytest tests -q        # 1175 tests</a:t>
             </a:r>
           </a:p>
           <a:p>
@@ -5789,7 +5789,7 @@
                 <a:latin typeface="Consolas"/>
                 <a:ea typeface="Consolas"/>
               </a:rPr>
-              <a:t>19,961</a:t>
+              <a:t>19,982</a:t>
             </a:r>
           </a:p>
           <a:p>
@@ -6053,7 +6053,7 @@
                 <a:latin typeface="Consolas"/>
                 <a:ea typeface="Consolas"/>
               </a:rPr>
-              <a:t>1171</a:t>
+              <a:t>1175</a:t>
             </a:r>
           </a:p>
           <a:p>
@@ -8610,7 +8610,7 @@
                 <a:latin typeface="Segoe UI"/>
                 <a:ea typeface="Segoe UI"/>
               </a:rPr>
-              <a:t>A public repository: 19,961 lines of Python, 45 modules, 1171 passing tests, MIT.</a:t>
+              <a:t>A public repository: 19,982 lines of Python, 45 modules, 1175 passing tests, MIT.</a:t>
             </a:r>
           </a:p>
           <a:p>

--- a/docs/investors/KAIROS_Investor_Deck.pptx
+++ b/docs/investors/KAIROS_Investor_Deck.pptx
@@ -4710,7 +4710,7 @@
                 <a:latin typeface="Consolas"/>
                 <a:ea typeface="Consolas"/>
               </a:rPr>
-              <a:t>python -m pytest tests -q        # 1175 tests</a:t>
+              <a:t>python -m pytest tests -q        # 1177 tests</a:t>
             </a:r>
           </a:p>
           <a:p>
@@ -5789,7 +5789,7 @@
                 <a:latin typeface="Consolas"/>
                 <a:ea typeface="Consolas"/>
               </a:rPr>
-              <a:t>19,982</a:t>
+              <a:t>19,998</a:t>
             </a:r>
           </a:p>
           <a:p>
@@ -6053,7 +6053,7 @@
                 <a:latin typeface="Consolas"/>
                 <a:ea typeface="Consolas"/>
               </a:rPr>
-              <a:t>1175</a:t>
+              <a:t>1177</a:t>
             </a:r>
           </a:p>
           <a:p>
@@ -8610,7 +8610,7 @@
                 <a:latin typeface="Segoe UI"/>
                 <a:ea typeface="Segoe UI"/>
               </a:rPr>
-              <a:t>A public repository: 19,982 lines of Python, 45 modules, 1175 passing tests, MIT.</a:t>
+              <a:t>A public repository: 19,998 lines of Python, 45 modules, 1177 passing tests, MIT.</a:t>
             </a:r>
           </a:p>
           <a:p>

--- a/docs/investors/KAIROS_Investor_Deck.pptx
+++ b/docs/investors/KAIROS_Investor_Deck.pptx
@@ -4710,7 +4710,7 @@
                 <a:latin typeface="Consolas"/>
                 <a:ea typeface="Consolas"/>
               </a:rPr>
-              <a:t>python -m pytest tests -q        # 1177 tests</a:t>
+              <a:t>python -m pytest tests -q        # 1188 tests</a:t>
             </a:r>
           </a:p>
           <a:p>
@@ -5789,7 +5789,7 @@
                 <a:latin typeface="Consolas"/>
                 <a:ea typeface="Consolas"/>
               </a:rPr>
-              <a:t>19,998</a:t>
+              <a:t>20,194</a:t>
             </a:r>
           </a:p>
           <a:p>
@@ -6053,7 +6053,7 @@
                 <a:latin typeface="Consolas"/>
                 <a:ea typeface="Consolas"/>
               </a:rPr>
-              <a:t>1177</a:t>
+              <a:t>1188</a:t>
             </a:r>
           </a:p>
           <a:p>
@@ -8610,7 +8610,7 @@
                 <a:latin typeface="Segoe UI"/>
                 <a:ea typeface="Segoe UI"/>
               </a:rPr>
-              <a:t>A public repository: 19,998 lines of Python, 45 modules, 1177 passing tests, MIT.</a:t>
+              <a:t>A public repository: 20,194 lines of Python, 45 modules, 1188 passing tests, MIT.</a:t>
             </a:r>
           </a:p>
           <a:p>

--- a/docs/investors/KAIROS_Investor_Deck.pptx
+++ b/docs/investors/KAIROS_Investor_Deck.pptx
@@ -4710,7 +4710,7 @@
                 <a:latin typeface="Consolas"/>
                 <a:ea typeface="Consolas"/>
               </a:rPr>
-              <a:t>python -m pytest tests -q        # 1188 tests</a:t>
+              <a:t>python -m pytest tests -q        # 1193 tests</a:t>
             </a:r>
           </a:p>
           <a:p>
@@ -5789,7 +5789,7 @@
                 <a:latin typeface="Consolas"/>
                 <a:ea typeface="Consolas"/>
               </a:rPr>
-              <a:t>20,194</a:t>
+              <a:t>20,246</a:t>
             </a:r>
           </a:p>
           <a:p>
@@ -6053,7 +6053,7 @@
                 <a:latin typeface="Consolas"/>
                 <a:ea typeface="Consolas"/>
               </a:rPr>
-              <a:t>1188</a:t>
+              <a:t>1193</a:t>
             </a:r>
           </a:p>
           <a:p>
@@ -8610,7 +8610,7 @@
                 <a:latin typeface="Segoe UI"/>
                 <a:ea typeface="Segoe UI"/>
               </a:rPr>
-              <a:t>A public repository: 20,194 lines of Python, 45 modules, 1188 passing tests, MIT.</a:t>
+              <a:t>A public repository: 20,246 lines of Python, 45 modules, 1193 passing tests, MIT.</a:t>
             </a:r>
           </a:p>
           <a:p>

--- a/docs/investors/KAIROS_Investor_Deck.pptx
+++ b/docs/investors/KAIROS_Investor_Deck.pptx
@@ -4710,7 +4710,7 @@
                 <a:latin typeface="Consolas"/>
                 <a:ea typeface="Consolas"/>
               </a:rPr>
-              <a:t>python -m pytest tests -q        # 1193 tests</a:t>
+              <a:t>python -m pytest tests -q        # 1197 tests</a:t>
             </a:r>
           </a:p>
           <a:p>
@@ -5789,7 +5789,7 @@
                 <a:latin typeface="Consolas"/>
                 <a:ea typeface="Consolas"/>
               </a:rPr>
-              <a:t>20,246</a:t>
+              <a:t>20,271</a:t>
             </a:r>
           </a:p>
           <a:p>
@@ -6053,7 +6053,7 @@
                 <a:latin typeface="Consolas"/>
                 <a:ea typeface="Consolas"/>
               </a:rPr>
-              <a:t>1193</a:t>
+              <a:t>1197</a:t>
             </a:r>
           </a:p>
           <a:p>
@@ -8610,7 +8610,7 @@
                 <a:latin typeface="Segoe UI"/>
                 <a:ea typeface="Segoe UI"/>
               </a:rPr>
-              <a:t>A public repository: 20,246 lines of Python, 45 modules, 1193 passing tests, MIT.</a:t>
+              <a:t>A public repository: 20,271 lines of Python, 45 modules, 1197 passing tests, MIT.</a:t>
             </a:r>
           </a:p>
           <a:p>

--- a/docs/investors/KAIROS_Investor_Deck.pptx
+++ b/docs/investors/KAIROS_Investor_Deck.pptx
@@ -4710,7 +4710,7 @@
                 <a:latin typeface="Consolas"/>
                 <a:ea typeface="Consolas"/>
               </a:rPr>
-              <a:t>python -m pytest tests -q        # 1197 tests</a:t>
+              <a:t>python -m pytest tests -q        # 1200 tests</a:t>
             </a:r>
           </a:p>
           <a:p>
@@ -5789,7 +5789,7 @@
                 <a:latin typeface="Consolas"/>
                 <a:ea typeface="Consolas"/>
               </a:rPr>
-              <a:t>20,271</a:t>
+              <a:t>20,312</a:t>
             </a:r>
           </a:p>
           <a:p>
@@ -6053,7 +6053,7 @@
                 <a:latin typeface="Consolas"/>
                 <a:ea typeface="Consolas"/>
               </a:rPr>
-              <a:t>1197</a:t>
+              <a:t>1200</a:t>
             </a:r>
           </a:p>
           <a:p>
@@ -8610,7 +8610,7 @@
                 <a:latin typeface="Segoe UI"/>
                 <a:ea typeface="Segoe UI"/>
               </a:rPr>
-              <a:t>A public repository: 20,271 lines of Python, 45 modules, 1197 passing tests, MIT.</a:t>
+              <a:t>A public repository: 20,312 lines of Python, 45 modules, 1200 passing tests, MIT.</a:t>
             </a:r>
           </a:p>
           <a:p>

--- a/docs/investors/KAIROS_Investor_Deck.pptx
+++ b/docs/investors/KAIROS_Investor_Deck.pptx
@@ -4710,7 +4710,7 @@
                 <a:latin typeface="Consolas"/>
                 <a:ea typeface="Consolas"/>
               </a:rPr>
-              <a:t>python -m pytest tests -q        # 1200 tests</a:t>
+              <a:t>python -m pytest tests -q        # 1207 tests</a:t>
             </a:r>
           </a:p>
           <a:p>
@@ -5789,7 +5789,7 @@
                 <a:latin typeface="Consolas"/>
                 <a:ea typeface="Consolas"/>
               </a:rPr>
-              <a:t>20,312</a:t>
+              <a:t>20,352</a:t>
             </a:r>
           </a:p>
           <a:p>
@@ -6053,7 +6053,7 @@
                 <a:latin typeface="Consolas"/>
                 <a:ea typeface="Consolas"/>
               </a:rPr>
-              <a:t>1200</a:t>
+              <a:t>1207</a:t>
             </a:r>
           </a:p>
           <a:p>
@@ -8610,7 +8610,7 @@
                 <a:latin typeface="Segoe UI"/>
                 <a:ea typeface="Segoe UI"/>
               </a:rPr>
-              <a:t>A public repository: 20,312 lines of Python, 45 modules, 1200 passing tests, MIT.</a:t>
+              <a:t>A public repository: 20,352 lines of Python, 45 modules, 1207 passing tests, MIT.</a:t>
             </a:r>
           </a:p>
           <a:p>

--- a/docs/investors/KAIROS_Investor_Deck.pptx
+++ b/docs/investors/KAIROS_Investor_Deck.pptx
@@ -4710,7 +4710,7 @@
                 <a:latin typeface="Consolas"/>
                 <a:ea typeface="Consolas"/>
               </a:rPr>
-              <a:t>python -m pytest tests -q        # 1207 tests</a:t>
+              <a:t>python -m pytest tests -q        # 1208 tests</a:t>
             </a:r>
           </a:p>
           <a:p>
@@ -5789,7 +5789,7 @@
                 <a:latin typeface="Consolas"/>
                 <a:ea typeface="Consolas"/>
               </a:rPr>
-              <a:t>20,352</a:t>
+              <a:t>20,363</a:t>
             </a:r>
           </a:p>
           <a:p>
@@ -6053,7 +6053,7 @@
                 <a:latin typeface="Consolas"/>
                 <a:ea typeface="Consolas"/>
               </a:rPr>
-              <a:t>1207</a:t>
+              <a:t>1208</a:t>
             </a:r>
           </a:p>
           <a:p>
@@ -8610,7 +8610,7 @@
                 <a:latin typeface="Segoe UI"/>
                 <a:ea typeface="Segoe UI"/>
               </a:rPr>
-              <a:t>A public repository: 20,352 lines of Python, 45 modules, 1207 passing tests, MIT.</a:t>
+              <a:t>A public repository: 20,363 lines of Python, 45 modules, 1208 passing tests, MIT.</a:t>
             </a:r>
           </a:p>
           <a:p>

--- a/docs/investors/KAIROS_Investor_Deck.pptx
+++ b/docs/investors/KAIROS_Investor_Deck.pptx
@@ -4710,7 +4710,7 @@
                 <a:latin typeface="Consolas"/>
                 <a:ea typeface="Consolas"/>
               </a:rPr>
-              <a:t>python -m pytest tests -q        # 1208 tests</a:t>
+              <a:t>python -m pytest tests -q        # 1209 tests</a:t>
             </a:r>
           </a:p>
           <a:p>
@@ -6053,7 +6053,7 @@
                 <a:latin typeface="Consolas"/>
                 <a:ea typeface="Consolas"/>
               </a:rPr>
-              <a:t>1208</a:t>
+              <a:t>1209</a:t>
             </a:r>
           </a:p>
           <a:p>
@@ -8610,7 +8610,7 @@
                 <a:latin typeface="Segoe UI"/>
                 <a:ea typeface="Segoe UI"/>
               </a:rPr>
-              <a:t>A public repository: 20,363 lines of Python, 45 modules, 1208 passing tests, MIT.</a:t>
+              <a:t>A public repository: 20,363 lines of Python, 45 modules, 1209 passing tests, MIT.</a:t>
             </a:r>
           </a:p>
           <a:p>
@@ -8784,7 +8784,7 @@
                 <a:latin typeface="Segoe UI"/>
                 <a:ea typeface="Segoe UI"/>
               </a:rPr>
-              <a:t>Paper book: −Rs 3,501.69 realized on Rs 1,000,000, 2 fills.</a:t>
+              <a:t>Paper book: −Rs 3,501.69 trading P&amp;L, FX translation −Rs 2,760.38, −Rs 6,262.07 in total on Rs 1,000,000, 2 fills.</a:t>
             </a:r>
           </a:p>
           <a:p>

--- a/docs/investors/KAIROS_Investor_Deck.pptx
+++ b/docs/investors/KAIROS_Investor_Deck.pptx
@@ -4710,7 +4710,7 @@
                 <a:latin typeface="Consolas"/>
                 <a:ea typeface="Consolas"/>
               </a:rPr>
-              <a:t>python -m pytest tests -q        # 1209 tests</a:t>
+              <a:t>python -m pytest tests -q        # 1213 tests</a:t>
             </a:r>
           </a:p>
           <a:p>
@@ -5789,7 +5789,7 @@
                 <a:latin typeface="Consolas"/>
                 <a:ea typeface="Consolas"/>
               </a:rPr>
-              <a:t>20,363</a:t>
+              <a:t>20,417</a:t>
             </a:r>
           </a:p>
           <a:p>
@@ -6053,7 +6053,7 @@
                 <a:latin typeface="Consolas"/>
                 <a:ea typeface="Consolas"/>
               </a:rPr>
-              <a:t>1209</a:t>
+              <a:t>1213</a:t>
             </a:r>
           </a:p>
           <a:p>
@@ -8610,7 +8610,7 @@
                 <a:latin typeface="Segoe UI"/>
                 <a:ea typeface="Segoe UI"/>
               </a:rPr>
-              <a:t>A public repository: 20,363 lines of Python, 45 modules, 1209 passing tests, MIT.</a:t>
+              <a:t>A public repository: 20,417 lines of Python, 45 modules, 1213 passing tests, MIT.</a:t>
             </a:r>
           </a:p>
           <a:p>

--- a/docs/investors/KAIROS_Investor_Deck.pptx
+++ b/docs/investors/KAIROS_Investor_Deck.pptx
@@ -4710,7 +4710,7 @@
                 <a:latin typeface="Consolas"/>
                 <a:ea typeface="Consolas"/>
               </a:rPr>
-              <a:t>python -m pytest tests -q        # 1213 tests</a:t>
+              <a:t>python -m pytest tests -q        # 1220 tests</a:t>
             </a:r>
           </a:p>
           <a:p>
@@ -5789,7 +5789,7 @@
                 <a:latin typeface="Consolas"/>
                 <a:ea typeface="Consolas"/>
               </a:rPr>
-              <a:t>20,417</a:t>
+              <a:t>20,456</a:t>
             </a:r>
           </a:p>
           <a:p>
@@ -6053,7 +6053,7 @@
                 <a:latin typeface="Consolas"/>
                 <a:ea typeface="Consolas"/>
               </a:rPr>
-              <a:t>1213</a:t>
+              <a:t>1220</a:t>
             </a:r>
           </a:p>
           <a:p>
@@ -8610,7 +8610,7 @@
                 <a:latin typeface="Segoe UI"/>
                 <a:ea typeface="Segoe UI"/>
               </a:rPr>
-              <a:t>A public repository: 20,417 lines of Python, 45 modules, 1213 passing tests, MIT.</a:t>
+              <a:t>A public repository: 20,456 lines of Python, 45 modules, 1220 passing tests, MIT.</a:t>
             </a:r>
           </a:p>
           <a:p>

--- a/docs/investors/KAIROS_Investor_Deck.pptx
+++ b/docs/investors/KAIROS_Investor_Deck.pptx
@@ -4710,7 +4710,7 @@
                 <a:latin typeface="Consolas"/>
                 <a:ea typeface="Consolas"/>
               </a:rPr>
-              <a:t>python -m pytest tests -q        # 1220 tests</a:t>
+              <a:t>python -m pytest tests -q        # 1222 tests</a:t>
             </a:r>
           </a:p>
           <a:p>
@@ -5789,7 +5789,7 @@
                 <a:latin typeface="Consolas"/>
                 <a:ea typeface="Consolas"/>
               </a:rPr>
-              <a:t>20,456</a:t>
+              <a:t>20,466</a:t>
             </a:r>
           </a:p>
           <a:p>
@@ -6053,7 +6053,7 @@
                 <a:latin typeface="Consolas"/>
                 <a:ea typeface="Consolas"/>
               </a:rPr>
-              <a:t>1220</a:t>
+              <a:t>1222</a:t>
             </a:r>
           </a:p>
           <a:p>
@@ -8610,7 +8610,7 @@
                 <a:latin typeface="Segoe UI"/>
                 <a:ea typeface="Segoe UI"/>
               </a:rPr>
-              <a:t>A public repository: 20,456 lines of Python, 45 modules, 1220 passing tests, MIT.</a:t>
+              <a:t>A public repository: 20,466 lines of Python, 45 modules, 1222 passing tests, MIT.</a:t>
             </a:r>
           </a:p>
           <a:p>

--- a/docs/investors/KAIROS_Investor_Deck.pptx
+++ b/docs/investors/KAIROS_Investor_Deck.pptx
@@ -4710,7 +4710,7 @@
                 <a:latin typeface="Consolas"/>
                 <a:ea typeface="Consolas"/>
               </a:rPr>
-              <a:t>python -m pytest tests -q        # 1222 tests</a:t>
+              <a:t>python -m pytest tests -q        # 1224 tests</a:t>
             </a:r>
           </a:p>
           <a:p>
@@ -5789,7 +5789,7 @@
                 <a:latin typeface="Consolas"/>
                 <a:ea typeface="Consolas"/>
               </a:rPr>
-              <a:t>20,466</a:t>
+              <a:t>20,501</a:t>
             </a:r>
           </a:p>
           <a:p>
@@ -6053,7 +6053,7 @@
                 <a:latin typeface="Consolas"/>
                 <a:ea typeface="Consolas"/>
               </a:rPr>
-              <a:t>1222</a:t>
+              <a:t>1224</a:t>
             </a:r>
           </a:p>
           <a:p>
@@ -8610,7 +8610,7 @@
                 <a:latin typeface="Segoe UI"/>
                 <a:ea typeface="Segoe UI"/>
               </a:rPr>
-              <a:t>A public repository: 20,466 lines of Python, 45 modules, 1222 passing tests, MIT.</a:t>
+              <a:t>A public repository: 20,501 lines of Python, 45 modules, 1224 passing tests, MIT.</a:t>
             </a:r>
           </a:p>
           <a:p>

--- a/docs/investors/KAIROS_Investor_Deck.pptx
+++ b/docs/investors/KAIROS_Investor_Deck.pptx
@@ -4710,7 +4710,7 @@
                 <a:latin typeface="Consolas"/>
                 <a:ea typeface="Consolas"/>
               </a:rPr>
-              <a:t>python -m pytest tests -q        # 1224 tests</a:t>
+              <a:t>python -m pytest tests -q        # 1229 tests</a:t>
             </a:r>
           </a:p>
           <a:p>
@@ -5789,7 +5789,7 @@
                 <a:latin typeface="Consolas"/>
                 <a:ea typeface="Consolas"/>
               </a:rPr>
-              <a:t>20,501</a:t>
+              <a:t>20,535</a:t>
             </a:r>
           </a:p>
           <a:p>
@@ -6053,7 +6053,7 @@
                 <a:latin typeface="Consolas"/>
                 <a:ea typeface="Consolas"/>
               </a:rPr>
-              <a:t>1224</a:t>
+              <a:t>1229</a:t>
             </a:r>
           </a:p>
           <a:p>
@@ -8610,7 +8610,7 @@
                 <a:latin typeface="Segoe UI"/>
                 <a:ea typeface="Segoe UI"/>
               </a:rPr>
-              <a:t>A public repository: 20,501 lines of Python, 45 modules, 1224 passing tests, MIT.</a:t>
+              <a:t>A public repository: 20,535 lines of Python, 45 modules, 1229 passing tests, MIT.</a:t>
             </a:r>
           </a:p>
           <a:p>

--- a/docs/investors/KAIROS_Investor_Deck.pptx
+++ b/docs/investors/KAIROS_Investor_Deck.pptx
@@ -4710,7 +4710,7 @@
                 <a:latin typeface="Consolas"/>
                 <a:ea typeface="Consolas"/>
               </a:rPr>
-              <a:t>python -m pytest tests -q        # 1229 tests</a:t>
+              <a:t>python -m pytest tests -q        # 1231 tests</a:t>
             </a:r>
           </a:p>
           <a:p>
@@ -5789,7 +5789,7 @@
                 <a:latin typeface="Consolas"/>
                 <a:ea typeface="Consolas"/>
               </a:rPr>
-              <a:t>20,535</a:t>
+              <a:t>20,542</a:t>
             </a:r>
           </a:p>
           <a:p>
@@ -6053,7 +6053,7 @@
                 <a:latin typeface="Consolas"/>
                 <a:ea typeface="Consolas"/>
               </a:rPr>
-              <a:t>1229</a:t>
+              <a:t>1231</a:t>
             </a:r>
           </a:p>
           <a:p>
@@ -8610,7 +8610,7 @@
                 <a:latin typeface="Segoe UI"/>
                 <a:ea typeface="Segoe UI"/>
               </a:rPr>
-              <a:t>A public repository: 20,535 lines of Python, 45 modules, 1229 passing tests, MIT.</a:t>
+              <a:t>A public repository: 20,542 lines of Python, 45 modules, 1231 passing tests, MIT.</a:t>
             </a:r>
           </a:p>
           <a:p>

--- a/docs/investors/KAIROS_Investor_Deck.pptx
+++ b/docs/investors/KAIROS_Investor_Deck.pptx
@@ -4710,7 +4710,7 @@
                 <a:latin typeface="Consolas"/>
                 <a:ea typeface="Consolas"/>
               </a:rPr>
-              <a:t>python -m pytest tests -q        # 1231 tests</a:t>
+              <a:t>python -m pytest tests -q        # 1236 tests</a:t>
             </a:r>
           </a:p>
           <a:p>
@@ -5789,7 +5789,7 @@
                 <a:latin typeface="Consolas"/>
                 <a:ea typeface="Consolas"/>
               </a:rPr>
-              <a:t>20,542</a:t>
+              <a:t>20,578</a:t>
             </a:r>
           </a:p>
           <a:p>
@@ -6053,7 +6053,7 @@
                 <a:latin typeface="Consolas"/>
                 <a:ea typeface="Consolas"/>
               </a:rPr>
-              <a:t>1231</a:t>
+              <a:t>1236</a:t>
             </a:r>
           </a:p>
           <a:p>
@@ -8610,7 +8610,7 @@
                 <a:latin typeface="Segoe UI"/>
                 <a:ea typeface="Segoe UI"/>
               </a:rPr>
-              <a:t>A public repository: 20,542 lines of Python, 45 modules, 1231 passing tests, MIT.</a:t>
+              <a:t>A public repository: 20,578 lines of Python, 45 modules, 1236 passing tests, MIT.</a:t>
             </a:r>
           </a:p>
           <a:p>

--- a/docs/investors/KAIROS_Investor_Deck.pptx
+++ b/docs/investors/KAIROS_Investor_Deck.pptx
@@ -4710,7 +4710,7 @@
                 <a:latin typeface="Consolas"/>
                 <a:ea typeface="Consolas"/>
               </a:rPr>
-              <a:t>python -m pytest tests -q        # 1236 tests</a:t>
+              <a:t>python -m pytest tests -q        # 1241 tests</a:t>
             </a:r>
           </a:p>
           <a:p>
@@ -5789,7 +5789,7 @@
                 <a:latin typeface="Consolas"/>
                 <a:ea typeface="Consolas"/>
               </a:rPr>
-              <a:t>20,578</a:t>
+              <a:t>20,611</a:t>
             </a:r>
           </a:p>
           <a:p>
@@ -6053,7 +6053,7 @@
                 <a:latin typeface="Consolas"/>
                 <a:ea typeface="Consolas"/>
               </a:rPr>
-              <a:t>1236</a:t>
+              <a:t>1241</a:t>
             </a:r>
           </a:p>
           <a:p>
@@ -8610,7 +8610,7 @@
                 <a:latin typeface="Segoe UI"/>
                 <a:ea typeface="Segoe UI"/>
               </a:rPr>
-              <a:t>A public repository: 20,578 lines of Python, 45 modules, 1236 passing tests, MIT.</a:t>
+              <a:t>A public repository: 20,611 lines of Python, 45 modules, 1241 passing tests, MIT.</a:t>
             </a:r>
           </a:p>
           <a:p>

--- a/docs/investors/KAIROS_Investor_Deck.pptx
+++ b/docs/investors/KAIROS_Investor_Deck.pptx
@@ -4710,7 +4710,7 @@
                 <a:latin typeface="Consolas"/>
                 <a:ea typeface="Consolas"/>
               </a:rPr>
-              <a:t>python -m pytest tests -q        # 1241 tests</a:t>
+              <a:t>python -m pytest tests -q        # 1245 tests</a:t>
             </a:r>
           </a:p>
           <a:p>
@@ -5789,7 +5789,7 @@
                 <a:latin typeface="Consolas"/>
                 <a:ea typeface="Consolas"/>
               </a:rPr>
-              <a:t>20,611</a:t>
+              <a:t>20,626</a:t>
             </a:r>
           </a:p>
           <a:p>
@@ -6053,7 +6053,7 @@
                 <a:latin typeface="Consolas"/>
                 <a:ea typeface="Consolas"/>
               </a:rPr>
-              <a:t>1241</a:t>
+              <a:t>1245</a:t>
             </a:r>
           </a:p>
           <a:p>
@@ -8610,7 +8610,7 @@
                 <a:latin typeface="Segoe UI"/>
                 <a:ea typeface="Segoe UI"/>
               </a:rPr>
-              <a:t>A public repository: 20,611 lines of Python, 45 modules, 1241 passing tests, MIT.</a:t>
+              <a:t>A public repository: 20,626 lines of Python, 45 modules, 1245 passing tests, MIT.</a:t>
             </a:r>
           </a:p>
           <a:p>

--- a/docs/investors/KAIROS_Investor_Deck.pptx
+++ b/docs/investors/KAIROS_Investor_Deck.pptx
@@ -4710,7 +4710,7 @@
                 <a:latin typeface="Consolas"/>
                 <a:ea typeface="Consolas"/>
               </a:rPr>
-              <a:t>python -m pytest tests -q        # 1245 tests</a:t>
+              <a:t>python -m pytest tests -q        # 1247 tests</a:t>
             </a:r>
           </a:p>
           <a:p>
@@ -5789,7 +5789,7 @@
                 <a:latin typeface="Consolas"/>
                 <a:ea typeface="Consolas"/>
               </a:rPr>
-              <a:t>20,626</a:t>
+              <a:t>20,646</a:t>
             </a:r>
           </a:p>
           <a:p>
@@ -6053,7 +6053,7 @@
                 <a:latin typeface="Consolas"/>
                 <a:ea typeface="Consolas"/>
               </a:rPr>
-              <a:t>1245</a:t>
+              <a:t>1247</a:t>
             </a:r>
           </a:p>
           <a:p>
@@ -8610,7 +8610,7 @@
                 <a:latin typeface="Segoe UI"/>
                 <a:ea typeface="Segoe UI"/>
               </a:rPr>
-              <a:t>A public repository: 20,626 lines of Python, 45 modules, 1245 passing tests, MIT.</a:t>
+              <a:t>A public repository: 20,646 lines of Python, 45 modules, 1247 passing tests, MIT.</a:t>
             </a:r>
           </a:p>
           <a:p>
